--- a/documents/Sprint_Review1_411_09.pptx
+++ b/documents/Sprint_Review1_411_09.pptx
@@ -1,35 +1,1634 @@
 
 <file path=ppt/presentation.xml><?xml version="1.0" encoding="utf-8"?>
-<p:presentation xmlns:a="http://schemas.openxmlformats.org/drawingml/2006/main" xmlns:p="http://schemas.openxmlformats.org/presentationml/2006/main" xmlns:r="http://schemas.openxmlformats.org/officeDocument/2006/relationships" xmlns:p14="http://schemas.microsoft.com/office/powerpoint/2010/main" xmlns:p15="http://schemas.microsoft.com/office/powerpoint/2012/main" xmlns:mc="http://schemas.openxmlformats.org/markup-compatibility/2006">
+<p:presentation xmlns:a="http://schemas.openxmlformats.org/drawingml/2006/main" xmlns:r="http://schemas.openxmlformats.org/officeDocument/2006/relationships" xmlns:p="http://schemas.openxmlformats.org/presentationml/2006/main" xmlns:m="http://schemas.openxmlformats.org/officeDocument/2006/math" xmlns:w="http://schemas.openxmlformats.org/wordprocessingml/2006/main">
   <p:sldMasterIdLst>
-    <p:sldMasterId id="2147483648" r:id="rId2"/>
+    <p:sldMasterId id="2147483648" r:id="rId1"/>
   </p:sldMasterIdLst>
+  <p:notesMasterIdLst>
+    <p:notesMasterId r:id="rId19"/>
+  </p:notesMasterIdLst>
   <p:sldIdLst>
-    <p:sldId id="256" r:id="rId3"/>
-    <p:sldId id="257" r:id="rId4"/>
-    <p:sldId id="258" r:id="rId5"/>
-    <p:sldId id="259" r:id="rId6"/>
-    <p:sldId id="260" r:id="rId7"/>
-    <p:sldId id="261" r:id="rId8"/>
-    <p:sldId id="262" r:id="rId9"/>
-    <p:sldId id="263" r:id="rId10"/>
-    <p:sldId id="264" r:id="rId11"/>
-    <p:sldId id="265" r:id="rId12"/>
-    <p:sldId id="266" r:id="rId13"/>
-    <p:sldId id="267" r:id="rId14"/>
-    <p:sldId id="268" r:id="rId15"/>
-    <p:sldId id="269" r:id="rId16"/>
+    <p:sldId id="256" r:id="rId4"/>
+    <p:sldId id="257" r:id="rId5"/>
+    <p:sldId id="258" r:id="rId6"/>
+    <p:sldId id="259" r:id="rId7"/>
+    <p:sldId id="260" r:id="rId8"/>
+    <p:sldId id="261" r:id="rId9"/>
+    <p:sldId id="262" r:id="rId10"/>
+    <p:sldId id="263" r:id="rId11"/>
+    <p:sldId id="264" r:id="rId12"/>
+    <p:sldId id="265" r:id="rId13"/>
+    <p:sldId id="266" r:id="rId14"/>
+    <p:sldId id="267" r:id="rId15"/>
+    <p:sldId id="268" r:id="rId16"/>
+    <p:sldId id="269" r:id="rId17"/>
+    <p:sldId id="270" r:id="rId18"/>
   </p:sldIdLst>
   <p:sldSz cx="12193588" cy="6858000"/>
   <p:notesSz cx="7559675" cy="10691813"/>
 </p:presentation>
 </file>
 
+<file path=ppt/notesMasters/notesMaster1.xml><?xml version="1.0" encoding="utf-8"?>
+<p:notesMaster xmlns:a="http://schemas.openxmlformats.org/drawingml/2006/main" xmlns:r="http://schemas.openxmlformats.org/officeDocument/2006/relationships" xmlns:p="http://schemas.openxmlformats.org/presentationml/2006/main">
+  <p:cSld name="">
+    <p:bg>
+      <p:bgRef idx="1001">
+        <a:schemeClr val="bg1"/>
+      </p:bgRef>
+    </p:bg>
+    <p:spTree>
+      <p:nvGrpSpPr>
+        <p:cNvPr id="1" name=""/>
+        <p:cNvGrpSpPr/>
+        <p:nvPr/>
+      </p:nvGrpSpPr>
+      <p:grpSpPr bwMode="auto">
+        <a:xfrm>
+          <a:off x="0" y="0"/>
+          <a:ext cx="0" cy="0"/>
+          <a:chOff x="0" y="0"/>
+          <a:chExt cx="0" cy="0"/>
+        </a:xfrm>
+      </p:grpSpPr>
+      <p:sp>
+        <p:nvSpPr>
+          <p:cNvPr id="2" name="Header Placeholder 1"/>
+          <p:cNvSpPr>
+            <a:spLocks noGrp="1"/>
+          </p:cNvSpPr>
+          <p:nvPr>
+            <p:ph type="hdr" sz="quarter"/>
+          </p:nvPr>
+        </p:nvSpPr>
+        <p:spPr bwMode="auto">
+          <a:xfrm>
+            <a:off x="0" y="0"/>
+            <a:ext cx="2971800" cy="458788"/>
+          </a:xfrm>
+          <a:prstGeom prst="rect">
+            <a:avLst/>
+          </a:prstGeom>
+        </p:spPr>
+        <p:txBody>
+          <a:bodyPr vert="horz" lIns="91440" tIns="45720" rIns="91440" bIns="45720" rtlCol="0" anchor="ctr"/>
+          <a:lstStyle>
+            <a:lvl1pPr algn="l">
+              <a:defRPr sz="1200"/>
+            </a:lvl1pPr>
+          </a:lstStyle>
+          <a:p>
+            <a:pPr>
+              <a:defRPr/>
+            </a:pPr>
+            <a:endParaRPr/>
+          </a:p>
+        </p:txBody>
+      </p:sp>
+      <p:sp>
+        <p:nvSpPr>
+          <p:cNvPr id="3" name="Date Placeholder 2"/>
+          <p:cNvSpPr>
+            <a:spLocks noGrp="1"/>
+          </p:cNvSpPr>
+          <p:nvPr>
+            <p:ph type="dt" idx="2"/>
+          </p:nvPr>
+        </p:nvSpPr>
+        <p:spPr bwMode="auto">
+          <a:xfrm>
+            <a:off x="3884613" y="0"/>
+            <a:ext cx="2971800" cy="458788"/>
+          </a:xfrm>
+          <a:prstGeom prst="rect">
+            <a:avLst/>
+          </a:prstGeom>
+        </p:spPr>
+        <p:txBody>
+          <a:bodyPr vert="horz" lIns="91440" tIns="45720" rIns="91440" bIns="45720" rtlCol="0" anchor="ctr"/>
+          <a:lstStyle>
+            <a:lvl1pPr algn="r">
+              <a:defRPr sz="1200"/>
+            </a:lvl1pPr>
+          </a:lstStyle>
+          <a:p>
+            <a:pPr>
+              <a:defRPr/>
+            </a:pPr>
+            <a:endParaRPr/>
+          </a:p>
+        </p:txBody>
+      </p:sp>
+      <p:sp>
+        <p:nvSpPr>
+          <p:cNvPr id="3" name="Date Placeholder 2"/>
+          <p:cNvSpPr>
+            <a:spLocks noGrp="1"/>
+          </p:cNvSpPr>
+          <p:nvPr>
+            <p:ph type="dt" idx="3"/>
+          </p:nvPr>
+        </p:nvSpPr>
+        <p:spPr bwMode="auto">
+          <a:xfrm>
+            <a:off x="3884613" y="0"/>
+            <a:ext cx="2971800" cy="458788"/>
+          </a:xfrm>
+          <a:prstGeom prst="rect">
+            <a:avLst/>
+          </a:prstGeom>
+        </p:spPr>
+        <p:txBody>
+          <a:bodyPr vert="horz" lIns="91440" tIns="45720" rIns="91440" bIns="45720" rtlCol="0" anchor="ctr"/>
+          <a:lstStyle>
+            <a:lvl1pPr algn="r">
+              <a:defRPr sz="1200"/>
+            </a:lvl1pPr>
+          </a:lstStyle>
+          <a:p>
+            <a:pPr>
+              <a:defRPr/>
+            </a:pPr>
+            <a:endParaRPr/>
+          </a:p>
+        </p:txBody>
+      </p:sp>
+      <p:sp>
+        <p:nvSpPr>
+          <p:cNvPr id="5" name="Notes Placeholder 4"/>
+          <p:cNvSpPr>
+            <a:spLocks noGrp="1"/>
+          </p:cNvSpPr>
+          <p:nvPr>
+            <p:ph type="body" sz="quarter" idx="1"/>
+          </p:nvPr>
+        </p:nvSpPr>
+        <p:spPr bwMode="auto">
+          <a:xfrm>
+            <a:off x="685800" y="4400550"/>
+            <a:ext cx="5486400" cy="3600450"/>
+          </a:xfrm>
+          <a:prstGeom prst="rect">
+            <a:avLst/>
+          </a:prstGeom>
+        </p:spPr>
+        <p:txBody>
+          <a:bodyPr vert="horz" lIns="91440" tIns="45720" rIns="91440" bIns="45720" rtlCol="0" anchor="ctr"/>
+          <a:lstStyle/>
+          <a:p>
+            <a:pPr>
+              <a:defRPr/>
+            </a:pPr>
+            <a:endParaRPr/>
+          </a:p>
+        </p:txBody>
+      </p:sp>
+      <p:sp>
+        <p:nvSpPr>
+          <p:cNvPr id="6" name="Footer Placeholder 5"/>
+          <p:cNvSpPr>
+            <a:spLocks noGrp="1"/>
+          </p:cNvSpPr>
+          <p:nvPr>
+            <p:ph type="ftr" sz="quarter" idx="4"/>
+          </p:nvPr>
+        </p:nvSpPr>
+        <p:spPr bwMode="auto">
+          <a:xfrm>
+            <a:off x="0" y="8685213"/>
+            <a:ext cx="2971800" cy="458787"/>
+          </a:xfrm>
+          <a:prstGeom prst="rect">
+            <a:avLst/>
+          </a:prstGeom>
+        </p:spPr>
+        <p:txBody>
+          <a:bodyPr vert="horz" lIns="91440" tIns="45720" rIns="91440" bIns="45720" rtlCol="0" anchor="b"/>
+          <a:lstStyle>
+            <a:lvl1pPr algn="l">
+              <a:defRPr sz="1200"/>
+            </a:lvl1pPr>
+          </a:lstStyle>
+          <a:p>
+            <a:pPr>
+              <a:defRPr/>
+            </a:pPr>
+            <a:endParaRPr/>
+          </a:p>
+        </p:txBody>
+      </p:sp>
+      <p:sp>
+        <p:nvSpPr>
+          <p:cNvPr id="7" name="Slide Number Placeholder 6"/>
+          <p:cNvSpPr>
+            <a:spLocks noGrp="1"/>
+          </p:cNvSpPr>
+          <p:nvPr>
+            <p:ph type="sldNum" sz="quarter" idx="10"/>
+          </p:nvPr>
+        </p:nvSpPr>
+        <p:spPr bwMode="auto">
+          <a:xfrm>
+            <a:off x="3884613" y="8685213"/>
+            <a:ext cx="2971800" cy="458787"/>
+          </a:xfrm>
+          <a:prstGeom prst="rect">
+            <a:avLst/>
+          </a:prstGeom>
+        </p:spPr>
+        <p:txBody>
+          <a:bodyPr vert="horz" lIns="91440" tIns="45720" rIns="91440" bIns="45720" rtlCol="0" anchor="b"/>
+          <a:lstStyle>
+            <a:lvl1pPr algn="r">
+              <a:defRPr sz="1200"/>
+            </a:lvl1pPr>
+          </a:lstStyle>
+          <a:p>
+            <a:pPr>
+              <a:defRPr/>
+            </a:pPr>
+            <a:endParaRPr/>
+          </a:p>
+        </p:txBody>
+      </p:sp>
+    </p:spTree>
+  </p:cSld>
+  <p:clrMap bg1="lt1" tx1="dk1" bg2="lt2" tx2="dk2" accent1="accent1" accent2="accent2" accent3="accent3" accent4="accent4" accent5="accent5" accent6="accent6" hlink="hlink" folHlink="folHlink"/>
+  <p:notesStyle>
+    <a:lvl1pPr marL="0" algn="l" defTabSz="914400">
+      <a:defRPr sz="1200">
+        <a:solidFill>
+          <a:schemeClr val="tx1"/>
+        </a:solidFill>
+        <a:latin typeface="+mn-lt"/>
+        <a:ea typeface="+mn-ea"/>
+        <a:cs typeface="+mn-cs"/>
+      </a:defRPr>
+    </a:lvl1pPr>
+    <a:lvl2pPr marL="457200" algn="l" defTabSz="914400">
+      <a:defRPr sz="1200">
+        <a:solidFill>
+          <a:schemeClr val="tx1"/>
+        </a:solidFill>
+        <a:latin typeface="+mn-lt"/>
+        <a:ea typeface="+mn-ea"/>
+        <a:cs typeface="+mn-cs"/>
+      </a:defRPr>
+    </a:lvl2pPr>
+    <a:lvl3pPr marL="914400" algn="l" defTabSz="914400">
+      <a:defRPr sz="1200">
+        <a:solidFill>
+          <a:schemeClr val="tx1"/>
+        </a:solidFill>
+        <a:latin typeface="+mn-lt"/>
+        <a:ea typeface="+mn-ea"/>
+        <a:cs typeface="+mn-cs"/>
+      </a:defRPr>
+    </a:lvl3pPr>
+    <a:lvl4pPr marL="1371600" algn="l" defTabSz="914400">
+      <a:defRPr sz="1200">
+        <a:solidFill>
+          <a:schemeClr val="tx1"/>
+        </a:solidFill>
+        <a:latin typeface="+mn-lt"/>
+        <a:ea typeface="+mn-ea"/>
+        <a:cs typeface="+mn-cs"/>
+      </a:defRPr>
+    </a:lvl4pPr>
+    <a:lvl5pPr marL="1828800" algn="l" defTabSz="914400">
+      <a:defRPr sz="1200">
+        <a:solidFill>
+          <a:schemeClr val="tx1"/>
+        </a:solidFill>
+        <a:latin typeface="+mn-lt"/>
+        <a:ea typeface="+mn-ea"/>
+        <a:cs typeface="+mn-cs"/>
+      </a:defRPr>
+    </a:lvl5pPr>
+    <a:lvl6pPr marL="2286000" algn="l" defTabSz="914400">
+      <a:defRPr sz="1200">
+        <a:solidFill>
+          <a:schemeClr val="tx1"/>
+        </a:solidFill>
+        <a:latin typeface="+mn-lt"/>
+        <a:ea typeface="+mn-ea"/>
+        <a:cs typeface="+mn-cs"/>
+      </a:defRPr>
+    </a:lvl6pPr>
+    <a:lvl7pPr marL="2743200" algn="l" defTabSz="914400">
+      <a:defRPr sz="1200">
+        <a:solidFill>
+          <a:schemeClr val="tx1"/>
+        </a:solidFill>
+        <a:latin typeface="+mn-lt"/>
+        <a:ea typeface="+mn-ea"/>
+        <a:cs typeface="+mn-cs"/>
+      </a:defRPr>
+    </a:lvl7pPr>
+    <a:lvl8pPr marL="3200400" algn="l" defTabSz="914400">
+      <a:defRPr sz="1200">
+        <a:solidFill>
+          <a:schemeClr val="tx1"/>
+        </a:solidFill>
+        <a:latin typeface="+mn-lt"/>
+        <a:ea typeface="+mn-ea"/>
+        <a:cs typeface="+mn-cs"/>
+      </a:defRPr>
+    </a:lvl8pPr>
+    <a:lvl9pPr marL="3657600" algn="l" defTabSz="914400">
+      <a:defRPr sz="1200">
+        <a:solidFill>
+          <a:schemeClr val="tx1"/>
+        </a:solidFill>
+        <a:latin typeface="+mn-lt"/>
+        <a:ea typeface="+mn-ea"/>
+        <a:cs typeface="+mn-cs"/>
+      </a:defRPr>
+    </a:lvl9pPr>
+  </p:notesStyle>
+</p:notesMaster>
+</file>
+
+<file path=ppt/notesSlides/notesSlide1.xml><?xml version="1.0" encoding="utf-8"?>
+<p:notes xmlns:a="http://schemas.openxmlformats.org/drawingml/2006/main" xmlns:r="http://schemas.openxmlformats.org/officeDocument/2006/relationships" xmlns:p="http://schemas.openxmlformats.org/presentationml/2006/main" xmlns:m="http://schemas.openxmlformats.org/officeDocument/2006/math" xmlns:w="http://schemas.openxmlformats.org/wordprocessingml/2006/main">
+  <p:cSld name="">
+    <p:spTree>
+      <p:nvGrpSpPr>
+        <p:cNvPr id="1" name=""/>
+        <p:cNvGrpSpPr/>
+        <p:nvPr/>
+      </p:nvGrpSpPr>
+      <p:grpSpPr bwMode="auto">
+        <a:xfrm>
+          <a:off x="0" y="0"/>
+          <a:ext cx="0" cy="0"/>
+          <a:chOff x="0" y="0"/>
+          <a:chExt cx="0" cy="0"/>
+        </a:xfrm>
+      </p:grpSpPr>
+      <p:sp>
+        <p:nvSpPr>
+          <p:cNvPr id="2" name="Slide Image Placeholder 1"/>
+          <p:cNvSpPr>
+            <a:spLocks noChangeAspect="1" noGrp="1" noRot="1"/>
+          </p:cNvSpPr>
+          <p:nvPr>
+            <p:ph type="sldImg"/>
+          </p:nvPr>
+        </p:nvSpPr>
+        <p:spPr bwMode="auto"/>
+      </p:sp>
+      <p:sp>
+        <p:nvSpPr>
+          <p:cNvPr id="3" name="Notes Placeholder 2"/>
+          <p:cNvSpPr>
+            <a:spLocks noGrp="1"/>
+          </p:cNvSpPr>
+          <p:nvPr>
+            <p:ph type="body" idx="1"/>
+          </p:nvPr>
+        </p:nvSpPr>
+        <p:spPr bwMode="auto"/>
+        <p:txBody>
+          <a:bodyPr/>
+          <a:lstStyle/>
+          <a:p>
+            <a:pPr>
+              <a:defRPr/>
+            </a:pPr>
+            <a:endParaRPr/>
+          </a:p>
+        </p:txBody>
+      </p:sp>
+      <p:sp>
+        <p:nvSpPr>
+          <p:cNvPr id="4" name="Slide Number Placeholder 3"/>
+          <p:cNvSpPr>
+            <a:spLocks noGrp="1"/>
+          </p:cNvSpPr>
+          <p:nvPr>
+            <p:ph type="sldNum" sz="quarter" idx="10"/>
+          </p:nvPr>
+        </p:nvSpPr>
+        <p:spPr bwMode="auto"/>
+        <p:txBody>
+          <a:bodyPr/>
+          <a:lstStyle/>
+          <a:p>
+            <a:pPr>
+              <a:defRPr/>
+            </a:pPr>
+            <a:fld id="{0FC0DDC4-7E5D-31EE-8147-7F1F2221BD90}" type="slidenum">
+              <a:rPr/>
+              <a:t/>
+            </a:fld>
+            <a:endParaRPr/>
+          </a:p>
+        </p:txBody>
+      </p:sp>
+    </p:spTree>
+  </p:cSld>
+  <p:clrMapOvr>
+    <a:masterClrMapping/>
+  </p:clrMapOvr>
+</p:notes>
+</file>
+
+<file path=ppt/notesSlides/notesSlide10.xml><?xml version="1.0" encoding="utf-8"?>
+<p:notes xmlns:a="http://schemas.openxmlformats.org/drawingml/2006/main" xmlns:r="http://schemas.openxmlformats.org/officeDocument/2006/relationships" xmlns:p="http://schemas.openxmlformats.org/presentationml/2006/main" xmlns:m="http://schemas.openxmlformats.org/officeDocument/2006/math" xmlns:w="http://schemas.openxmlformats.org/wordprocessingml/2006/main">
+  <p:cSld name="">
+    <p:spTree>
+      <p:nvGrpSpPr>
+        <p:cNvPr id="1" name=""/>
+        <p:cNvGrpSpPr/>
+        <p:nvPr/>
+      </p:nvGrpSpPr>
+      <p:grpSpPr bwMode="auto">
+        <a:xfrm>
+          <a:off x="0" y="0"/>
+          <a:ext cx="0" cy="0"/>
+          <a:chOff x="0" y="0"/>
+          <a:chExt cx="0" cy="0"/>
+        </a:xfrm>
+      </p:grpSpPr>
+      <p:sp>
+        <p:nvSpPr>
+          <p:cNvPr id="2" name="Slide Image Placeholder 1"/>
+          <p:cNvSpPr>
+            <a:spLocks noChangeAspect="1" noGrp="1" noRot="1"/>
+          </p:cNvSpPr>
+          <p:nvPr>
+            <p:ph type="sldImg"/>
+          </p:nvPr>
+        </p:nvSpPr>
+        <p:spPr bwMode="auto"/>
+      </p:sp>
+      <p:sp>
+        <p:nvSpPr>
+          <p:cNvPr id="3" name="Notes Placeholder 2"/>
+          <p:cNvSpPr>
+            <a:spLocks noGrp="1"/>
+          </p:cNvSpPr>
+          <p:nvPr>
+            <p:ph type="body" idx="1"/>
+          </p:nvPr>
+        </p:nvSpPr>
+        <p:spPr bwMode="auto"/>
+        <p:txBody>
+          <a:bodyPr/>
+          <a:lstStyle/>
+          <a:p>
+            <a:pPr>
+              <a:defRPr/>
+            </a:pPr>
+            <a:endParaRPr/>
+          </a:p>
+        </p:txBody>
+      </p:sp>
+      <p:sp>
+        <p:nvSpPr>
+          <p:cNvPr id="4" name="Slide Number Placeholder 3"/>
+          <p:cNvSpPr>
+            <a:spLocks noGrp="1"/>
+          </p:cNvSpPr>
+          <p:nvPr>
+            <p:ph type="sldNum" sz="quarter" idx="10"/>
+          </p:nvPr>
+        </p:nvSpPr>
+        <p:spPr bwMode="auto"/>
+        <p:txBody>
+          <a:bodyPr/>
+          <a:lstStyle/>
+          <a:p>
+            <a:pPr>
+              <a:defRPr/>
+            </a:pPr>
+            <a:fld id="{DF3825DF-4257-3B76-6C6C-BBB2CF6B4881}" type="slidenum">
+              <a:rPr/>
+              <a:t/>
+            </a:fld>
+            <a:endParaRPr/>
+          </a:p>
+        </p:txBody>
+      </p:sp>
+    </p:spTree>
+  </p:cSld>
+  <p:clrMapOvr>
+    <a:masterClrMapping/>
+  </p:clrMapOvr>
+</p:notes>
+</file>
+
+<file path=ppt/notesSlides/notesSlide11.xml><?xml version="1.0" encoding="utf-8"?>
+<p:notes xmlns:a="http://schemas.openxmlformats.org/drawingml/2006/main" xmlns:r="http://schemas.openxmlformats.org/officeDocument/2006/relationships" xmlns:p="http://schemas.openxmlformats.org/presentationml/2006/main" xmlns:m="http://schemas.openxmlformats.org/officeDocument/2006/math" xmlns:w="http://schemas.openxmlformats.org/wordprocessingml/2006/main">
+  <p:cSld name="">
+    <p:spTree>
+      <p:nvGrpSpPr>
+        <p:cNvPr id="1" name=""/>
+        <p:cNvGrpSpPr/>
+        <p:nvPr/>
+      </p:nvGrpSpPr>
+      <p:grpSpPr bwMode="auto">
+        <a:xfrm>
+          <a:off x="0" y="0"/>
+          <a:ext cx="0" cy="0"/>
+          <a:chOff x="0" y="0"/>
+          <a:chExt cx="0" cy="0"/>
+        </a:xfrm>
+      </p:grpSpPr>
+      <p:sp>
+        <p:nvSpPr>
+          <p:cNvPr id="2" name="Slide Image Placeholder 1"/>
+          <p:cNvSpPr>
+            <a:spLocks noChangeAspect="1" noGrp="1" noRot="1"/>
+          </p:cNvSpPr>
+          <p:nvPr>
+            <p:ph type="sldImg"/>
+          </p:nvPr>
+        </p:nvSpPr>
+        <p:spPr bwMode="auto"/>
+      </p:sp>
+      <p:sp>
+        <p:nvSpPr>
+          <p:cNvPr id="3" name="Notes Placeholder 2"/>
+          <p:cNvSpPr>
+            <a:spLocks noGrp="1"/>
+          </p:cNvSpPr>
+          <p:nvPr>
+            <p:ph type="body" idx="1"/>
+          </p:nvPr>
+        </p:nvSpPr>
+        <p:spPr bwMode="auto"/>
+        <p:txBody>
+          <a:bodyPr/>
+          <a:lstStyle/>
+          <a:p>
+            <a:pPr>
+              <a:defRPr/>
+            </a:pPr>
+            <a:endParaRPr/>
+          </a:p>
+        </p:txBody>
+      </p:sp>
+      <p:sp>
+        <p:nvSpPr>
+          <p:cNvPr id="4" name="Slide Number Placeholder 3"/>
+          <p:cNvSpPr>
+            <a:spLocks noGrp="1"/>
+          </p:cNvSpPr>
+          <p:nvPr>
+            <p:ph type="sldNum" sz="quarter" idx="10"/>
+          </p:nvPr>
+        </p:nvSpPr>
+        <p:spPr bwMode="auto"/>
+        <p:txBody>
+          <a:bodyPr/>
+          <a:lstStyle/>
+          <a:p>
+            <a:pPr>
+              <a:defRPr/>
+            </a:pPr>
+            <a:fld id="{6282C8BF-5EF9-2451-4234-8F60A99DF1BA}" type="slidenum">
+              <a:rPr/>
+              <a:t/>
+            </a:fld>
+            <a:endParaRPr/>
+          </a:p>
+        </p:txBody>
+      </p:sp>
+    </p:spTree>
+  </p:cSld>
+  <p:clrMapOvr>
+    <a:masterClrMapping/>
+  </p:clrMapOvr>
+</p:notes>
+</file>
+
+<file path=ppt/notesSlides/notesSlide12.xml><?xml version="1.0" encoding="utf-8"?>
+<p:notes xmlns:a="http://schemas.openxmlformats.org/drawingml/2006/main" xmlns:r="http://schemas.openxmlformats.org/officeDocument/2006/relationships" xmlns:p="http://schemas.openxmlformats.org/presentationml/2006/main" xmlns:m="http://schemas.openxmlformats.org/officeDocument/2006/math" xmlns:w="http://schemas.openxmlformats.org/wordprocessingml/2006/main">
+  <p:cSld name="">
+    <p:spTree>
+      <p:nvGrpSpPr>
+        <p:cNvPr id="1" name=""/>
+        <p:cNvGrpSpPr/>
+        <p:nvPr/>
+      </p:nvGrpSpPr>
+      <p:grpSpPr bwMode="auto">
+        <a:xfrm>
+          <a:off x="0" y="0"/>
+          <a:ext cx="0" cy="0"/>
+          <a:chOff x="0" y="0"/>
+          <a:chExt cx="0" cy="0"/>
+        </a:xfrm>
+      </p:grpSpPr>
+      <p:sp>
+        <p:nvSpPr>
+          <p:cNvPr id="2" name="Slide Image Placeholder 1"/>
+          <p:cNvSpPr>
+            <a:spLocks noChangeAspect="1" noGrp="1" noRot="1"/>
+          </p:cNvSpPr>
+          <p:nvPr>
+            <p:ph type="sldImg"/>
+          </p:nvPr>
+        </p:nvSpPr>
+        <p:spPr bwMode="auto"/>
+      </p:sp>
+      <p:sp>
+        <p:nvSpPr>
+          <p:cNvPr id="3" name="Notes Placeholder 2"/>
+          <p:cNvSpPr>
+            <a:spLocks noGrp="1"/>
+          </p:cNvSpPr>
+          <p:nvPr>
+            <p:ph type="body" idx="1"/>
+          </p:nvPr>
+        </p:nvSpPr>
+        <p:spPr bwMode="auto"/>
+        <p:txBody>
+          <a:bodyPr/>
+          <a:lstStyle/>
+          <a:p>
+            <a:pPr>
+              <a:defRPr/>
+            </a:pPr>
+            <a:endParaRPr/>
+          </a:p>
+        </p:txBody>
+      </p:sp>
+      <p:sp>
+        <p:nvSpPr>
+          <p:cNvPr id="4" name="Slide Number Placeholder 3"/>
+          <p:cNvSpPr>
+            <a:spLocks noGrp="1"/>
+          </p:cNvSpPr>
+          <p:nvPr>
+            <p:ph type="sldNum" sz="quarter" idx="10"/>
+          </p:nvPr>
+        </p:nvSpPr>
+        <p:spPr bwMode="auto"/>
+        <p:txBody>
+          <a:bodyPr/>
+          <a:lstStyle/>
+          <a:p>
+            <a:pPr>
+              <a:defRPr/>
+            </a:pPr>
+            <a:fld id="{34131140-20FE-78AB-E254-9740726DE79C}" type="slidenum">
+              <a:rPr/>
+              <a:t/>
+            </a:fld>
+            <a:endParaRPr/>
+          </a:p>
+        </p:txBody>
+      </p:sp>
+    </p:spTree>
+  </p:cSld>
+  <p:clrMapOvr>
+    <a:masterClrMapping/>
+  </p:clrMapOvr>
+</p:notes>
+</file>
+
+<file path=ppt/notesSlides/notesSlide13.xml><?xml version="1.0" encoding="utf-8"?>
+<p:notes xmlns:a="http://schemas.openxmlformats.org/drawingml/2006/main" xmlns:r="http://schemas.openxmlformats.org/officeDocument/2006/relationships" xmlns:p="http://schemas.openxmlformats.org/presentationml/2006/main" xmlns:m="http://schemas.openxmlformats.org/officeDocument/2006/math" xmlns:w="http://schemas.openxmlformats.org/wordprocessingml/2006/main">
+  <p:cSld name="">
+    <p:spTree>
+      <p:nvGrpSpPr>
+        <p:cNvPr id="1" name=""/>
+        <p:cNvGrpSpPr/>
+        <p:nvPr/>
+      </p:nvGrpSpPr>
+      <p:grpSpPr bwMode="auto">
+        <a:xfrm>
+          <a:off x="0" y="0"/>
+          <a:ext cx="0" cy="0"/>
+          <a:chOff x="0" y="0"/>
+          <a:chExt cx="0" cy="0"/>
+        </a:xfrm>
+      </p:grpSpPr>
+      <p:sp>
+        <p:nvSpPr>
+          <p:cNvPr id="2" name="Slide Image Placeholder 1"/>
+          <p:cNvSpPr>
+            <a:spLocks noChangeAspect="1" noGrp="1" noRot="1"/>
+          </p:cNvSpPr>
+          <p:nvPr>
+            <p:ph type="sldImg"/>
+          </p:nvPr>
+        </p:nvSpPr>
+        <p:spPr bwMode="auto"/>
+      </p:sp>
+      <p:sp>
+        <p:nvSpPr>
+          <p:cNvPr id="3" name="Notes Placeholder 2"/>
+          <p:cNvSpPr>
+            <a:spLocks noGrp="1"/>
+          </p:cNvSpPr>
+          <p:nvPr>
+            <p:ph type="body" idx="1"/>
+          </p:nvPr>
+        </p:nvSpPr>
+        <p:spPr bwMode="auto"/>
+        <p:txBody>
+          <a:bodyPr/>
+          <a:lstStyle/>
+          <a:p>
+            <a:pPr>
+              <a:defRPr/>
+            </a:pPr>
+            <a:endParaRPr/>
+          </a:p>
+        </p:txBody>
+      </p:sp>
+      <p:sp>
+        <p:nvSpPr>
+          <p:cNvPr id="4" name="Slide Number Placeholder 3"/>
+          <p:cNvSpPr>
+            <a:spLocks noGrp="1"/>
+          </p:cNvSpPr>
+          <p:nvPr>
+            <p:ph type="sldNum" sz="quarter" idx="10"/>
+          </p:nvPr>
+        </p:nvSpPr>
+        <p:spPr bwMode="auto"/>
+        <p:txBody>
+          <a:bodyPr/>
+          <a:lstStyle/>
+          <a:p>
+            <a:pPr>
+              <a:defRPr/>
+            </a:pPr>
+            <a:fld id="{47FA9F81-9281-3FD3-6949-F1206491BE04}" type="slidenum">
+              <a:rPr/>
+              <a:t/>
+            </a:fld>
+            <a:endParaRPr/>
+          </a:p>
+        </p:txBody>
+      </p:sp>
+    </p:spTree>
+  </p:cSld>
+  <p:clrMapOvr>
+    <a:masterClrMapping/>
+  </p:clrMapOvr>
+</p:notes>
+</file>
+
+<file path=ppt/notesSlides/notesSlide14.xml><?xml version="1.0" encoding="utf-8"?>
+<p:notes xmlns:a="http://schemas.openxmlformats.org/drawingml/2006/main" xmlns:r="http://schemas.openxmlformats.org/officeDocument/2006/relationships" xmlns:p="http://schemas.openxmlformats.org/presentationml/2006/main" xmlns:m="http://schemas.openxmlformats.org/officeDocument/2006/math" xmlns:w="http://schemas.openxmlformats.org/wordprocessingml/2006/main">
+  <p:cSld name="">
+    <p:spTree>
+      <p:nvGrpSpPr>
+        <p:cNvPr id="1" name=""/>
+        <p:cNvGrpSpPr/>
+        <p:nvPr/>
+      </p:nvGrpSpPr>
+      <p:grpSpPr bwMode="auto">
+        <a:xfrm>
+          <a:off x="0" y="0"/>
+          <a:ext cx="0" cy="0"/>
+          <a:chOff x="0" y="0"/>
+          <a:chExt cx="0" cy="0"/>
+        </a:xfrm>
+      </p:grpSpPr>
+      <p:sp>
+        <p:nvSpPr>
+          <p:cNvPr id="555094010" name="Slide Image Placeholder 1"/>
+          <p:cNvSpPr>
+            <a:spLocks noChangeAspect="1" noGrp="1" noRot="1"/>
+          </p:cNvSpPr>
+          <p:nvPr>
+            <p:ph type="sldImg"/>
+          </p:nvPr>
+        </p:nvSpPr>
+        <p:spPr bwMode="auto"/>
+      </p:sp>
+      <p:sp>
+        <p:nvSpPr>
+          <p:cNvPr id="1455673547" name="Notes Placeholder 2"/>
+          <p:cNvSpPr>
+            <a:spLocks noGrp="1"/>
+          </p:cNvSpPr>
+          <p:nvPr>
+            <p:ph type="body" idx="1"/>
+          </p:nvPr>
+        </p:nvSpPr>
+        <p:spPr bwMode="auto"/>
+        <p:txBody>
+          <a:bodyPr/>
+          <a:lstStyle/>
+          <a:p>
+            <a:pPr>
+              <a:defRPr/>
+            </a:pPr>
+            <a:endParaRPr/>
+          </a:p>
+        </p:txBody>
+      </p:sp>
+      <p:sp>
+        <p:nvSpPr>
+          <p:cNvPr id="1348715468" name="Slide Number Placeholder 3"/>
+          <p:cNvSpPr>
+            <a:spLocks noGrp="1"/>
+          </p:cNvSpPr>
+          <p:nvPr>
+            <p:ph type="sldNum" sz="quarter" idx="10"/>
+          </p:nvPr>
+        </p:nvSpPr>
+        <p:spPr bwMode="auto"/>
+        <p:txBody>
+          <a:bodyPr/>
+          <a:lstStyle/>
+          <a:p>
+            <a:pPr>
+              <a:defRPr/>
+            </a:pPr>
+            <a:fld id="{A32C585D-E3E7-7367-C304-07C672A21A8B}" type="slidenum">
+              <a:rPr/>
+              <a:t/>
+            </a:fld>
+            <a:endParaRPr/>
+          </a:p>
+        </p:txBody>
+      </p:sp>
+    </p:spTree>
+  </p:cSld>
+  <p:clrMapOvr>
+    <a:masterClrMapping/>
+  </p:clrMapOvr>
+</p:notes>
+</file>
+
+<file path=ppt/notesSlides/notesSlide15.xml><?xml version="1.0" encoding="utf-8"?>
+<p:notes xmlns:a="http://schemas.openxmlformats.org/drawingml/2006/main" xmlns:r="http://schemas.openxmlformats.org/officeDocument/2006/relationships" xmlns:p="http://schemas.openxmlformats.org/presentationml/2006/main" xmlns:m="http://schemas.openxmlformats.org/officeDocument/2006/math" xmlns:w="http://schemas.openxmlformats.org/wordprocessingml/2006/main">
+  <p:cSld name="">
+    <p:spTree>
+      <p:nvGrpSpPr>
+        <p:cNvPr id="1" name=""/>
+        <p:cNvGrpSpPr/>
+        <p:nvPr/>
+      </p:nvGrpSpPr>
+      <p:grpSpPr bwMode="auto">
+        <a:xfrm>
+          <a:off x="0" y="0"/>
+          <a:ext cx="0" cy="0"/>
+          <a:chOff x="0" y="0"/>
+          <a:chExt cx="0" cy="0"/>
+        </a:xfrm>
+      </p:grpSpPr>
+      <p:sp>
+        <p:nvSpPr>
+          <p:cNvPr id="2" name="Slide Image Placeholder 1"/>
+          <p:cNvSpPr>
+            <a:spLocks noChangeAspect="1" noGrp="1" noRot="1"/>
+          </p:cNvSpPr>
+          <p:nvPr>
+            <p:ph type="sldImg"/>
+          </p:nvPr>
+        </p:nvSpPr>
+        <p:spPr bwMode="auto"/>
+      </p:sp>
+      <p:sp>
+        <p:nvSpPr>
+          <p:cNvPr id="3" name="Notes Placeholder 2"/>
+          <p:cNvSpPr>
+            <a:spLocks noGrp="1"/>
+          </p:cNvSpPr>
+          <p:nvPr>
+            <p:ph type="body" idx="1"/>
+          </p:nvPr>
+        </p:nvSpPr>
+        <p:spPr bwMode="auto"/>
+        <p:txBody>
+          <a:bodyPr/>
+          <a:lstStyle/>
+          <a:p>
+            <a:pPr>
+              <a:defRPr/>
+            </a:pPr>
+            <a:endParaRPr/>
+          </a:p>
+        </p:txBody>
+      </p:sp>
+      <p:sp>
+        <p:nvSpPr>
+          <p:cNvPr id="4" name="Slide Number Placeholder 3"/>
+          <p:cNvSpPr>
+            <a:spLocks noGrp="1"/>
+          </p:cNvSpPr>
+          <p:nvPr>
+            <p:ph type="sldNum" sz="quarter" idx="10"/>
+          </p:nvPr>
+        </p:nvSpPr>
+        <p:spPr bwMode="auto"/>
+        <p:txBody>
+          <a:bodyPr/>
+          <a:lstStyle/>
+          <a:p>
+            <a:pPr>
+              <a:defRPr/>
+            </a:pPr>
+            <a:fld id="{0F8967A2-3A45-640E-EB4C-0D7537B4E467}" type="slidenum">
+              <a:rPr/>
+              <a:t/>
+            </a:fld>
+            <a:endParaRPr/>
+          </a:p>
+        </p:txBody>
+      </p:sp>
+    </p:spTree>
+  </p:cSld>
+  <p:clrMapOvr>
+    <a:masterClrMapping/>
+  </p:clrMapOvr>
+</p:notes>
+</file>
+
+<file path=ppt/notesSlides/notesSlide2.xml><?xml version="1.0" encoding="utf-8"?>
+<p:notes xmlns:a="http://schemas.openxmlformats.org/drawingml/2006/main" xmlns:r="http://schemas.openxmlformats.org/officeDocument/2006/relationships" xmlns:p="http://schemas.openxmlformats.org/presentationml/2006/main" xmlns:m="http://schemas.openxmlformats.org/officeDocument/2006/math" xmlns:w="http://schemas.openxmlformats.org/wordprocessingml/2006/main">
+  <p:cSld name="">
+    <p:spTree>
+      <p:nvGrpSpPr>
+        <p:cNvPr id="1" name=""/>
+        <p:cNvGrpSpPr/>
+        <p:nvPr/>
+      </p:nvGrpSpPr>
+      <p:grpSpPr bwMode="auto">
+        <a:xfrm>
+          <a:off x="0" y="0"/>
+          <a:ext cx="0" cy="0"/>
+          <a:chOff x="0" y="0"/>
+          <a:chExt cx="0" cy="0"/>
+        </a:xfrm>
+      </p:grpSpPr>
+      <p:sp>
+        <p:nvSpPr>
+          <p:cNvPr id="2" name="Slide Image Placeholder 1"/>
+          <p:cNvSpPr>
+            <a:spLocks noChangeAspect="1" noGrp="1" noRot="1"/>
+          </p:cNvSpPr>
+          <p:nvPr>
+            <p:ph type="sldImg"/>
+          </p:nvPr>
+        </p:nvSpPr>
+        <p:spPr bwMode="auto"/>
+      </p:sp>
+      <p:sp>
+        <p:nvSpPr>
+          <p:cNvPr id="3" name="Notes Placeholder 2"/>
+          <p:cNvSpPr>
+            <a:spLocks noGrp="1"/>
+          </p:cNvSpPr>
+          <p:nvPr>
+            <p:ph type="body" idx="1"/>
+          </p:nvPr>
+        </p:nvSpPr>
+        <p:spPr bwMode="auto"/>
+        <p:txBody>
+          <a:bodyPr/>
+          <a:lstStyle/>
+          <a:p>
+            <a:pPr>
+              <a:defRPr/>
+            </a:pPr>
+            <a:endParaRPr/>
+          </a:p>
+        </p:txBody>
+      </p:sp>
+      <p:sp>
+        <p:nvSpPr>
+          <p:cNvPr id="4" name="Slide Number Placeholder 3"/>
+          <p:cNvSpPr>
+            <a:spLocks noGrp="1"/>
+          </p:cNvSpPr>
+          <p:nvPr>
+            <p:ph type="sldNum" sz="quarter" idx="10"/>
+          </p:nvPr>
+        </p:nvSpPr>
+        <p:spPr bwMode="auto"/>
+        <p:txBody>
+          <a:bodyPr/>
+          <a:lstStyle/>
+          <a:p>
+            <a:pPr>
+              <a:defRPr/>
+            </a:pPr>
+            <a:fld id="{9DE650A6-496F-B598-E0A6-0C3A7645A106}" type="slidenum">
+              <a:rPr/>
+              <a:t/>
+            </a:fld>
+            <a:endParaRPr/>
+          </a:p>
+        </p:txBody>
+      </p:sp>
+    </p:spTree>
+  </p:cSld>
+  <p:clrMapOvr>
+    <a:masterClrMapping/>
+  </p:clrMapOvr>
+</p:notes>
+</file>
+
+<file path=ppt/notesSlides/notesSlide3.xml><?xml version="1.0" encoding="utf-8"?>
+<p:notes xmlns:a="http://schemas.openxmlformats.org/drawingml/2006/main" xmlns:r="http://schemas.openxmlformats.org/officeDocument/2006/relationships" xmlns:p="http://schemas.openxmlformats.org/presentationml/2006/main" xmlns:m="http://schemas.openxmlformats.org/officeDocument/2006/math" xmlns:w="http://schemas.openxmlformats.org/wordprocessingml/2006/main">
+  <p:cSld name="">
+    <p:spTree>
+      <p:nvGrpSpPr>
+        <p:cNvPr id="1" name=""/>
+        <p:cNvGrpSpPr/>
+        <p:nvPr/>
+      </p:nvGrpSpPr>
+      <p:grpSpPr bwMode="auto">
+        <a:xfrm>
+          <a:off x="0" y="0"/>
+          <a:ext cx="0" cy="0"/>
+          <a:chOff x="0" y="0"/>
+          <a:chExt cx="0" cy="0"/>
+        </a:xfrm>
+      </p:grpSpPr>
+      <p:sp>
+        <p:nvSpPr>
+          <p:cNvPr id="2" name="Slide Image Placeholder 1"/>
+          <p:cNvSpPr>
+            <a:spLocks noChangeAspect="1" noGrp="1" noRot="1"/>
+          </p:cNvSpPr>
+          <p:nvPr>
+            <p:ph type="sldImg"/>
+          </p:nvPr>
+        </p:nvSpPr>
+        <p:spPr bwMode="auto"/>
+      </p:sp>
+      <p:sp>
+        <p:nvSpPr>
+          <p:cNvPr id="3" name="Notes Placeholder 2"/>
+          <p:cNvSpPr>
+            <a:spLocks noGrp="1"/>
+          </p:cNvSpPr>
+          <p:nvPr>
+            <p:ph type="body" idx="1"/>
+          </p:nvPr>
+        </p:nvSpPr>
+        <p:spPr bwMode="auto"/>
+        <p:txBody>
+          <a:bodyPr/>
+          <a:lstStyle/>
+          <a:p>
+            <a:pPr>
+              <a:defRPr/>
+            </a:pPr>
+            <a:endParaRPr/>
+          </a:p>
+        </p:txBody>
+      </p:sp>
+      <p:sp>
+        <p:nvSpPr>
+          <p:cNvPr id="4" name="Slide Number Placeholder 3"/>
+          <p:cNvSpPr>
+            <a:spLocks noGrp="1"/>
+          </p:cNvSpPr>
+          <p:nvPr>
+            <p:ph type="sldNum" sz="quarter" idx="10"/>
+          </p:nvPr>
+        </p:nvSpPr>
+        <p:spPr bwMode="auto"/>
+        <p:txBody>
+          <a:bodyPr/>
+          <a:lstStyle/>
+          <a:p>
+            <a:pPr>
+              <a:defRPr/>
+            </a:pPr>
+            <a:fld id="{A0E1898A-04D7-4D94-F41F-5A009D546828}" type="slidenum">
+              <a:rPr/>
+              <a:t/>
+            </a:fld>
+            <a:endParaRPr/>
+          </a:p>
+        </p:txBody>
+      </p:sp>
+    </p:spTree>
+  </p:cSld>
+  <p:clrMapOvr>
+    <a:masterClrMapping/>
+  </p:clrMapOvr>
+</p:notes>
+</file>
+
+<file path=ppt/notesSlides/notesSlide4.xml><?xml version="1.0" encoding="utf-8"?>
+<p:notes xmlns:a="http://schemas.openxmlformats.org/drawingml/2006/main" xmlns:r="http://schemas.openxmlformats.org/officeDocument/2006/relationships" xmlns:p="http://schemas.openxmlformats.org/presentationml/2006/main" xmlns:m="http://schemas.openxmlformats.org/officeDocument/2006/math" xmlns:w="http://schemas.openxmlformats.org/wordprocessingml/2006/main">
+  <p:cSld name="">
+    <p:spTree>
+      <p:nvGrpSpPr>
+        <p:cNvPr id="1" name=""/>
+        <p:cNvGrpSpPr/>
+        <p:nvPr/>
+      </p:nvGrpSpPr>
+      <p:grpSpPr bwMode="auto">
+        <a:xfrm>
+          <a:off x="0" y="0"/>
+          <a:ext cx="0" cy="0"/>
+          <a:chOff x="0" y="0"/>
+          <a:chExt cx="0" cy="0"/>
+        </a:xfrm>
+      </p:grpSpPr>
+      <p:sp>
+        <p:nvSpPr>
+          <p:cNvPr id="2" name="Slide Image Placeholder 1"/>
+          <p:cNvSpPr>
+            <a:spLocks noChangeAspect="1" noGrp="1" noRot="1"/>
+          </p:cNvSpPr>
+          <p:nvPr>
+            <p:ph type="sldImg"/>
+          </p:nvPr>
+        </p:nvSpPr>
+        <p:spPr bwMode="auto"/>
+      </p:sp>
+      <p:sp>
+        <p:nvSpPr>
+          <p:cNvPr id="3" name="Notes Placeholder 2"/>
+          <p:cNvSpPr>
+            <a:spLocks noGrp="1"/>
+          </p:cNvSpPr>
+          <p:nvPr>
+            <p:ph type="body" idx="1"/>
+          </p:nvPr>
+        </p:nvSpPr>
+        <p:spPr bwMode="auto"/>
+        <p:txBody>
+          <a:bodyPr/>
+          <a:lstStyle/>
+          <a:p>
+            <a:pPr>
+              <a:defRPr/>
+            </a:pPr>
+            <a:endParaRPr/>
+          </a:p>
+        </p:txBody>
+      </p:sp>
+      <p:sp>
+        <p:nvSpPr>
+          <p:cNvPr id="4" name="Slide Number Placeholder 3"/>
+          <p:cNvSpPr>
+            <a:spLocks noGrp="1"/>
+          </p:cNvSpPr>
+          <p:nvPr>
+            <p:ph type="sldNum" sz="quarter" idx="10"/>
+          </p:nvPr>
+        </p:nvSpPr>
+        <p:spPr bwMode="auto"/>
+        <p:txBody>
+          <a:bodyPr/>
+          <a:lstStyle/>
+          <a:p>
+            <a:pPr>
+              <a:defRPr/>
+            </a:pPr>
+            <a:fld id="{F502E6EE-F05F-33EA-7CDB-B4B4CDC42AB0}" type="slidenum">
+              <a:rPr/>
+              <a:t/>
+            </a:fld>
+            <a:endParaRPr/>
+          </a:p>
+        </p:txBody>
+      </p:sp>
+    </p:spTree>
+  </p:cSld>
+  <p:clrMapOvr>
+    <a:masterClrMapping/>
+  </p:clrMapOvr>
+</p:notes>
+</file>
+
+<file path=ppt/notesSlides/notesSlide5.xml><?xml version="1.0" encoding="utf-8"?>
+<p:notes xmlns:a="http://schemas.openxmlformats.org/drawingml/2006/main" xmlns:r="http://schemas.openxmlformats.org/officeDocument/2006/relationships" xmlns:p="http://schemas.openxmlformats.org/presentationml/2006/main" xmlns:m="http://schemas.openxmlformats.org/officeDocument/2006/math" xmlns:w="http://schemas.openxmlformats.org/wordprocessingml/2006/main">
+  <p:cSld name="">
+    <p:spTree>
+      <p:nvGrpSpPr>
+        <p:cNvPr id="1" name=""/>
+        <p:cNvGrpSpPr/>
+        <p:nvPr/>
+      </p:nvGrpSpPr>
+      <p:grpSpPr bwMode="auto">
+        <a:xfrm>
+          <a:off x="0" y="0"/>
+          <a:ext cx="0" cy="0"/>
+          <a:chOff x="0" y="0"/>
+          <a:chExt cx="0" cy="0"/>
+        </a:xfrm>
+      </p:grpSpPr>
+      <p:sp>
+        <p:nvSpPr>
+          <p:cNvPr id="2" name="Slide Image Placeholder 1"/>
+          <p:cNvSpPr>
+            <a:spLocks noChangeAspect="1" noGrp="1" noRot="1"/>
+          </p:cNvSpPr>
+          <p:nvPr>
+            <p:ph type="sldImg"/>
+          </p:nvPr>
+        </p:nvSpPr>
+        <p:spPr bwMode="auto"/>
+      </p:sp>
+      <p:sp>
+        <p:nvSpPr>
+          <p:cNvPr id="3" name="Notes Placeholder 2"/>
+          <p:cNvSpPr>
+            <a:spLocks noGrp="1"/>
+          </p:cNvSpPr>
+          <p:nvPr>
+            <p:ph type="body" idx="1"/>
+          </p:nvPr>
+        </p:nvSpPr>
+        <p:spPr bwMode="auto"/>
+        <p:txBody>
+          <a:bodyPr/>
+          <a:lstStyle/>
+          <a:p>
+            <a:pPr>
+              <a:defRPr/>
+            </a:pPr>
+            <a:endParaRPr/>
+          </a:p>
+        </p:txBody>
+      </p:sp>
+      <p:sp>
+        <p:nvSpPr>
+          <p:cNvPr id="4" name="Slide Number Placeholder 3"/>
+          <p:cNvSpPr>
+            <a:spLocks noGrp="1"/>
+          </p:cNvSpPr>
+          <p:nvPr>
+            <p:ph type="sldNum" sz="quarter" idx="10"/>
+          </p:nvPr>
+        </p:nvSpPr>
+        <p:spPr bwMode="auto"/>
+        <p:txBody>
+          <a:bodyPr/>
+          <a:lstStyle/>
+          <a:p>
+            <a:pPr>
+              <a:defRPr/>
+            </a:pPr>
+            <a:fld id="{8EA2A34C-C113-A84B-C83C-4FC70F21F2D6}" type="slidenum">
+              <a:rPr/>
+              <a:t/>
+            </a:fld>
+            <a:endParaRPr/>
+          </a:p>
+        </p:txBody>
+      </p:sp>
+    </p:spTree>
+  </p:cSld>
+  <p:clrMapOvr>
+    <a:masterClrMapping/>
+  </p:clrMapOvr>
+</p:notes>
+</file>
+
+<file path=ppt/notesSlides/notesSlide6.xml><?xml version="1.0" encoding="utf-8"?>
+<p:notes xmlns:a="http://schemas.openxmlformats.org/drawingml/2006/main" xmlns:r="http://schemas.openxmlformats.org/officeDocument/2006/relationships" xmlns:p="http://schemas.openxmlformats.org/presentationml/2006/main" xmlns:m="http://schemas.openxmlformats.org/officeDocument/2006/math" xmlns:w="http://schemas.openxmlformats.org/wordprocessingml/2006/main">
+  <p:cSld name="">
+    <p:spTree>
+      <p:nvGrpSpPr>
+        <p:cNvPr id="1" name=""/>
+        <p:cNvGrpSpPr/>
+        <p:nvPr/>
+      </p:nvGrpSpPr>
+      <p:grpSpPr bwMode="auto">
+        <a:xfrm>
+          <a:off x="0" y="0"/>
+          <a:ext cx="0" cy="0"/>
+          <a:chOff x="0" y="0"/>
+          <a:chExt cx="0" cy="0"/>
+        </a:xfrm>
+      </p:grpSpPr>
+      <p:sp>
+        <p:nvSpPr>
+          <p:cNvPr id="2" name="Slide Image Placeholder 1"/>
+          <p:cNvSpPr>
+            <a:spLocks noChangeAspect="1" noGrp="1" noRot="1"/>
+          </p:cNvSpPr>
+          <p:nvPr>
+            <p:ph type="sldImg"/>
+          </p:nvPr>
+        </p:nvSpPr>
+        <p:spPr bwMode="auto"/>
+      </p:sp>
+      <p:sp>
+        <p:nvSpPr>
+          <p:cNvPr id="3" name="Notes Placeholder 2"/>
+          <p:cNvSpPr>
+            <a:spLocks noGrp="1"/>
+          </p:cNvSpPr>
+          <p:nvPr>
+            <p:ph type="body" idx="1"/>
+          </p:nvPr>
+        </p:nvSpPr>
+        <p:spPr bwMode="auto"/>
+        <p:txBody>
+          <a:bodyPr/>
+          <a:lstStyle/>
+          <a:p>
+            <a:pPr>
+              <a:defRPr/>
+            </a:pPr>
+            <a:endParaRPr/>
+          </a:p>
+        </p:txBody>
+      </p:sp>
+      <p:sp>
+        <p:nvSpPr>
+          <p:cNvPr id="4" name="Slide Number Placeholder 3"/>
+          <p:cNvSpPr>
+            <a:spLocks noGrp="1"/>
+          </p:cNvSpPr>
+          <p:nvPr>
+            <p:ph type="sldNum" sz="quarter" idx="10"/>
+          </p:nvPr>
+        </p:nvSpPr>
+        <p:spPr bwMode="auto"/>
+        <p:txBody>
+          <a:bodyPr/>
+          <a:lstStyle/>
+          <a:p>
+            <a:pPr>
+              <a:defRPr/>
+            </a:pPr>
+            <a:fld id="{EBF5CC0F-77FC-6ACF-5654-588659F4BFB9}" type="slidenum">
+              <a:rPr/>
+              <a:t/>
+            </a:fld>
+            <a:endParaRPr/>
+          </a:p>
+        </p:txBody>
+      </p:sp>
+    </p:spTree>
+  </p:cSld>
+  <p:clrMapOvr>
+    <a:masterClrMapping/>
+  </p:clrMapOvr>
+</p:notes>
+</file>
+
+<file path=ppt/notesSlides/notesSlide7.xml><?xml version="1.0" encoding="utf-8"?>
+<p:notes xmlns:a="http://schemas.openxmlformats.org/drawingml/2006/main" xmlns:r="http://schemas.openxmlformats.org/officeDocument/2006/relationships" xmlns:p="http://schemas.openxmlformats.org/presentationml/2006/main" xmlns:m="http://schemas.openxmlformats.org/officeDocument/2006/math" xmlns:w="http://schemas.openxmlformats.org/wordprocessingml/2006/main">
+  <p:cSld name="">
+    <p:spTree>
+      <p:nvGrpSpPr>
+        <p:cNvPr id="1" name=""/>
+        <p:cNvGrpSpPr/>
+        <p:nvPr/>
+      </p:nvGrpSpPr>
+      <p:grpSpPr bwMode="auto">
+        <a:xfrm>
+          <a:off x="0" y="0"/>
+          <a:ext cx="0" cy="0"/>
+          <a:chOff x="0" y="0"/>
+          <a:chExt cx="0" cy="0"/>
+        </a:xfrm>
+      </p:grpSpPr>
+      <p:sp>
+        <p:nvSpPr>
+          <p:cNvPr id="2" name="Slide Image Placeholder 1"/>
+          <p:cNvSpPr>
+            <a:spLocks noChangeAspect="1" noGrp="1" noRot="1"/>
+          </p:cNvSpPr>
+          <p:nvPr>
+            <p:ph type="sldImg"/>
+          </p:nvPr>
+        </p:nvSpPr>
+        <p:spPr bwMode="auto"/>
+      </p:sp>
+      <p:sp>
+        <p:nvSpPr>
+          <p:cNvPr id="3" name="Notes Placeholder 2"/>
+          <p:cNvSpPr>
+            <a:spLocks noGrp="1"/>
+          </p:cNvSpPr>
+          <p:nvPr>
+            <p:ph type="body" idx="1"/>
+          </p:nvPr>
+        </p:nvSpPr>
+        <p:spPr bwMode="auto"/>
+        <p:txBody>
+          <a:bodyPr/>
+          <a:lstStyle/>
+          <a:p>
+            <a:pPr>
+              <a:defRPr/>
+            </a:pPr>
+            <a:endParaRPr/>
+          </a:p>
+        </p:txBody>
+      </p:sp>
+      <p:sp>
+        <p:nvSpPr>
+          <p:cNvPr id="4" name="Slide Number Placeholder 3"/>
+          <p:cNvSpPr>
+            <a:spLocks noGrp="1"/>
+          </p:cNvSpPr>
+          <p:nvPr>
+            <p:ph type="sldNum" sz="quarter" idx="10"/>
+          </p:nvPr>
+        </p:nvSpPr>
+        <p:spPr bwMode="auto"/>
+        <p:txBody>
+          <a:bodyPr/>
+          <a:lstStyle/>
+          <a:p>
+            <a:pPr>
+              <a:defRPr/>
+            </a:pPr>
+            <a:fld id="{C9E3596F-B2B9-67A1-91DB-C4B3F16B2046}" type="slidenum">
+              <a:rPr/>
+              <a:t/>
+            </a:fld>
+            <a:endParaRPr/>
+          </a:p>
+        </p:txBody>
+      </p:sp>
+    </p:spTree>
+  </p:cSld>
+  <p:clrMapOvr>
+    <a:masterClrMapping/>
+  </p:clrMapOvr>
+</p:notes>
+</file>
+
+<file path=ppt/notesSlides/notesSlide8.xml><?xml version="1.0" encoding="utf-8"?>
+<p:notes xmlns:a="http://schemas.openxmlformats.org/drawingml/2006/main" xmlns:r="http://schemas.openxmlformats.org/officeDocument/2006/relationships" xmlns:p="http://schemas.openxmlformats.org/presentationml/2006/main" xmlns:m="http://schemas.openxmlformats.org/officeDocument/2006/math" xmlns:w="http://schemas.openxmlformats.org/wordprocessingml/2006/main">
+  <p:cSld name="">
+    <p:spTree>
+      <p:nvGrpSpPr>
+        <p:cNvPr id="1" name=""/>
+        <p:cNvGrpSpPr/>
+        <p:nvPr/>
+      </p:nvGrpSpPr>
+      <p:grpSpPr bwMode="auto">
+        <a:xfrm>
+          <a:off x="0" y="0"/>
+          <a:ext cx="0" cy="0"/>
+          <a:chOff x="0" y="0"/>
+          <a:chExt cx="0" cy="0"/>
+        </a:xfrm>
+      </p:grpSpPr>
+      <p:sp>
+        <p:nvSpPr>
+          <p:cNvPr id="2" name="Slide Image Placeholder 1"/>
+          <p:cNvSpPr>
+            <a:spLocks noChangeAspect="1" noGrp="1" noRot="1"/>
+          </p:cNvSpPr>
+          <p:nvPr>
+            <p:ph type="sldImg"/>
+          </p:nvPr>
+        </p:nvSpPr>
+        <p:spPr bwMode="auto"/>
+      </p:sp>
+      <p:sp>
+        <p:nvSpPr>
+          <p:cNvPr id="3" name="Notes Placeholder 2"/>
+          <p:cNvSpPr>
+            <a:spLocks noGrp="1"/>
+          </p:cNvSpPr>
+          <p:nvPr>
+            <p:ph type="body" idx="1"/>
+          </p:nvPr>
+        </p:nvSpPr>
+        <p:spPr bwMode="auto"/>
+        <p:txBody>
+          <a:bodyPr/>
+          <a:lstStyle/>
+          <a:p>
+            <a:pPr>
+              <a:defRPr/>
+            </a:pPr>
+            <a:endParaRPr/>
+          </a:p>
+        </p:txBody>
+      </p:sp>
+      <p:sp>
+        <p:nvSpPr>
+          <p:cNvPr id="4" name="Slide Number Placeholder 3"/>
+          <p:cNvSpPr>
+            <a:spLocks noGrp="1"/>
+          </p:cNvSpPr>
+          <p:nvPr>
+            <p:ph type="sldNum" sz="quarter" idx="10"/>
+          </p:nvPr>
+        </p:nvSpPr>
+        <p:spPr bwMode="auto"/>
+        <p:txBody>
+          <a:bodyPr/>
+          <a:lstStyle/>
+          <a:p>
+            <a:pPr>
+              <a:defRPr/>
+            </a:pPr>
+            <a:fld id="{03E210FD-F25D-13A0-A259-2018D4FA56D5}" type="slidenum">
+              <a:rPr/>
+              <a:t/>
+            </a:fld>
+            <a:endParaRPr/>
+          </a:p>
+        </p:txBody>
+      </p:sp>
+    </p:spTree>
+  </p:cSld>
+  <p:clrMapOvr>
+    <a:masterClrMapping/>
+  </p:clrMapOvr>
+</p:notes>
+</file>
+
+<file path=ppt/notesSlides/notesSlide9.xml><?xml version="1.0" encoding="utf-8"?>
+<p:notes xmlns:a="http://schemas.openxmlformats.org/drawingml/2006/main" xmlns:r="http://schemas.openxmlformats.org/officeDocument/2006/relationships" xmlns:p="http://schemas.openxmlformats.org/presentationml/2006/main" xmlns:m="http://schemas.openxmlformats.org/officeDocument/2006/math" xmlns:w="http://schemas.openxmlformats.org/wordprocessingml/2006/main">
+  <p:cSld name="">
+    <p:spTree>
+      <p:nvGrpSpPr>
+        <p:cNvPr id="1" name=""/>
+        <p:cNvGrpSpPr/>
+        <p:nvPr/>
+      </p:nvGrpSpPr>
+      <p:grpSpPr bwMode="auto">
+        <a:xfrm>
+          <a:off x="0" y="0"/>
+          <a:ext cx="0" cy="0"/>
+          <a:chOff x="0" y="0"/>
+          <a:chExt cx="0" cy="0"/>
+        </a:xfrm>
+      </p:grpSpPr>
+      <p:sp>
+        <p:nvSpPr>
+          <p:cNvPr id="2" name="Slide Image Placeholder 1"/>
+          <p:cNvSpPr>
+            <a:spLocks noChangeAspect="1" noGrp="1" noRot="1"/>
+          </p:cNvSpPr>
+          <p:nvPr>
+            <p:ph type="sldImg"/>
+          </p:nvPr>
+        </p:nvSpPr>
+        <p:spPr bwMode="auto"/>
+      </p:sp>
+      <p:sp>
+        <p:nvSpPr>
+          <p:cNvPr id="3" name="Notes Placeholder 2"/>
+          <p:cNvSpPr>
+            <a:spLocks noGrp="1"/>
+          </p:cNvSpPr>
+          <p:nvPr>
+            <p:ph type="body" idx="1"/>
+          </p:nvPr>
+        </p:nvSpPr>
+        <p:spPr bwMode="auto"/>
+        <p:txBody>
+          <a:bodyPr/>
+          <a:lstStyle/>
+          <a:p>
+            <a:pPr>
+              <a:defRPr/>
+            </a:pPr>
+            <a:endParaRPr/>
+          </a:p>
+        </p:txBody>
+      </p:sp>
+      <p:sp>
+        <p:nvSpPr>
+          <p:cNvPr id="4" name="Slide Number Placeholder 3"/>
+          <p:cNvSpPr>
+            <a:spLocks noGrp="1"/>
+          </p:cNvSpPr>
+          <p:nvPr>
+            <p:ph type="sldNum" sz="quarter" idx="10"/>
+          </p:nvPr>
+        </p:nvSpPr>
+        <p:spPr bwMode="auto"/>
+        <p:txBody>
+          <a:bodyPr/>
+          <a:lstStyle/>
+          <a:p>
+            <a:pPr>
+              <a:defRPr/>
+            </a:pPr>
+            <a:fld id="{50B4417C-BFFC-63C2-4F44-ECB2DFEE33F7}" type="slidenum">
+              <a:rPr/>
+              <a:t/>
+            </a:fld>
+            <a:endParaRPr/>
+          </a:p>
+        </p:txBody>
+      </p:sp>
+    </p:spTree>
+  </p:cSld>
+  <p:clrMapOvr>
+    <a:masterClrMapping/>
+  </p:clrMapOvr>
+</p:notes>
+</file>
+
 <file path=ppt/slideLayouts/slideLayout1.xml><?xml version="1.0" encoding="utf-8"?>
-<p:sldLayout xmlns:a="http://schemas.openxmlformats.org/drawingml/2006/main" xmlns:p="http://schemas.openxmlformats.org/presentationml/2006/main" xmlns:r="http://schemas.openxmlformats.org/officeDocument/2006/relationships" xmlns:p14="http://schemas.microsoft.com/office/powerpoint/2010/main" xmlns:p15="http://schemas.microsoft.com/office/powerpoint/2012/main" xmlns:mc="http://schemas.openxmlformats.org/markup-compatibility/2006" type="tx" preserve="1">
+<p:sldLayout xmlns:a="http://schemas.openxmlformats.org/drawingml/2006/main" xmlns:r="http://schemas.openxmlformats.org/officeDocument/2006/relationships" xmlns:p="http://schemas.openxmlformats.org/presentationml/2006/main" xmlns:m="http://schemas.openxmlformats.org/officeDocument/2006/math" xmlns:w="http://schemas.openxmlformats.org/wordprocessingml/2006/main" matchingName="" preserve="1" showMasterPhAnim="0" showMasterSp="1" type="tx" userDrawn="1">
   <p:cSld name="Default">
     <p:bg>
-      <p:bgPr>
+      <p:bgPr shadeToTitle="0">
         <a:solidFill>
           <a:srgbClr val="FFFFFF"/>
         </a:solidFill>
@@ -41,7 +1640,7 @@
         <p:cNvGrpSpPr/>
         <p:nvPr/>
       </p:nvGrpSpPr>
-      <p:grpSpPr>
+      <p:grpSpPr bwMode="auto">
         <a:xfrm>
           <a:off x="0" y="0"/>
           <a:ext cx="0" cy="0"/>
@@ -51,14 +1650,14 @@
       </p:grpSpPr>
       <p:sp>
         <p:nvSpPr>
-          <p:cNvPr id="2" name=""/>
+          <p:cNvPr id="347622828" name=""/>
           <p:cNvSpPr/>
           <p:nvPr/>
         </p:nvSpPr>
-        <p:spPr>
+        <p:spPr bwMode="auto">
           <a:xfrm rot="5400000">
             <a:off x="865080" y="348840"/>
-            <a:ext cx="144720" cy="703440"/>
+            <a:ext cx="144719" cy="703440"/>
           </a:xfrm>
           <a:prstGeom prst="rect">
             <a:avLst/>
@@ -95,7 +1694,7 @@
                 <a:tab pos="2695680" algn="l"/>
                 <a:tab pos="3144960" algn="l"/>
                 <a:tab pos="3594240" algn="l"/>
-                <a:tab pos="4043520" algn="l"/>
+                <a:tab pos="4043519" algn="l"/>
                 <a:tab pos="4492800" algn="l"/>
                 <a:tab pos="4941720" algn="l"/>
                 <a:tab pos="5391000" algn="l"/>
@@ -108,13 +1707,12 @@
                 <a:tab pos="8535960" algn="l"/>
                 <a:tab pos="8985240" algn="l"/>
               </a:tabLst>
+              <a:defRPr/>
             </a:pPr>
             <a:endParaRPr lang="en-US" sz="1800" b="0" u="none" strike="noStrike">
               <a:solidFill>
                 <a:srgbClr val="000000"/>
               </a:solidFill>
-              <a:effectLst/>
-              <a:uFillTx/>
               <a:latin typeface="Arial"/>
             </a:endParaRPr>
           </a:p>
@@ -122,11 +1720,11 @@
       </p:sp>
       <p:sp>
         <p:nvSpPr>
-          <p:cNvPr id="3" name=""/>
+          <p:cNvPr id="894980216" name=""/>
           <p:cNvSpPr/>
           <p:nvPr/>
         </p:nvSpPr>
-        <p:spPr>
+        <p:spPr bwMode="auto">
           <a:xfrm flipV="1">
             <a:off x="577800" y="4497840"/>
             <a:ext cx="11033280" cy="17640"/>
@@ -166,7 +1764,7 @@
                 <a:tab pos="2695680" algn="l"/>
                 <a:tab pos="3144960" algn="l"/>
                 <a:tab pos="3594240" algn="l"/>
-                <a:tab pos="4043520" algn="l"/>
+                <a:tab pos="4043519" algn="l"/>
                 <a:tab pos="4492800" algn="l"/>
                 <a:tab pos="4941720" algn="l"/>
                 <a:tab pos="5391000" algn="l"/>
@@ -179,13 +1777,12 @@
                 <a:tab pos="8535960" algn="l"/>
                 <a:tab pos="8985240" algn="l"/>
               </a:tabLst>
+              <a:defRPr/>
             </a:pPr>
             <a:endParaRPr lang="en-US" sz="1800" b="0" u="none" strike="noStrike">
               <a:solidFill>
                 <a:srgbClr val="000000"/>
               </a:solidFill>
-              <a:effectLst/>
-              <a:uFillTx/>
               <a:latin typeface="Arial"/>
             </a:endParaRPr>
           </a:p>
@@ -193,7 +1790,7 @@
       </p:sp>
       <p:sp>
         <p:nvSpPr>
-          <p:cNvPr id="4" name="PlaceHolder 1"/>
+          <p:cNvPr id="774558546" name="PlaceHolder 1"/>
           <p:cNvSpPr>
             <a:spLocks noGrp="1"/>
           </p:cNvSpPr>
@@ -201,7 +1798,7 @@
             <p:ph type="title"/>
           </p:nvPr>
         </p:nvSpPr>
-        <p:spPr>
+        <p:spPr bwMode="auto">
           <a:xfrm>
             <a:off x="576000" y="2138400"/>
             <a:ext cx="11032920" cy="1141200"/>
@@ -234,7 +1831,7 @@
                 <a:tab pos="2695680" algn="l"/>
                 <a:tab pos="3144960" algn="l"/>
                 <a:tab pos="3594240" algn="l"/>
-                <a:tab pos="4043520" algn="l"/>
+                <a:tab pos="4043519" algn="l"/>
                 <a:tab pos="4492800" algn="l"/>
                 <a:tab pos="4941720" algn="l"/>
                 <a:tab pos="5391000" algn="l"/>
@@ -251,8 +1848,6 @@
                 <a:solidFill>
                   <a:srgbClr val="000000"/>
                 </a:solidFill>
-                <a:effectLst/>
-                <a:uFillTx/>
                 <a:latin typeface="Arial"/>
               </a:defRPr>
             </a:lvl1pPr>
@@ -273,7 +1868,7 @@
                 <a:tab pos="2695680" algn="l"/>
                 <a:tab pos="3144960" algn="l"/>
                 <a:tab pos="3594240" algn="l"/>
-                <a:tab pos="4043520" algn="l"/>
+                <a:tab pos="4043519" algn="l"/>
                 <a:tab pos="4492800" algn="l"/>
                 <a:tab pos="4941720" algn="l"/>
                 <a:tab pos="5391000" algn="l"/>
@@ -286,14 +1881,13 @@
                 <a:tab pos="8535960" algn="l"/>
                 <a:tab pos="8985240" algn="l"/>
               </a:tabLst>
+              <a:defRPr/>
             </a:pPr>
             <a:r>
               <a:rPr lang="en-US" sz="4400" b="0" u="none" strike="noStrike">
                 <a:solidFill>
                   <a:srgbClr val="000000"/>
                 </a:solidFill>
-                <a:effectLst/>
-                <a:uFillTx/>
                 <a:latin typeface="Arial"/>
               </a:rPr>
               <a:t>Click to edit the title text format</a:t>
@@ -302,8 +1896,6 @@
               <a:solidFill>
                 <a:srgbClr val="000000"/>
               </a:solidFill>
-              <a:effectLst/>
-              <a:uFillTx/>
               <a:latin typeface="Arial"/>
             </a:endParaRPr>
           </a:p>
@@ -311,7 +1903,7 @@
       </p:sp>
       <p:sp>
         <p:nvSpPr>
-          <p:cNvPr id="5" name="PlaceHolder 2"/>
+          <p:cNvPr id="1015712108" name="PlaceHolder 2"/>
           <p:cNvSpPr>
             <a:spLocks noGrp="1"/>
           </p:cNvSpPr>
@@ -319,7 +1911,7 @@
             <p:ph type="body"/>
           </p:nvPr>
         </p:nvSpPr>
-        <p:spPr>
+        <p:spPr bwMode="auto">
           <a:xfrm>
             <a:off x="609480" y="1604880"/>
             <a:ext cx="10969920" cy="3973680"/>
@@ -354,7 +1946,7 @@
                 <a:tab pos="2695680" algn="l"/>
                 <a:tab pos="3144960" algn="l"/>
                 <a:tab pos="3594240" algn="l"/>
-                <a:tab pos="4043520" algn="l"/>
+                <a:tab pos="4043519" algn="l"/>
                 <a:tab pos="4492800" algn="l"/>
                 <a:tab pos="4941720" algn="l"/>
                 <a:tab pos="5391000" algn="l"/>
@@ -371,8 +1963,6 @@
                 <a:solidFill>
                   <a:srgbClr val="000000"/>
                 </a:solidFill>
-                <a:effectLst/>
-                <a:uFillTx/>
                 <a:latin typeface="Arial"/>
               </a:defRPr>
             </a:lvl1pPr>
@@ -398,7 +1988,7 @@
                 <a:tab pos="2695680" algn="l"/>
                 <a:tab pos="3144960" algn="l"/>
                 <a:tab pos="3594240" algn="l"/>
-                <a:tab pos="4043520" algn="l"/>
+                <a:tab pos="4043519" algn="l"/>
                 <a:tab pos="4492800" algn="l"/>
                 <a:tab pos="4941720" algn="l"/>
                 <a:tab pos="5391000" algn="l"/>
@@ -415,8 +2005,6 @@
                 <a:solidFill>
                   <a:srgbClr val="000000"/>
                 </a:solidFill>
-                <a:effectLst/>
-                <a:uFillTx/>
                 <a:latin typeface="Arial"/>
               </a:defRPr>
             </a:lvl2pPr>
@@ -442,7 +2030,7 @@
                 <a:tab pos="2695680" algn="l"/>
                 <a:tab pos="3144960" algn="l"/>
                 <a:tab pos="3594240" algn="l"/>
-                <a:tab pos="4043520" algn="l"/>
+                <a:tab pos="4043519" algn="l"/>
                 <a:tab pos="4492800" algn="l"/>
                 <a:tab pos="4941720" algn="l"/>
                 <a:tab pos="5391000" algn="l"/>
@@ -459,8 +2047,6 @@
                 <a:solidFill>
                   <a:srgbClr val="000000"/>
                 </a:solidFill>
-                <a:effectLst/>
-                <a:uFillTx/>
                 <a:latin typeface="Arial"/>
               </a:defRPr>
             </a:lvl3pPr>
@@ -486,7 +2072,7 @@
                 <a:tab pos="2695680" algn="l"/>
                 <a:tab pos="3144960" algn="l"/>
                 <a:tab pos="3594240" algn="l"/>
-                <a:tab pos="4043520" algn="l"/>
+                <a:tab pos="4043519" algn="l"/>
                 <a:tab pos="4492800" algn="l"/>
                 <a:tab pos="4941720" algn="l"/>
                 <a:tab pos="5391000" algn="l"/>
@@ -503,8 +2089,6 @@
                 <a:solidFill>
                   <a:srgbClr val="000000"/>
                 </a:solidFill>
-                <a:effectLst/>
-                <a:uFillTx/>
                 <a:latin typeface="Arial"/>
               </a:defRPr>
             </a:lvl4pPr>
@@ -530,7 +2114,7 @@
                 <a:tab pos="2695680" algn="l"/>
                 <a:tab pos="3144960" algn="l"/>
                 <a:tab pos="3594240" algn="l"/>
-                <a:tab pos="4043520" algn="l"/>
+                <a:tab pos="4043519" algn="l"/>
                 <a:tab pos="4492800" algn="l"/>
                 <a:tab pos="4941720" algn="l"/>
                 <a:tab pos="5391000" algn="l"/>
@@ -547,8 +2131,6 @@
                 <a:solidFill>
                   <a:srgbClr val="000000"/>
                 </a:solidFill>
-                <a:effectLst/>
-                <a:uFillTx/>
                 <a:latin typeface="Arial"/>
               </a:defRPr>
             </a:lvl5pPr>
@@ -574,7 +2156,7 @@
                 <a:tab pos="2695680" algn="l"/>
                 <a:tab pos="3144960" algn="l"/>
                 <a:tab pos="3594240" algn="l"/>
-                <a:tab pos="4043520" algn="l"/>
+                <a:tab pos="4043519" algn="l"/>
                 <a:tab pos="4492800" algn="l"/>
                 <a:tab pos="4941720" algn="l"/>
                 <a:tab pos="5391000" algn="l"/>
@@ -591,8 +2173,6 @@
                 <a:solidFill>
                   <a:srgbClr val="000000"/>
                 </a:solidFill>
-                <a:effectLst/>
-                <a:uFillTx/>
                 <a:latin typeface="Arial"/>
               </a:defRPr>
             </a:lvl6pPr>
@@ -618,7 +2198,7 @@
                 <a:tab pos="2695680" algn="l"/>
                 <a:tab pos="3144960" algn="l"/>
                 <a:tab pos="3594240" algn="l"/>
-                <a:tab pos="4043520" algn="l"/>
+                <a:tab pos="4043519" algn="l"/>
                 <a:tab pos="4492800" algn="l"/>
                 <a:tab pos="4941720" algn="l"/>
                 <a:tab pos="5391000" algn="l"/>
@@ -635,8 +2215,6 @@
                 <a:solidFill>
                   <a:srgbClr val="000000"/>
                 </a:solidFill>
-                <a:effectLst/>
-                <a:uFillTx/>
                 <a:latin typeface="Arial"/>
               </a:defRPr>
             </a:lvl7pPr>
@@ -659,7 +2237,7 @@
                 <a:tab pos="2695680" algn="l"/>
                 <a:tab pos="3144960" algn="l"/>
                 <a:tab pos="3594240" algn="l"/>
-                <a:tab pos="4043520" algn="l"/>
+                <a:tab pos="4043519" algn="l"/>
                 <a:tab pos="4492800" algn="l"/>
                 <a:tab pos="4941720" algn="l"/>
                 <a:tab pos="5391000" algn="l"/>
@@ -672,14 +2250,13 @@
                 <a:tab pos="8535960" algn="l"/>
                 <a:tab pos="8985240" algn="l"/>
               </a:tabLst>
+              <a:defRPr/>
             </a:pPr>
             <a:r>
               <a:rPr lang="en-US" sz="3200" b="0" u="none" strike="noStrike">
                 <a:solidFill>
                   <a:srgbClr val="000000"/>
                 </a:solidFill>
-                <a:effectLst/>
-                <a:uFillTx/>
                 <a:latin typeface="Arial"/>
               </a:rPr>
               <a:t>Click to edit the outline text format</a:t>
@@ -688,8 +2265,6 @@
               <a:solidFill>
                 <a:srgbClr val="000000"/>
               </a:solidFill>
-              <a:effectLst/>
-              <a:uFillTx/>
               <a:latin typeface="Arial"/>
             </a:endParaRPr>
           </a:p>
@@ -716,7 +2291,7 @@
                 <a:tab pos="2695680" algn="l"/>
                 <a:tab pos="3144960" algn="l"/>
                 <a:tab pos="3594240" algn="l"/>
-                <a:tab pos="4043520" algn="l"/>
+                <a:tab pos="4043519" algn="l"/>
                 <a:tab pos="4492800" algn="l"/>
                 <a:tab pos="4941720" algn="l"/>
                 <a:tab pos="5391000" algn="l"/>
@@ -729,14 +2304,13 @@
                 <a:tab pos="8535960" algn="l"/>
                 <a:tab pos="8985240" algn="l"/>
               </a:tabLst>
+              <a:defRPr/>
             </a:pPr>
             <a:r>
               <a:rPr lang="en-US" sz="3200" b="0" u="none" strike="noStrike">
                 <a:solidFill>
                   <a:srgbClr val="000000"/>
                 </a:solidFill>
-                <a:effectLst/>
-                <a:uFillTx/>
                 <a:latin typeface="Arial"/>
               </a:rPr>
               <a:t>Second Outline Level</a:t>
@@ -745,8 +2319,6 @@
               <a:solidFill>
                 <a:srgbClr val="000000"/>
               </a:solidFill>
-              <a:effectLst/>
-              <a:uFillTx/>
               <a:latin typeface="Arial"/>
             </a:endParaRPr>
           </a:p>
@@ -773,7 +2345,7 @@
                 <a:tab pos="2695680" algn="l"/>
                 <a:tab pos="3144960" algn="l"/>
                 <a:tab pos="3594240" algn="l"/>
-                <a:tab pos="4043520" algn="l"/>
+                <a:tab pos="4043519" algn="l"/>
                 <a:tab pos="4492800" algn="l"/>
                 <a:tab pos="4941720" algn="l"/>
                 <a:tab pos="5391000" algn="l"/>
@@ -786,14 +2358,13 @@
                 <a:tab pos="8535960" algn="l"/>
                 <a:tab pos="8985240" algn="l"/>
               </a:tabLst>
+              <a:defRPr/>
             </a:pPr>
             <a:r>
               <a:rPr lang="en-US" sz="3200" b="0" u="none" strike="noStrike">
                 <a:solidFill>
                   <a:srgbClr val="000000"/>
                 </a:solidFill>
-                <a:effectLst/>
-                <a:uFillTx/>
                 <a:latin typeface="Arial"/>
               </a:rPr>
               <a:t>Third Outline Level</a:t>
@@ -802,8 +2373,6 @@
               <a:solidFill>
                 <a:srgbClr val="000000"/>
               </a:solidFill>
-              <a:effectLst/>
-              <a:uFillTx/>
               <a:latin typeface="Arial"/>
             </a:endParaRPr>
           </a:p>
@@ -830,7 +2399,7 @@
                 <a:tab pos="2695680" algn="l"/>
                 <a:tab pos="3144960" algn="l"/>
                 <a:tab pos="3594240" algn="l"/>
-                <a:tab pos="4043520" algn="l"/>
+                <a:tab pos="4043519" algn="l"/>
                 <a:tab pos="4492800" algn="l"/>
                 <a:tab pos="4941720" algn="l"/>
                 <a:tab pos="5391000" algn="l"/>
@@ -843,14 +2412,13 @@
                 <a:tab pos="8535960" algn="l"/>
                 <a:tab pos="8985240" algn="l"/>
               </a:tabLst>
+              <a:defRPr/>
             </a:pPr>
             <a:r>
               <a:rPr lang="en-US" sz="3200" b="0" u="none" strike="noStrike">
                 <a:solidFill>
                   <a:srgbClr val="000000"/>
                 </a:solidFill>
-                <a:effectLst/>
-                <a:uFillTx/>
                 <a:latin typeface="Arial"/>
               </a:rPr>
               <a:t>Fourth Outline Level</a:t>
@@ -859,8 +2427,6 @@
               <a:solidFill>
                 <a:srgbClr val="000000"/>
               </a:solidFill>
-              <a:effectLst/>
-              <a:uFillTx/>
               <a:latin typeface="Arial"/>
             </a:endParaRPr>
           </a:p>
@@ -887,7 +2453,7 @@
                 <a:tab pos="2695680" algn="l"/>
                 <a:tab pos="3144960" algn="l"/>
                 <a:tab pos="3594240" algn="l"/>
-                <a:tab pos="4043520" algn="l"/>
+                <a:tab pos="4043519" algn="l"/>
                 <a:tab pos="4492800" algn="l"/>
                 <a:tab pos="4941720" algn="l"/>
                 <a:tab pos="5391000" algn="l"/>
@@ -900,14 +2466,13 @@
                 <a:tab pos="8535960" algn="l"/>
                 <a:tab pos="8985240" algn="l"/>
               </a:tabLst>
+              <a:defRPr/>
             </a:pPr>
             <a:r>
               <a:rPr lang="en-US" sz="3200" b="0" u="none" strike="noStrike">
                 <a:solidFill>
                   <a:srgbClr val="000000"/>
                 </a:solidFill>
-                <a:effectLst/>
-                <a:uFillTx/>
                 <a:latin typeface="Arial"/>
               </a:rPr>
               <a:t>Fifth Outline Level</a:t>
@@ -916,8 +2481,6 @@
               <a:solidFill>
                 <a:srgbClr val="000000"/>
               </a:solidFill>
-              <a:effectLst/>
-              <a:uFillTx/>
               <a:latin typeface="Arial"/>
             </a:endParaRPr>
           </a:p>
@@ -944,7 +2507,7 @@
                 <a:tab pos="2695680" algn="l"/>
                 <a:tab pos="3144960" algn="l"/>
                 <a:tab pos="3594240" algn="l"/>
-                <a:tab pos="4043520" algn="l"/>
+                <a:tab pos="4043519" algn="l"/>
                 <a:tab pos="4492800" algn="l"/>
                 <a:tab pos="4941720" algn="l"/>
                 <a:tab pos="5391000" algn="l"/>
@@ -957,14 +2520,13 @@
                 <a:tab pos="8535960" algn="l"/>
                 <a:tab pos="8985240" algn="l"/>
               </a:tabLst>
+              <a:defRPr/>
             </a:pPr>
             <a:r>
               <a:rPr lang="en-US" sz="3200" b="0" u="none" strike="noStrike">
                 <a:solidFill>
                   <a:srgbClr val="000000"/>
                 </a:solidFill>
-                <a:effectLst/>
-                <a:uFillTx/>
                 <a:latin typeface="Arial"/>
               </a:rPr>
               <a:t>Sixth Outline Level</a:t>
@@ -973,8 +2535,6 @@
               <a:solidFill>
                 <a:srgbClr val="000000"/>
               </a:solidFill>
-              <a:effectLst/>
-              <a:uFillTx/>
               <a:latin typeface="Arial"/>
             </a:endParaRPr>
           </a:p>
@@ -1001,7 +2561,7 @@
                 <a:tab pos="2695680" algn="l"/>
                 <a:tab pos="3144960" algn="l"/>
                 <a:tab pos="3594240" algn="l"/>
-                <a:tab pos="4043520" algn="l"/>
+                <a:tab pos="4043519" algn="l"/>
                 <a:tab pos="4492800" algn="l"/>
                 <a:tab pos="4941720" algn="l"/>
                 <a:tab pos="5391000" algn="l"/>
@@ -1014,14 +2574,13 @@
                 <a:tab pos="8535960" algn="l"/>
                 <a:tab pos="8985240" algn="l"/>
               </a:tabLst>
+              <a:defRPr/>
             </a:pPr>
             <a:r>
               <a:rPr lang="en-US" sz="3200" b="0" u="none" strike="noStrike">
                 <a:solidFill>
                   <a:srgbClr val="000000"/>
                 </a:solidFill>
-                <a:effectLst/>
-                <a:uFillTx/>
                 <a:latin typeface="Arial"/>
               </a:rPr>
               <a:t>Seventh Outline Level</a:t>
@@ -1030,8 +2589,6 @@
               <a:solidFill>
                 <a:srgbClr val="000000"/>
               </a:solidFill>
-              <a:effectLst/>
-              <a:uFillTx/>
               <a:latin typeface="Arial"/>
             </a:endParaRPr>
           </a:p>
@@ -1039,14 +2596,17 @@
       </p:sp>
     </p:spTree>
   </p:cSld>
+  <p:clrMapOvr>
+    <a:masterClrMapping/>
+  </p:clrMapOvr>
 </p:sldLayout>
 </file>
 
 <file path=ppt/slideLayouts/slideLayout2.xml><?xml version="1.0" encoding="utf-8"?>
-<p:sldLayout xmlns:a="http://schemas.openxmlformats.org/drawingml/2006/main" xmlns:p="http://schemas.openxmlformats.org/presentationml/2006/main" xmlns:r="http://schemas.openxmlformats.org/officeDocument/2006/relationships" xmlns:p14="http://schemas.microsoft.com/office/powerpoint/2010/main" xmlns:p15="http://schemas.microsoft.com/office/powerpoint/2012/main" xmlns:mc="http://schemas.openxmlformats.org/markup-compatibility/2006" type="blank" preserve="1">
+<p:sldLayout xmlns:a="http://schemas.openxmlformats.org/drawingml/2006/main" xmlns:r="http://schemas.openxmlformats.org/officeDocument/2006/relationships" xmlns:p="http://schemas.openxmlformats.org/presentationml/2006/main" xmlns:m="http://schemas.openxmlformats.org/officeDocument/2006/math" xmlns:w="http://schemas.openxmlformats.org/wordprocessingml/2006/main" matchingName="" preserve="1" showMasterPhAnim="0" showMasterSp="1" type="blank" userDrawn="1">
   <p:cSld name="Title1">
     <p:bg>
-      <p:bgPr>
+      <p:bgPr shadeToTitle="0">
         <a:solidFill>
           <a:srgbClr val="FFFFFF"/>
         </a:solidFill>
@@ -1058,7 +2618,7 @@
         <p:cNvGrpSpPr/>
         <p:nvPr/>
       </p:nvGrpSpPr>
-      <p:grpSpPr>
+      <p:grpSpPr bwMode="auto">
         <a:xfrm>
           <a:off x="0" y="0"/>
           <a:ext cx="0" cy="0"/>
@@ -1068,11 +2628,11 @@
       </p:grpSpPr>
       <p:sp>
         <p:nvSpPr>
-          <p:cNvPr id="6" name=""/>
+          <p:cNvPr id="1015337527" name=""/>
           <p:cNvSpPr/>
           <p:nvPr/>
         </p:nvSpPr>
-        <p:spPr>
+        <p:spPr bwMode="auto">
           <a:xfrm>
             <a:off x="558720" y="0"/>
             <a:ext cx="11166480" cy="2017800"/>
@@ -1115,7 +2675,7 @@
                 <a:tab pos="2695680" algn="l"/>
                 <a:tab pos="3144960" algn="l"/>
                 <a:tab pos="3594240" algn="l"/>
-                <a:tab pos="4043520" algn="l"/>
+                <a:tab pos="4043519" algn="l"/>
                 <a:tab pos="4492800" algn="l"/>
                 <a:tab pos="4941720" algn="l"/>
                 <a:tab pos="5391000" algn="l"/>
@@ -1128,13 +2688,12 @@
                 <a:tab pos="8535960" algn="l"/>
                 <a:tab pos="8985240" algn="l"/>
               </a:tabLst>
+              <a:defRPr/>
             </a:pPr>
             <a:endParaRPr lang="en-US" sz="1800" b="0" u="none" strike="noStrike">
               <a:solidFill>
                 <a:srgbClr val="000000"/>
               </a:solidFill>
-              <a:effectLst/>
-              <a:uFillTx/>
               <a:latin typeface="Arial"/>
             </a:endParaRPr>
           </a:p>
@@ -1142,11 +2701,11 @@
       </p:sp>
       <p:sp>
         <p:nvSpPr>
-          <p:cNvPr id="7" name=""/>
+          <p:cNvPr id="1608789005" name=""/>
           <p:cNvSpPr/>
           <p:nvPr/>
         </p:nvSpPr>
-        <p:spPr>
+        <p:spPr bwMode="auto">
           <a:xfrm>
             <a:off x="566640" y="0"/>
             <a:ext cx="11155320" cy="2011320"/>
@@ -1186,7 +2745,7 @@
                 <a:tab pos="2695680" algn="l"/>
                 <a:tab pos="3144960" algn="l"/>
                 <a:tab pos="3594240" algn="l"/>
-                <a:tab pos="4043520" algn="l"/>
+                <a:tab pos="4043519" algn="l"/>
                 <a:tab pos="4492800" algn="l"/>
                 <a:tab pos="4941720" algn="l"/>
                 <a:tab pos="5391000" algn="l"/>
@@ -1199,13 +2758,12 @@
                 <a:tab pos="8535960" algn="l"/>
                 <a:tab pos="8985240" algn="l"/>
               </a:tabLst>
+              <a:defRPr/>
             </a:pPr>
             <a:endParaRPr lang="en-US" sz="1800" b="0" u="none" strike="noStrike">
               <a:solidFill>
                 <a:srgbClr val="000000"/>
               </a:solidFill>
-              <a:effectLst/>
-              <a:uFillTx/>
               <a:latin typeface="Arial"/>
             </a:endParaRPr>
           </a:p>
@@ -1213,11 +2771,11 @@
       </p:sp>
       <p:sp>
         <p:nvSpPr>
-          <p:cNvPr id="8" name=""/>
+          <p:cNvPr id="394459072" name=""/>
           <p:cNvSpPr/>
           <p:nvPr/>
         </p:nvSpPr>
-        <p:spPr>
+        <p:spPr bwMode="auto">
           <a:xfrm>
             <a:off x="498600" y="787320"/>
             <a:ext cx="126720" cy="703440"/>
@@ -1257,7 +2815,7 @@
                 <a:tab pos="2695680" algn="l"/>
                 <a:tab pos="3144960" algn="l"/>
                 <a:tab pos="3594240" algn="l"/>
-                <a:tab pos="4043520" algn="l"/>
+                <a:tab pos="4043519" algn="l"/>
                 <a:tab pos="4492800" algn="l"/>
                 <a:tab pos="4941720" algn="l"/>
                 <a:tab pos="5391000" algn="l"/>
@@ -1270,13 +2828,12 @@
                 <a:tab pos="8535960" algn="l"/>
                 <a:tab pos="8985240" algn="l"/>
               </a:tabLst>
+              <a:defRPr/>
             </a:pPr>
             <a:endParaRPr lang="en-US" sz="1800" b="0" u="none" strike="noStrike">
               <a:solidFill>
                 <a:srgbClr val="000000"/>
               </a:solidFill>
-              <a:effectLst/>
-              <a:uFillTx/>
               <a:latin typeface="Arial"/>
             </a:endParaRPr>
           </a:p>
@@ -1284,7 +2841,7 @@
       </p:sp>
       <p:sp>
         <p:nvSpPr>
-          <p:cNvPr id="9" name="PlaceHolder 1"/>
+          <p:cNvPr id="1523839452" name="PlaceHolder 1"/>
           <p:cNvSpPr>
             <a:spLocks noGrp="1"/>
           </p:cNvSpPr>
@@ -1292,7 +2849,7 @@
             <p:ph type="title"/>
           </p:nvPr>
         </p:nvSpPr>
-        <p:spPr>
+        <p:spPr bwMode="auto">
           <a:xfrm>
             <a:off x="609480" y="272520"/>
             <a:ext cx="10969920" cy="1141560"/>
@@ -1325,7 +2882,7 @@
                 <a:tab pos="2695680" algn="l"/>
                 <a:tab pos="3144960" algn="l"/>
                 <a:tab pos="3594240" algn="l"/>
-                <a:tab pos="4043520" algn="l"/>
+                <a:tab pos="4043519" algn="l"/>
                 <a:tab pos="4492800" algn="l"/>
                 <a:tab pos="4941720" algn="l"/>
                 <a:tab pos="5391000" algn="l"/>
@@ -1342,8 +2899,6 @@
                 <a:solidFill>
                   <a:srgbClr val="000000"/>
                 </a:solidFill>
-                <a:effectLst/>
-                <a:uFillTx/>
                 <a:latin typeface="Arial"/>
               </a:defRPr>
             </a:lvl1pPr>
@@ -1364,7 +2919,7 @@
                 <a:tab pos="2695680" algn="l"/>
                 <a:tab pos="3144960" algn="l"/>
                 <a:tab pos="3594240" algn="l"/>
-                <a:tab pos="4043520" algn="l"/>
+                <a:tab pos="4043519" algn="l"/>
                 <a:tab pos="4492800" algn="l"/>
                 <a:tab pos="4941720" algn="l"/>
                 <a:tab pos="5391000" algn="l"/>
@@ -1377,14 +2932,13 @@
                 <a:tab pos="8535960" algn="l"/>
                 <a:tab pos="8985240" algn="l"/>
               </a:tabLst>
+              <a:defRPr/>
             </a:pPr>
             <a:r>
               <a:rPr lang="en-US" sz="4400" b="0" u="none" strike="noStrike">
                 <a:solidFill>
                   <a:srgbClr val="000000"/>
                 </a:solidFill>
-                <a:effectLst/>
-                <a:uFillTx/>
                 <a:latin typeface="Arial"/>
               </a:rPr>
               <a:t>Click to edit the title text format</a:t>
@@ -1393,8 +2947,6 @@
               <a:solidFill>
                 <a:srgbClr val="000000"/>
               </a:solidFill>
-              <a:effectLst/>
-              <a:uFillTx/>
               <a:latin typeface="Arial"/>
             </a:endParaRPr>
           </a:p>
@@ -1402,7 +2954,7 @@
       </p:sp>
       <p:sp>
         <p:nvSpPr>
-          <p:cNvPr id="10" name="PlaceHolder 2"/>
+          <p:cNvPr id="255256102" name="PlaceHolder 2"/>
           <p:cNvSpPr>
             <a:spLocks noGrp="1"/>
           </p:cNvSpPr>
@@ -1410,7 +2962,7 @@
             <p:ph type="body"/>
           </p:nvPr>
         </p:nvSpPr>
-        <p:spPr>
+        <p:spPr bwMode="auto">
           <a:xfrm>
             <a:off x="609480" y="1604880"/>
             <a:ext cx="10969920" cy="3973680"/>
@@ -1445,7 +2997,7 @@
                 <a:tab pos="2695680" algn="l"/>
                 <a:tab pos="3144960" algn="l"/>
                 <a:tab pos="3594240" algn="l"/>
-                <a:tab pos="4043520" algn="l"/>
+                <a:tab pos="4043519" algn="l"/>
                 <a:tab pos="4492800" algn="l"/>
                 <a:tab pos="4941720" algn="l"/>
                 <a:tab pos="5391000" algn="l"/>
@@ -1462,8 +3014,6 @@
                 <a:solidFill>
                   <a:srgbClr val="000000"/>
                 </a:solidFill>
-                <a:effectLst/>
-                <a:uFillTx/>
                 <a:latin typeface="Arial"/>
               </a:defRPr>
             </a:lvl1pPr>
@@ -1489,7 +3039,7 @@
                 <a:tab pos="2695680" algn="l"/>
                 <a:tab pos="3144960" algn="l"/>
                 <a:tab pos="3594240" algn="l"/>
-                <a:tab pos="4043520" algn="l"/>
+                <a:tab pos="4043519" algn="l"/>
                 <a:tab pos="4492800" algn="l"/>
                 <a:tab pos="4941720" algn="l"/>
                 <a:tab pos="5391000" algn="l"/>
@@ -1506,8 +3056,6 @@
                 <a:solidFill>
                   <a:srgbClr val="000000"/>
                 </a:solidFill>
-                <a:effectLst/>
-                <a:uFillTx/>
                 <a:latin typeface="Arial"/>
               </a:defRPr>
             </a:lvl2pPr>
@@ -1533,7 +3081,7 @@
                 <a:tab pos="2695680" algn="l"/>
                 <a:tab pos="3144960" algn="l"/>
                 <a:tab pos="3594240" algn="l"/>
-                <a:tab pos="4043520" algn="l"/>
+                <a:tab pos="4043519" algn="l"/>
                 <a:tab pos="4492800" algn="l"/>
                 <a:tab pos="4941720" algn="l"/>
                 <a:tab pos="5391000" algn="l"/>
@@ -1550,8 +3098,6 @@
                 <a:solidFill>
                   <a:srgbClr val="000000"/>
                 </a:solidFill>
-                <a:effectLst/>
-                <a:uFillTx/>
                 <a:latin typeface="Arial"/>
               </a:defRPr>
             </a:lvl3pPr>
@@ -1577,7 +3123,7 @@
                 <a:tab pos="2695680" algn="l"/>
                 <a:tab pos="3144960" algn="l"/>
                 <a:tab pos="3594240" algn="l"/>
-                <a:tab pos="4043520" algn="l"/>
+                <a:tab pos="4043519" algn="l"/>
                 <a:tab pos="4492800" algn="l"/>
                 <a:tab pos="4941720" algn="l"/>
                 <a:tab pos="5391000" algn="l"/>
@@ -1594,8 +3140,6 @@
                 <a:solidFill>
                   <a:srgbClr val="000000"/>
                 </a:solidFill>
-                <a:effectLst/>
-                <a:uFillTx/>
                 <a:latin typeface="Arial"/>
               </a:defRPr>
             </a:lvl4pPr>
@@ -1621,7 +3165,7 @@
                 <a:tab pos="2695680" algn="l"/>
                 <a:tab pos="3144960" algn="l"/>
                 <a:tab pos="3594240" algn="l"/>
-                <a:tab pos="4043520" algn="l"/>
+                <a:tab pos="4043519" algn="l"/>
                 <a:tab pos="4492800" algn="l"/>
                 <a:tab pos="4941720" algn="l"/>
                 <a:tab pos="5391000" algn="l"/>
@@ -1638,8 +3182,6 @@
                 <a:solidFill>
                   <a:srgbClr val="000000"/>
                 </a:solidFill>
-                <a:effectLst/>
-                <a:uFillTx/>
                 <a:latin typeface="Arial"/>
               </a:defRPr>
             </a:lvl5pPr>
@@ -1665,7 +3207,7 @@
                 <a:tab pos="2695680" algn="l"/>
                 <a:tab pos="3144960" algn="l"/>
                 <a:tab pos="3594240" algn="l"/>
-                <a:tab pos="4043520" algn="l"/>
+                <a:tab pos="4043519" algn="l"/>
                 <a:tab pos="4492800" algn="l"/>
                 <a:tab pos="4941720" algn="l"/>
                 <a:tab pos="5391000" algn="l"/>
@@ -1682,8 +3224,6 @@
                 <a:solidFill>
                   <a:srgbClr val="000000"/>
                 </a:solidFill>
-                <a:effectLst/>
-                <a:uFillTx/>
                 <a:latin typeface="Arial"/>
               </a:defRPr>
             </a:lvl6pPr>
@@ -1709,7 +3249,7 @@
                 <a:tab pos="2695680" algn="l"/>
                 <a:tab pos="3144960" algn="l"/>
                 <a:tab pos="3594240" algn="l"/>
-                <a:tab pos="4043520" algn="l"/>
+                <a:tab pos="4043519" algn="l"/>
                 <a:tab pos="4492800" algn="l"/>
                 <a:tab pos="4941720" algn="l"/>
                 <a:tab pos="5391000" algn="l"/>
@@ -1726,8 +3266,6 @@
                 <a:solidFill>
                   <a:srgbClr val="000000"/>
                 </a:solidFill>
-                <a:effectLst/>
-                <a:uFillTx/>
                 <a:latin typeface="Arial"/>
               </a:defRPr>
             </a:lvl7pPr>
@@ -1750,7 +3288,7 @@
                 <a:tab pos="2695680" algn="l"/>
                 <a:tab pos="3144960" algn="l"/>
                 <a:tab pos="3594240" algn="l"/>
-                <a:tab pos="4043520" algn="l"/>
+                <a:tab pos="4043519" algn="l"/>
                 <a:tab pos="4492800" algn="l"/>
                 <a:tab pos="4941720" algn="l"/>
                 <a:tab pos="5391000" algn="l"/>
@@ -1763,14 +3301,13 @@
                 <a:tab pos="8535960" algn="l"/>
                 <a:tab pos="8985240" algn="l"/>
               </a:tabLst>
+              <a:defRPr/>
             </a:pPr>
             <a:r>
               <a:rPr lang="en-US" sz="3200" b="0" u="none" strike="noStrike">
                 <a:solidFill>
                   <a:srgbClr val="000000"/>
                 </a:solidFill>
-                <a:effectLst/>
-                <a:uFillTx/>
                 <a:latin typeface="Arial"/>
               </a:rPr>
               <a:t>Click to edit the outline text format</a:t>
@@ -1779,8 +3316,6 @@
               <a:solidFill>
                 <a:srgbClr val="000000"/>
               </a:solidFill>
-              <a:effectLst/>
-              <a:uFillTx/>
               <a:latin typeface="Arial"/>
             </a:endParaRPr>
           </a:p>
@@ -1807,7 +3342,7 @@
                 <a:tab pos="2695680" algn="l"/>
                 <a:tab pos="3144960" algn="l"/>
                 <a:tab pos="3594240" algn="l"/>
-                <a:tab pos="4043520" algn="l"/>
+                <a:tab pos="4043519" algn="l"/>
                 <a:tab pos="4492800" algn="l"/>
                 <a:tab pos="4941720" algn="l"/>
                 <a:tab pos="5391000" algn="l"/>
@@ -1820,14 +3355,13 @@
                 <a:tab pos="8535960" algn="l"/>
                 <a:tab pos="8985240" algn="l"/>
               </a:tabLst>
+              <a:defRPr/>
             </a:pPr>
             <a:r>
               <a:rPr lang="en-US" sz="3200" b="0" u="none" strike="noStrike">
                 <a:solidFill>
                   <a:srgbClr val="000000"/>
                 </a:solidFill>
-                <a:effectLst/>
-                <a:uFillTx/>
                 <a:latin typeface="Arial"/>
               </a:rPr>
               <a:t>Second Outline Level</a:t>
@@ -1836,8 +3370,6 @@
               <a:solidFill>
                 <a:srgbClr val="000000"/>
               </a:solidFill>
-              <a:effectLst/>
-              <a:uFillTx/>
               <a:latin typeface="Arial"/>
             </a:endParaRPr>
           </a:p>
@@ -1864,7 +3396,7 @@
                 <a:tab pos="2695680" algn="l"/>
                 <a:tab pos="3144960" algn="l"/>
                 <a:tab pos="3594240" algn="l"/>
-                <a:tab pos="4043520" algn="l"/>
+                <a:tab pos="4043519" algn="l"/>
                 <a:tab pos="4492800" algn="l"/>
                 <a:tab pos="4941720" algn="l"/>
                 <a:tab pos="5391000" algn="l"/>
@@ -1877,14 +3409,13 @@
                 <a:tab pos="8535960" algn="l"/>
                 <a:tab pos="8985240" algn="l"/>
               </a:tabLst>
+              <a:defRPr/>
             </a:pPr>
             <a:r>
               <a:rPr lang="en-US" sz="3200" b="0" u="none" strike="noStrike">
                 <a:solidFill>
                   <a:srgbClr val="000000"/>
                 </a:solidFill>
-                <a:effectLst/>
-                <a:uFillTx/>
                 <a:latin typeface="Arial"/>
               </a:rPr>
               <a:t>Third Outline Level</a:t>
@@ -1893,8 +3424,6 @@
               <a:solidFill>
                 <a:srgbClr val="000000"/>
               </a:solidFill>
-              <a:effectLst/>
-              <a:uFillTx/>
               <a:latin typeface="Arial"/>
             </a:endParaRPr>
           </a:p>
@@ -1921,7 +3450,7 @@
                 <a:tab pos="2695680" algn="l"/>
                 <a:tab pos="3144960" algn="l"/>
                 <a:tab pos="3594240" algn="l"/>
-                <a:tab pos="4043520" algn="l"/>
+                <a:tab pos="4043519" algn="l"/>
                 <a:tab pos="4492800" algn="l"/>
                 <a:tab pos="4941720" algn="l"/>
                 <a:tab pos="5391000" algn="l"/>
@@ -1934,14 +3463,13 @@
                 <a:tab pos="8535960" algn="l"/>
                 <a:tab pos="8985240" algn="l"/>
               </a:tabLst>
+              <a:defRPr/>
             </a:pPr>
             <a:r>
               <a:rPr lang="en-US" sz="3200" b="0" u="none" strike="noStrike">
                 <a:solidFill>
                   <a:srgbClr val="000000"/>
                 </a:solidFill>
-                <a:effectLst/>
-                <a:uFillTx/>
                 <a:latin typeface="Arial"/>
               </a:rPr>
               <a:t>Fourth Outline Level</a:t>
@@ -1950,8 +3478,6 @@
               <a:solidFill>
                 <a:srgbClr val="000000"/>
               </a:solidFill>
-              <a:effectLst/>
-              <a:uFillTx/>
               <a:latin typeface="Arial"/>
             </a:endParaRPr>
           </a:p>
@@ -1978,7 +3504,7 @@
                 <a:tab pos="2695680" algn="l"/>
                 <a:tab pos="3144960" algn="l"/>
                 <a:tab pos="3594240" algn="l"/>
-                <a:tab pos="4043520" algn="l"/>
+                <a:tab pos="4043519" algn="l"/>
                 <a:tab pos="4492800" algn="l"/>
                 <a:tab pos="4941720" algn="l"/>
                 <a:tab pos="5391000" algn="l"/>
@@ -1991,14 +3517,13 @@
                 <a:tab pos="8535960" algn="l"/>
                 <a:tab pos="8985240" algn="l"/>
               </a:tabLst>
+              <a:defRPr/>
             </a:pPr>
             <a:r>
               <a:rPr lang="en-US" sz="3200" b="0" u="none" strike="noStrike">
                 <a:solidFill>
                   <a:srgbClr val="000000"/>
                 </a:solidFill>
-                <a:effectLst/>
-                <a:uFillTx/>
                 <a:latin typeface="Arial"/>
               </a:rPr>
               <a:t>Fifth Outline Level</a:t>
@@ -2007,8 +3532,6 @@
               <a:solidFill>
                 <a:srgbClr val="000000"/>
               </a:solidFill>
-              <a:effectLst/>
-              <a:uFillTx/>
               <a:latin typeface="Arial"/>
             </a:endParaRPr>
           </a:p>
@@ -2035,7 +3558,7 @@
                 <a:tab pos="2695680" algn="l"/>
                 <a:tab pos="3144960" algn="l"/>
                 <a:tab pos="3594240" algn="l"/>
-                <a:tab pos="4043520" algn="l"/>
+                <a:tab pos="4043519" algn="l"/>
                 <a:tab pos="4492800" algn="l"/>
                 <a:tab pos="4941720" algn="l"/>
                 <a:tab pos="5391000" algn="l"/>
@@ -2048,14 +3571,13 @@
                 <a:tab pos="8535960" algn="l"/>
                 <a:tab pos="8985240" algn="l"/>
               </a:tabLst>
+              <a:defRPr/>
             </a:pPr>
             <a:r>
               <a:rPr lang="en-US" sz="3200" b="0" u="none" strike="noStrike">
                 <a:solidFill>
                   <a:srgbClr val="000000"/>
                 </a:solidFill>
-                <a:effectLst/>
-                <a:uFillTx/>
                 <a:latin typeface="Arial"/>
               </a:rPr>
               <a:t>Sixth Outline Level</a:t>
@@ -2064,8 +3586,6 @@
               <a:solidFill>
                 <a:srgbClr val="000000"/>
               </a:solidFill>
-              <a:effectLst/>
-              <a:uFillTx/>
               <a:latin typeface="Arial"/>
             </a:endParaRPr>
           </a:p>
@@ -2092,7 +3612,7 @@
                 <a:tab pos="2695680" algn="l"/>
                 <a:tab pos="3144960" algn="l"/>
                 <a:tab pos="3594240" algn="l"/>
-                <a:tab pos="4043520" algn="l"/>
+                <a:tab pos="4043519" algn="l"/>
                 <a:tab pos="4492800" algn="l"/>
                 <a:tab pos="4941720" algn="l"/>
                 <a:tab pos="5391000" algn="l"/>
@@ -2105,14 +3625,13 @@
                 <a:tab pos="8535960" algn="l"/>
                 <a:tab pos="8985240" algn="l"/>
               </a:tabLst>
+              <a:defRPr/>
             </a:pPr>
             <a:r>
               <a:rPr lang="en-US" sz="3200" b="0" u="none" strike="noStrike">
                 <a:solidFill>
                   <a:srgbClr val="000000"/>
                 </a:solidFill>
-                <a:effectLst/>
-                <a:uFillTx/>
                 <a:latin typeface="Arial"/>
               </a:rPr>
               <a:t>Seventh Outline Level</a:t>
@@ -2121,8 +3640,6 @@
               <a:solidFill>
                 <a:srgbClr val="000000"/>
               </a:solidFill>
-              <a:effectLst/>
-              <a:uFillTx/>
               <a:latin typeface="Arial"/>
             </a:endParaRPr>
           </a:p>
@@ -2130,19 +3647,22 @@
       </p:sp>
     </p:spTree>
   </p:cSld>
+  <p:clrMapOvr>
+    <a:masterClrMapping/>
+  </p:clrMapOvr>
 </p:sldLayout>
 </file>
 
 <file path=ppt/slideMasters/slideMaster1.xml><?xml version="1.0" encoding="utf-8"?>
-<p:sldMaster xmlns:a="http://schemas.openxmlformats.org/drawingml/2006/main" xmlns:p="http://schemas.openxmlformats.org/presentationml/2006/main" xmlns:r="http://schemas.openxmlformats.org/officeDocument/2006/relationships" xmlns:p14="http://schemas.microsoft.com/office/powerpoint/2010/main" xmlns:p15="http://schemas.microsoft.com/office/powerpoint/2012/main" xmlns:mc="http://schemas.openxmlformats.org/markup-compatibility/2006">
-  <p:cSld>
+<p:sldMaster xmlns:a="http://schemas.openxmlformats.org/drawingml/2006/main" xmlns:r="http://schemas.openxmlformats.org/officeDocument/2006/relationships" xmlns:p="http://schemas.openxmlformats.org/presentationml/2006/main" xmlns:m="http://schemas.openxmlformats.org/officeDocument/2006/math" xmlns:w="http://schemas.openxmlformats.org/wordprocessingml/2006/main" preserve="0">
+  <p:cSld name="">
     <p:spTree>
       <p:nvGrpSpPr>
         <p:cNvPr id="1" name=""/>
         <p:cNvGrpSpPr/>
         <p:nvPr/>
       </p:nvGrpSpPr>
-      <p:grpSpPr>
+      <p:grpSpPr bwMode="auto">
         <a:xfrm>
           <a:off x="0" y="0"/>
           <a:ext cx="0" cy="0"/>
@@ -2154,17 +3674,17 @@
   </p:cSld>
   <p:clrMap bg1="lt1" tx1="dk1" bg2="lt2" tx2="dk2" accent1="accent1" accent2="accent2" accent3="accent3" accent4="accent4" accent5="accent5" accent6="accent6" hlink="hlink" folHlink="folHlink"/>
   <p:sldLayoutIdLst>
-    <p:sldLayoutId id="2147483649" r:id="rId2"/>
-    <p:sldLayoutId id="2147483650" r:id="rId3"/>
+    <p:sldLayoutId id="2147483649" r:id="rId1"/>
+    <p:sldLayoutId id="2147483650" r:id="rId2"/>
   </p:sldLayoutIdLst>
 </p:sldMaster>
 </file>
 
 <file path=ppt/slides/slide1.xml><?xml version="1.0" encoding="utf-8"?>
-<p:sld xmlns:a="http://schemas.openxmlformats.org/drawingml/2006/main" xmlns:p="http://schemas.openxmlformats.org/presentationml/2006/main" xmlns:r="http://schemas.openxmlformats.org/officeDocument/2006/relationships" xmlns:p14="http://schemas.microsoft.com/office/powerpoint/2010/main" xmlns:p15="http://schemas.microsoft.com/office/powerpoint/2012/main" xmlns:mc="http://schemas.openxmlformats.org/markup-compatibility/2006">
-  <p:cSld>
+<p:sld xmlns:a="http://schemas.openxmlformats.org/drawingml/2006/main" xmlns:r="http://schemas.openxmlformats.org/officeDocument/2006/relationships" xmlns:p="http://schemas.openxmlformats.org/presentationml/2006/main" xmlns:m="http://schemas.openxmlformats.org/officeDocument/2006/math" xmlns:w="http://schemas.openxmlformats.org/wordprocessingml/2006/main" xmlns:mc="http://schemas.openxmlformats.org/markup-compatibility/2006" showMasterPhAnim="0" showMasterSp="1" show="1">
+  <p:cSld name="">
     <p:bg>
-      <p:bgPr>
+      <p:bgPr shadeToTitle="0">
         <a:solidFill>
           <a:srgbClr val="FFFFFF"/>
         </a:solidFill>
@@ -2176,7 +3696,7 @@
         <p:cNvGrpSpPr/>
         <p:nvPr/>
       </p:nvGrpSpPr>
-      <p:grpSpPr>
+      <p:grpSpPr bwMode="auto">
         <a:xfrm>
           <a:off x="0" y="0"/>
           <a:ext cx="0" cy="0"/>
@@ -2186,11 +3706,11 @@
       </p:grpSpPr>
       <p:sp>
         <p:nvSpPr>
-          <p:cNvPr id="11" name=""/>
+          <p:cNvPr id="2007634021" name=""/>
           <p:cNvSpPr/>
           <p:nvPr/>
         </p:nvSpPr>
-        <p:spPr>
+        <p:spPr bwMode="auto">
           <a:xfrm>
             <a:off x="0" y="0"/>
             <a:ext cx="12190320" cy="6856560"/>
@@ -2230,7 +3750,7 @@
                 <a:tab pos="2695680" algn="l"/>
                 <a:tab pos="3144960" algn="l"/>
                 <a:tab pos="3594240" algn="l"/>
-                <a:tab pos="4043520" algn="l"/>
+                <a:tab pos="4043519" algn="l"/>
                 <a:tab pos="4492800" algn="l"/>
                 <a:tab pos="4941720" algn="l"/>
                 <a:tab pos="5391000" algn="l"/>
@@ -2243,13 +3763,12 @@
                 <a:tab pos="8535960" algn="l"/>
                 <a:tab pos="8985240" algn="l"/>
               </a:tabLst>
+              <a:defRPr/>
             </a:pPr>
             <a:endParaRPr lang="en-US" sz="1800" b="0" u="none" strike="noStrike">
               <a:solidFill>
                 <a:srgbClr val="000000"/>
               </a:solidFill>
-              <a:effectLst/>
-              <a:uFillTx/>
               <a:latin typeface="Arial"/>
             </a:endParaRPr>
           </a:p>
@@ -2257,16 +3776,16 @@
       </p:sp>
       <p:pic>
         <p:nvPicPr>
-          <p:cNvPr id="12" name=""/>
+          <p:cNvPr id="464653440" name=""/>
           <p:cNvPicPr/>
           <p:nvPr/>
         </p:nvPicPr>
-        <p:blipFill>
-          <a:blip r:embed="rId1"/>
+        <p:blipFill rotWithShape="1">
+          <a:blip r:embed="rId3"/>
           <a:srcRect l="0" t="1105" r="0" b="0"/>
           <a:stretch/>
         </p:blipFill>
-        <p:spPr>
+        <p:spPr bwMode="auto">
           <a:xfrm>
             <a:off x="0" y="0"/>
             <a:ext cx="8667720" cy="6856560"/>
@@ -2282,11 +3801,11 @@
       </p:pic>
       <p:sp>
         <p:nvSpPr>
-          <p:cNvPr id="13" name=""/>
+          <p:cNvPr id="61184206" name=""/>
           <p:cNvSpPr/>
           <p:nvPr/>
         </p:nvSpPr>
-        <p:spPr>
+        <p:spPr bwMode="auto">
           <a:xfrm flipH="1">
             <a:off x="3711600" y="0"/>
             <a:ext cx="8478720" cy="6856560"/>
@@ -2303,7 +3822,7 @@
                 <a:srgbClr val="FFFFFF"/>
               </a:gs>
             </a:gsLst>
-            <a:lin ang="0"/>
+            <a:lin ang="0" scaled="1"/>
           </a:gradFill>
           <a:ln w="0">
             <a:noFill/>
@@ -2334,7 +3853,7 @@
                 <a:tab pos="2695680" algn="l"/>
                 <a:tab pos="3144960" algn="l"/>
                 <a:tab pos="3594240" algn="l"/>
-                <a:tab pos="4043520" algn="l"/>
+                <a:tab pos="4043519" algn="l"/>
                 <a:tab pos="4492800" algn="l"/>
                 <a:tab pos="4941720" algn="l"/>
                 <a:tab pos="5391000" algn="l"/>
@@ -2347,13 +3866,12 @@
                 <a:tab pos="8535960" algn="l"/>
                 <a:tab pos="8985240" algn="l"/>
               </a:tabLst>
+              <a:defRPr/>
             </a:pPr>
             <a:endParaRPr lang="en-US" sz="1800" b="0" u="none" strike="noStrike">
               <a:solidFill>
                 <a:srgbClr val="000000"/>
               </a:solidFill>
-              <a:effectLst/>
-              <a:uFillTx/>
               <a:latin typeface="Arial"/>
             </a:endParaRPr>
           </a:p>
@@ -2361,11 +3879,11 @@
       </p:sp>
       <p:sp>
         <p:nvSpPr>
-          <p:cNvPr id="14" name=""/>
+          <p:cNvPr id="37361813" name=""/>
           <p:cNvSpPr/>
           <p:nvPr/>
         </p:nvSpPr>
-        <p:spPr>
+        <p:spPr bwMode="auto">
           <a:xfrm>
             <a:off x="7848720" y="1122480"/>
             <a:ext cx="4022640" cy="3203280"/>
@@ -2418,17 +3936,16 @@
                 <a:tab pos="8985240" algn="l"/>
                 <a:tab pos="9434520" algn="l"/>
                 <a:tab pos="9883800" algn="l"/>
-                <a:tab pos="10333080" algn="l"/>
+                <a:tab pos="10333079" algn="l"/>
                 <a:tab pos="10782360" algn="l"/>
               </a:tabLst>
+              <a:defRPr/>
             </a:pPr>
             <a:r>
               <a:rPr lang="es-ES" sz="4800" b="1" u="none" strike="noStrike">
                 <a:solidFill>
                   <a:srgbClr val="000000"/>
                 </a:solidFill>
-                <a:effectLst/>
-                <a:uFillTx/>
                 <a:latin typeface="Neue Haas Grotesk Text Pro"/>
                 <a:ea typeface="DejaVu Sans"/>
               </a:rPr>
@@ -2438,8 +3955,6 @@
               <a:solidFill>
                 <a:srgbClr val="000000"/>
               </a:solidFill>
-              <a:effectLst/>
-              <a:uFillTx/>
               <a:latin typeface="Arial"/>
             </a:endParaRPr>
           </a:p>
@@ -2447,14 +3962,14 @@
       </p:sp>
       <p:sp>
         <p:nvSpPr>
-          <p:cNvPr id="15" name=""/>
+          <p:cNvPr id="936560112" name=""/>
           <p:cNvSpPr/>
           <p:nvPr/>
         </p:nvSpPr>
-        <p:spPr>
+        <p:spPr bwMode="auto">
           <a:xfrm rot="5400000">
             <a:off x="8137440" y="348840"/>
-            <a:ext cx="144720" cy="703440"/>
+            <a:ext cx="144719" cy="703440"/>
           </a:xfrm>
           <a:prstGeom prst="rect">
             <a:avLst/>
@@ -2491,7 +4006,7 @@
                 <a:tab pos="2695680" algn="l"/>
                 <a:tab pos="3144960" algn="l"/>
                 <a:tab pos="3594240" algn="l"/>
-                <a:tab pos="4043520" algn="l"/>
+                <a:tab pos="4043519" algn="l"/>
                 <a:tab pos="4492800" algn="l"/>
                 <a:tab pos="4941720" algn="l"/>
                 <a:tab pos="5391000" algn="l"/>
@@ -2504,13 +4019,12 @@
                 <a:tab pos="8535960" algn="l"/>
                 <a:tab pos="8985240" algn="l"/>
               </a:tabLst>
+              <a:defRPr/>
             </a:pPr>
             <a:endParaRPr lang="en-US" sz="1800" b="0" u="none" strike="noStrike">
               <a:solidFill>
                 <a:srgbClr val="000000"/>
               </a:solidFill>
-              <a:effectLst/>
-              <a:uFillTx/>
               <a:latin typeface="Arial"/>
             </a:endParaRPr>
           </a:p>
@@ -2518,11 +4032,11 @@
       </p:sp>
       <p:sp>
         <p:nvSpPr>
-          <p:cNvPr id="16" name=""/>
+          <p:cNvPr id="97455777" name=""/>
           <p:cNvSpPr/>
           <p:nvPr/>
         </p:nvSpPr>
-        <p:spPr>
+        <p:spPr bwMode="auto">
           <a:xfrm>
             <a:off x="7851600" y="4546440"/>
             <a:ext cx="4023000" cy="17640"/>
@@ -2565,7 +4079,7 @@
                 <a:tab pos="2695680" algn="l"/>
                 <a:tab pos="3144960" algn="l"/>
                 <a:tab pos="3594240" algn="l"/>
-                <a:tab pos="4043520" algn="l"/>
+                <a:tab pos="4043519" algn="l"/>
                 <a:tab pos="4492800" algn="l"/>
                 <a:tab pos="4941720" algn="l"/>
                 <a:tab pos="5391000" algn="l"/>
@@ -2578,13 +4092,12 @@
                 <a:tab pos="8535960" algn="l"/>
                 <a:tab pos="8985240" algn="l"/>
               </a:tabLst>
+              <a:defRPr/>
             </a:pPr>
             <a:endParaRPr lang="en-US" sz="1800" b="0" u="none" strike="noStrike">
               <a:solidFill>
                 <a:srgbClr val="000000"/>
               </a:solidFill>
-              <a:effectLst/>
-              <a:uFillTx/>
               <a:latin typeface="Arial"/>
             </a:endParaRPr>
           </a:p>
@@ -2592,11 +4105,11 @@
       </p:sp>
       <p:sp>
         <p:nvSpPr>
-          <p:cNvPr id="17" name=""/>
+          <p:cNvPr id="101574142" name=""/>
           <p:cNvSpPr/>
           <p:nvPr/>
         </p:nvSpPr>
-        <p:spPr>
+        <p:spPr bwMode="auto">
           <a:xfrm>
             <a:off x="7848720" y="4873680"/>
             <a:ext cx="4022640" cy="1359000"/>
@@ -2652,17 +4165,16 @@
                 <a:tab pos="8985240" algn="l"/>
                 <a:tab pos="9434520" algn="l"/>
                 <a:tab pos="9883800" algn="l"/>
-                <a:tab pos="10333080" algn="l"/>
+                <a:tab pos="10333079" algn="l"/>
                 <a:tab pos="10782360" algn="l"/>
               </a:tabLst>
+              <a:defRPr/>
             </a:pPr>
             <a:r>
               <a:rPr lang="es-ES" sz="1400" b="0" u="none" strike="noStrike">
                 <a:solidFill>
                   <a:srgbClr val="000000"/>
                 </a:solidFill>
-                <a:effectLst/>
-                <a:uFillTx/>
                 <a:latin typeface="Neue Haas Grotesk Text Pro"/>
                 <a:ea typeface="DejaVu Sans"/>
               </a:rPr>
@@ -2672,8 +4184,6 @@
               <a:solidFill>
                 <a:srgbClr val="000000"/>
               </a:solidFill>
-              <a:effectLst/>
-              <a:uFillTx/>
               <a:latin typeface="Arial"/>
             </a:endParaRPr>
           </a:p>
@@ -2710,16 +4220,15 @@
                 <a:tab pos="8985240" algn="l"/>
                 <a:tab pos="9434520" algn="l"/>
                 <a:tab pos="9883800" algn="l"/>
-                <a:tab pos="10333080" algn="l"/>
+                <a:tab pos="10333079" algn="l"/>
                 <a:tab pos="10782360" algn="l"/>
               </a:tabLst>
+              <a:defRPr/>
             </a:pPr>
             <a:endParaRPr lang="en-US" sz="1400" b="0" u="none" strike="noStrike">
               <a:solidFill>
                 <a:srgbClr val="000000"/>
               </a:solidFill>
-              <a:effectLst/>
-              <a:uFillTx/>
               <a:latin typeface="Arial"/>
             </a:endParaRPr>
           </a:p>
@@ -2756,17 +4265,16 @@
                 <a:tab pos="8985240" algn="l"/>
                 <a:tab pos="9434520" algn="l"/>
                 <a:tab pos="9883800" algn="l"/>
-                <a:tab pos="10333080" algn="l"/>
+                <a:tab pos="10333079" algn="l"/>
                 <a:tab pos="10782360" algn="l"/>
               </a:tabLst>
+              <a:defRPr/>
             </a:pPr>
             <a:r>
               <a:rPr lang="es-ES" sz="1400" b="0" u="none" strike="noStrike">
                 <a:solidFill>
                   <a:srgbClr val="000000"/>
                 </a:solidFill>
-                <a:effectLst/>
-                <a:uFillTx/>
                 <a:latin typeface="Neue Haas Grotesk Text Pro"/>
                 <a:ea typeface="DejaVu Sans"/>
               </a:rPr>
@@ -2776,8 +4284,6 @@
               <a:solidFill>
                 <a:srgbClr val="000000"/>
               </a:solidFill>
-              <a:effectLst/>
-              <a:uFillTx/>
               <a:latin typeface="Arial"/>
             </a:endParaRPr>
           </a:p>
@@ -2785,14 +4291,25 @@
       </p:sp>
     </p:spTree>
   </p:cSld>
+  <p:clrMapOvr>
+    <a:masterClrMapping/>
+  </p:clrMapOvr>
+  <mc:AlternateContent xmlns:mc="http://schemas.openxmlformats.org/markup-compatibility/2006">
+    <mc:Choice xmlns:p159="http://schemas.microsoft.com/office/powerpoint/2015/09/main" xmlns:p14="http://schemas.microsoft.com/office/powerpoint/2010/main" Requires="p159">
+      <p:transition p14:dur="500" advClick="1"/>
+    </mc:Choice>
+    <mc:Fallback>
+      <p:transition advClick="1"/>
+    </mc:Fallback>
+  </mc:AlternateContent>
 </p:sld>
 </file>
 
 <file path=ppt/slides/slide10.xml><?xml version="1.0" encoding="utf-8"?>
-<p:sld xmlns:a="http://schemas.openxmlformats.org/drawingml/2006/main" xmlns:p="http://schemas.openxmlformats.org/presentationml/2006/main" xmlns:r="http://schemas.openxmlformats.org/officeDocument/2006/relationships" xmlns:p14="http://schemas.microsoft.com/office/powerpoint/2010/main" xmlns:p15="http://schemas.microsoft.com/office/powerpoint/2012/main" xmlns:mc="http://schemas.openxmlformats.org/markup-compatibility/2006">
-  <p:cSld>
+<p:sld xmlns:a="http://schemas.openxmlformats.org/drawingml/2006/main" xmlns:r="http://schemas.openxmlformats.org/officeDocument/2006/relationships" xmlns:p="http://schemas.openxmlformats.org/presentationml/2006/main" xmlns:m="http://schemas.openxmlformats.org/officeDocument/2006/math" xmlns:w="http://schemas.openxmlformats.org/wordprocessingml/2006/main" xmlns:mc="http://schemas.openxmlformats.org/markup-compatibility/2006" showMasterPhAnim="0" showMasterSp="1" show="1">
+  <p:cSld name="">
     <p:bg>
-      <p:bgPr>
+      <p:bgPr shadeToTitle="0">
         <a:solidFill>
           <a:srgbClr val="FFFFFF"/>
         </a:solidFill>
@@ -2804,7 +4321,7 @@
         <p:cNvGrpSpPr/>
         <p:nvPr/>
       </p:nvGrpSpPr>
-      <p:grpSpPr>
+      <p:grpSpPr bwMode="auto">
         <a:xfrm>
           <a:off x="0" y="0"/>
           <a:ext cx="0" cy="0"/>
@@ -2814,11 +4331,11 @@
       </p:grpSpPr>
       <p:sp>
         <p:nvSpPr>
-          <p:cNvPr id="50" name=""/>
+          <p:cNvPr id="727741418" name=""/>
           <p:cNvSpPr/>
           <p:nvPr/>
         </p:nvSpPr>
-        <p:spPr>
+        <p:spPr bwMode="auto">
           <a:xfrm>
             <a:off x="1116000" y="549360"/>
             <a:ext cx="10166400" cy="1177920"/>
@@ -2870,17 +4387,16 @@
                 <a:tab pos="8983800" algn="l"/>
                 <a:tab pos="9410760" algn="l"/>
                 <a:tab pos="10134720" algn="l"/>
-                <a:tab pos="10333080" algn="l"/>
+                <a:tab pos="10333079" algn="l"/>
                 <a:tab pos="10782360" algn="l"/>
               </a:tabLst>
+              <a:defRPr/>
             </a:pPr>
             <a:r>
               <a:rPr lang="es-ES" sz="4000" b="1" u="none" strike="noStrike">
                 <a:solidFill>
                   <a:srgbClr val="000000"/>
                 </a:solidFill>
-                <a:effectLst/>
-                <a:uFillTx/>
                 <a:latin typeface="Neue Haas Grotesk Text Pro"/>
                 <a:ea typeface="DejaVu Sans"/>
               </a:rPr>
@@ -2890,8 +4406,6 @@
               <a:solidFill>
                 <a:srgbClr val="000000"/>
               </a:solidFill>
-              <a:effectLst/>
-              <a:uFillTx/>
               <a:latin typeface="Arial"/>
             </a:endParaRPr>
           </a:p>
@@ -2899,11 +4413,11 @@
       </p:sp>
       <p:sp>
         <p:nvSpPr>
-          <p:cNvPr id="51" name=""/>
+          <p:cNvPr id="99367303" name=""/>
           <p:cNvSpPr/>
           <p:nvPr/>
         </p:nvSpPr>
-        <p:spPr>
+        <p:spPr bwMode="auto">
           <a:xfrm>
             <a:off x="8540640" y="6356520"/>
             <a:ext cx="2741760" cy="363240"/>
@@ -2956,17 +4470,16 @@
                 <a:tab pos="8985240" algn="l"/>
                 <a:tab pos="9434520" algn="l"/>
                 <a:tab pos="9883800" algn="l"/>
-                <a:tab pos="10333080" algn="l"/>
+                <a:tab pos="10333079" algn="l"/>
                 <a:tab pos="10782360" algn="l"/>
               </a:tabLst>
+              <a:defRPr/>
             </a:pPr>
             <a:fld id="{4E7EB0F2-7ECC-4E66-99EF-50285784E23A}" type="slidenum">
               <a:rPr lang="es-ES" sz="1200" b="0" u="none" strike="noStrike">
                 <a:solidFill>
                   <a:srgbClr val="8B8B8B"/>
                 </a:solidFill>
-                <a:effectLst/>
-                <a:uFillTx/>
                 <a:latin typeface="Neue Haas Grotesk Text Pro"/>
                 <a:ea typeface="DejaVu Sans"/>
               </a:rPr>
@@ -2976,8 +4489,6 @@
               <a:solidFill>
                 <a:srgbClr val="000000"/>
               </a:solidFill>
-              <a:effectLst/>
-              <a:uFillTx/>
               <a:latin typeface="Arial"/>
             </a:endParaRPr>
           </a:p>
@@ -2985,11 +4496,11 @@
       </p:sp>
       <p:sp>
         <p:nvSpPr>
-          <p:cNvPr id="52" name=""/>
+          <p:cNvPr id="542897580" name=""/>
           <p:cNvSpPr/>
           <p:nvPr/>
         </p:nvSpPr>
-        <p:spPr>
+        <p:spPr bwMode="auto">
           <a:xfrm>
             <a:off x="428760" y="2198520"/>
             <a:ext cx="11264760" cy="4296600"/>
@@ -3043,14 +4554,13 @@
                 <a:tab pos="10134720" algn="l"/>
                 <a:tab pos="10858680" algn="l"/>
               </a:tabLst>
+              <a:defRPr/>
             </a:pPr>
             <a:r>
               <a:rPr lang="es-ES" sz="1800" b="0" u="none" strike="noStrike">
                 <a:solidFill>
                   <a:srgbClr val="000000"/>
                 </a:solidFill>
-                <a:effectLst/>
-                <a:uFillTx/>
                 <a:latin typeface="Neue Haas Grotesk Text Pro"/>
                 <a:ea typeface="DejaVu Sans"/>
               </a:rPr>
@@ -3060,8 +4570,6 @@
               <a:solidFill>
                 <a:srgbClr val="000000"/>
               </a:solidFill>
-              <a:effectLst/>
-              <a:uFillTx/>
               <a:latin typeface="Arial"/>
             </a:endParaRPr>
           </a:p>
@@ -3096,13 +4604,12 @@
                 <a:tab pos="10134720" algn="l"/>
                 <a:tab pos="10858680" algn="l"/>
               </a:tabLst>
+              <a:defRPr/>
             </a:pPr>
             <a:endParaRPr lang="en-US" sz="1800" b="0" u="none" strike="noStrike">
               <a:solidFill>
                 <a:srgbClr val="000000"/>
               </a:solidFill>
-              <a:effectLst/>
-              <a:uFillTx/>
               <a:latin typeface="Arial"/>
             </a:endParaRPr>
           </a:p>
@@ -3137,14 +4644,13 @@
                 <a:tab pos="10134720" algn="l"/>
                 <a:tab pos="10858680" algn="l"/>
               </a:tabLst>
+              <a:defRPr/>
             </a:pPr>
             <a:r>
               <a:rPr lang="es-ES" sz="1800" b="0" u="none" strike="noStrike">
                 <a:solidFill>
                   <a:srgbClr val="000000"/>
                 </a:solidFill>
-                <a:effectLst/>
-                <a:uFillTx/>
                 <a:latin typeface="Neue Haas Grotesk Text Pro"/>
                 <a:ea typeface="DejaVu Sans"/>
               </a:rPr>
@@ -3154,8 +4660,6 @@
               <a:solidFill>
                 <a:srgbClr val="000000"/>
               </a:solidFill>
-              <a:effectLst/>
-              <a:uFillTx/>
               <a:latin typeface="Arial"/>
             </a:endParaRPr>
           </a:p>
@@ -3190,13 +4694,12 @@
                 <a:tab pos="10134720" algn="l"/>
                 <a:tab pos="10858680" algn="l"/>
               </a:tabLst>
+              <a:defRPr/>
             </a:pPr>
             <a:endParaRPr lang="en-US" sz="1500" b="0" u="none" strike="noStrike">
               <a:solidFill>
                 <a:srgbClr val="000000"/>
               </a:solidFill>
-              <a:effectLst/>
-              <a:uFillTx/>
               <a:latin typeface="Arial"/>
             </a:endParaRPr>
           </a:p>
@@ -3231,14 +4734,13 @@
                 <a:tab pos="10134720" algn="l"/>
                 <a:tab pos="10858680" algn="l"/>
               </a:tabLst>
+              <a:defRPr/>
             </a:pPr>
             <a:r>
               <a:rPr lang="es-ES" sz="1800" b="0" u="none" strike="noStrike">
                 <a:solidFill>
                   <a:srgbClr val="000000"/>
                 </a:solidFill>
-                <a:effectLst/>
-                <a:uFillTx/>
                 <a:latin typeface="Neue Haas Grotesk Text Pro"/>
                 <a:ea typeface="DejaVu Sans"/>
               </a:rPr>
@@ -3248,8 +4750,6 @@
               <a:solidFill>
                 <a:srgbClr val="000000"/>
               </a:solidFill>
-              <a:effectLst/>
-              <a:uFillTx/>
               <a:latin typeface="Arial"/>
             </a:endParaRPr>
           </a:p>
@@ -3284,13 +4784,12 @@
                 <a:tab pos="10134720" algn="l"/>
                 <a:tab pos="10858680" algn="l"/>
               </a:tabLst>
+              <a:defRPr/>
             </a:pPr>
             <a:endParaRPr lang="en-US" sz="1500" b="0" u="none" strike="noStrike">
               <a:solidFill>
                 <a:srgbClr val="000000"/>
               </a:solidFill>
-              <a:effectLst/>
-              <a:uFillTx/>
               <a:latin typeface="Arial"/>
             </a:endParaRPr>
           </a:p>
@@ -3325,14 +4824,13 @@
                 <a:tab pos="10134720" algn="l"/>
                 <a:tab pos="10858680" algn="l"/>
               </a:tabLst>
+              <a:defRPr/>
             </a:pPr>
             <a:r>
               <a:rPr lang="es-ES" sz="1800" b="0" u="none" strike="noStrike">
                 <a:solidFill>
                   <a:srgbClr val="000000"/>
                 </a:solidFill>
-                <a:effectLst/>
-                <a:uFillTx/>
                 <a:latin typeface="Neue Haas Grotesk Text Pro"/>
                 <a:ea typeface="DejaVu Sans"/>
               </a:rPr>
@@ -3342,8 +4840,6 @@
               <a:solidFill>
                 <a:srgbClr val="000000"/>
               </a:solidFill>
-              <a:effectLst/>
-              <a:uFillTx/>
               <a:latin typeface="Arial"/>
             </a:endParaRPr>
           </a:p>
@@ -3378,13 +4874,12 @@
                 <a:tab pos="10134720" algn="l"/>
                 <a:tab pos="10858680" algn="l"/>
               </a:tabLst>
+              <a:defRPr/>
             </a:pPr>
             <a:endParaRPr lang="en-US" sz="1500" b="0" u="none" strike="noStrike">
               <a:solidFill>
                 <a:srgbClr val="000000"/>
               </a:solidFill>
-              <a:effectLst/>
-              <a:uFillTx/>
               <a:latin typeface="Arial"/>
             </a:endParaRPr>
           </a:p>
@@ -3419,14 +4914,13 @@
                 <a:tab pos="10134720" algn="l"/>
                 <a:tab pos="10858680" algn="l"/>
               </a:tabLst>
+              <a:defRPr/>
             </a:pPr>
             <a:r>
               <a:rPr lang="es-ES" sz="1800" b="0" u="none" strike="noStrike">
                 <a:solidFill>
                   <a:srgbClr val="000000"/>
                 </a:solidFill>
-                <a:effectLst/>
-                <a:uFillTx/>
                 <a:latin typeface="Neue Haas Grotesk Text Pro"/>
                 <a:ea typeface="DejaVu Sans"/>
               </a:rPr>
@@ -3436,8 +4930,6 @@
               <a:solidFill>
                 <a:srgbClr val="000000"/>
               </a:solidFill>
-              <a:effectLst/>
-              <a:uFillTx/>
               <a:latin typeface="Arial"/>
             </a:endParaRPr>
           </a:p>
@@ -3472,13 +4964,12 @@
                 <a:tab pos="10134720" algn="l"/>
                 <a:tab pos="10858680" algn="l"/>
               </a:tabLst>
+              <a:defRPr/>
             </a:pPr>
             <a:endParaRPr lang="en-US" sz="1800" b="0" u="none" strike="noStrike">
               <a:solidFill>
                 <a:srgbClr val="000000"/>
               </a:solidFill>
-              <a:effectLst/>
-              <a:uFillTx/>
               <a:latin typeface="Arial"/>
             </a:endParaRPr>
           </a:p>
@@ -3513,14 +5004,13 @@
                 <a:tab pos="10134720" algn="l"/>
                 <a:tab pos="10858680" algn="l"/>
               </a:tabLst>
+              <a:defRPr/>
             </a:pPr>
             <a:r>
               <a:rPr lang="es-ES" sz="1800" b="0" u="none" strike="noStrike">
                 <a:solidFill>
                   <a:srgbClr val="000000"/>
                 </a:solidFill>
-                <a:effectLst/>
-                <a:uFillTx/>
                 <a:latin typeface="Neue Haas Grotesk Text Pro"/>
                 <a:ea typeface="DejaVu Sans"/>
               </a:rPr>
@@ -3530,8 +5020,6 @@
               <a:solidFill>
                 <a:srgbClr val="000000"/>
               </a:solidFill>
-              <a:effectLst/>
-              <a:uFillTx/>
               <a:latin typeface="Arial"/>
             </a:endParaRPr>
           </a:p>
@@ -3566,13 +5054,12 @@
                 <a:tab pos="10134720" algn="l"/>
                 <a:tab pos="10858680" algn="l"/>
               </a:tabLst>
+              <a:defRPr/>
             </a:pPr>
             <a:endParaRPr lang="en-US" sz="1500" b="0" u="none" strike="noStrike">
               <a:solidFill>
                 <a:srgbClr val="000000"/>
               </a:solidFill>
-              <a:effectLst/>
-              <a:uFillTx/>
               <a:latin typeface="Arial"/>
             </a:endParaRPr>
           </a:p>
@@ -3607,14 +5094,13 @@
                 <a:tab pos="10134720" algn="l"/>
                 <a:tab pos="10858680" algn="l"/>
               </a:tabLst>
+              <a:defRPr/>
             </a:pPr>
             <a:r>
               <a:rPr lang="es-ES" sz="1800" b="0" u="none" strike="noStrike">
                 <a:solidFill>
                   <a:srgbClr val="000000"/>
                 </a:solidFill>
-                <a:effectLst/>
-                <a:uFillTx/>
                 <a:latin typeface="Neue Haas Grotesk Text Pro"/>
                 <a:ea typeface="DejaVu Sans"/>
               </a:rPr>
@@ -3624,8 +5110,6 @@
               <a:solidFill>
                 <a:srgbClr val="000000"/>
               </a:solidFill>
-              <a:effectLst/>
-              <a:uFillTx/>
               <a:latin typeface="Arial"/>
             </a:endParaRPr>
           </a:p>
@@ -3633,14 +5117,25 @@
       </p:sp>
     </p:spTree>
   </p:cSld>
+  <p:clrMapOvr>
+    <a:masterClrMapping/>
+  </p:clrMapOvr>
+  <mc:AlternateContent xmlns:mc="http://schemas.openxmlformats.org/markup-compatibility/2006">
+    <mc:Choice xmlns:p159="http://schemas.microsoft.com/office/powerpoint/2015/09/main" xmlns:p14="http://schemas.microsoft.com/office/powerpoint/2010/main" Requires="p159">
+      <p:transition p14:dur="500" advClick="1"/>
+    </mc:Choice>
+    <mc:Fallback>
+      <p:transition advClick="1"/>
+    </mc:Fallback>
+  </mc:AlternateContent>
 </p:sld>
 </file>
 
 <file path=ppt/slides/slide11.xml><?xml version="1.0" encoding="utf-8"?>
-<p:sld xmlns:a="http://schemas.openxmlformats.org/drawingml/2006/main" xmlns:p="http://schemas.openxmlformats.org/presentationml/2006/main" xmlns:r="http://schemas.openxmlformats.org/officeDocument/2006/relationships" xmlns:p14="http://schemas.microsoft.com/office/powerpoint/2010/main" xmlns:p15="http://schemas.microsoft.com/office/powerpoint/2012/main" xmlns:mc="http://schemas.openxmlformats.org/markup-compatibility/2006">
-  <p:cSld>
+<p:sld xmlns:a="http://schemas.openxmlformats.org/drawingml/2006/main" xmlns:r="http://schemas.openxmlformats.org/officeDocument/2006/relationships" xmlns:p="http://schemas.openxmlformats.org/presentationml/2006/main" xmlns:m="http://schemas.openxmlformats.org/officeDocument/2006/math" xmlns:w="http://schemas.openxmlformats.org/wordprocessingml/2006/main" xmlns:mc="http://schemas.openxmlformats.org/markup-compatibility/2006" showMasterPhAnim="0" showMasterSp="1" show="1">
+  <p:cSld name="">
     <p:bg>
-      <p:bgPr>
+      <p:bgPr shadeToTitle="0">
         <a:solidFill>
           <a:srgbClr val="FFFFFF"/>
         </a:solidFill>
@@ -3652,7 +5147,7 @@
         <p:cNvGrpSpPr/>
         <p:nvPr/>
       </p:nvGrpSpPr>
-      <p:grpSpPr>
+      <p:grpSpPr bwMode="auto">
         <a:xfrm>
           <a:off x="0" y="0"/>
           <a:ext cx="0" cy="0"/>
@@ -3662,11 +5157,11 @@
       </p:grpSpPr>
       <p:sp>
         <p:nvSpPr>
-          <p:cNvPr id="53" name=""/>
+          <p:cNvPr id="1793054591" name=""/>
           <p:cNvSpPr/>
           <p:nvPr/>
         </p:nvSpPr>
-        <p:spPr>
+        <p:spPr bwMode="auto">
           <a:xfrm>
             <a:off x="1116000" y="549360"/>
             <a:ext cx="10166400" cy="1177920"/>
@@ -3718,17 +5213,16 @@
                 <a:tab pos="8983800" algn="l"/>
                 <a:tab pos="9410760" algn="l"/>
                 <a:tab pos="10134720" algn="l"/>
-                <a:tab pos="10333080" algn="l"/>
+                <a:tab pos="10333079" algn="l"/>
                 <a:tab pos="10782360" algn="l"/>
               </a:tabLst>
+              <a:defRPr/>
             </a:pPr>
             <a:r>
               <a:rPr lang="es-ES" sz="4000" b="1" u="none" strike="noStrike">
                 <a:solidFill>
                   <a:srgbClr val="000000"/>
                 </a:solidFill>
-                <a:effectLst/>
-                <a:uFillTx/>
                 <a:latin typeface="Neue Haas Grotesk Text Pro"/>
                 <a:ea typeface="DejaVu Sans"/>
               </a:rPr>
@@ -3738,8 +5232,6 @@
               <a:solidFill>
                 <a:srgbClr val="000000"/>
               </a:solidFill>
-              <a:effectLst/>
-              <a:uFillTx/>
               <a:latin typeface="Arial"/>
             </a:endParaRPr>
           </a:p>
@@ -3747,11 +5239,11 @@
       </p:sp>
       <p:sp>
         <p:nvSpPr>
-          <p:cNvPr id="54" name=""/>
+          <p:cNvPr id="279248729" name=""/>
           <p:cNvSpPr/>
           <p:nvPr/>
         </p:nvSpPr>
-        <p:spPr>
+        <p:spPr bwMode="auto">
           <a:xfrm>
             <a:off x="8540640" y="6356520"/>
             <a:ext cx="2741760" cy="363240"/>
@@ -3804,17 +5296,16 @@
                 <a:tab pos="8985240" algn="l"/>
                 <a:tab pos="9434520" algn="l"/>
                 <a:tab pos="9883800" algn="l"/>
-                <a:tab pos="10333080" algn="l"/>
+                <a:tab pos="10333079" algn="l"/>
                 <a:tab pos="10782360" algn="l"/>
               </a:tabLst>
+              <a:defRPr/>
             </a:pPr>
             <a:fld id="{89C15FEC-E9C2-41C3-AB6A-BAC2E2D08C5A}" type="slidenum">
               <a:rPr lang="es-ES" sz="1200" b="0" u="none" strike="noStrike">
                 <a:solidFill>
                   <a:srgbClr val="8B8B8B"/>
                 </a:solidFill>
-                <a:effectLst/>
-                <a:uFillTx/>
                 <a:latin typeface="Neue Haas Grotesk Text Pro"/>
                 <a:ea typeface="DejaVu Sans"/>
               </a:rPr>
@@ -3824,8 +5315,6 @@
               <a:solidFill>
                 <a:srgbClr val="000000"/>
               </a:solidFill>
-              <a:effectLst/>
-              <a:uFillTx/>
               <a:latin typeface="Arial"/>
             </a:endParaRPr>
           </a:p>
@@ -3833,11 +5322,11 @@
       </p:sp>
       <p:sp>
         <p:nvSpPr>
-          <p:cNvPr id="55" name=""/>
+          <p:cNvPr id="1607209095" name=""/>
           <p:cNvSpPr/>
           <p:nvPr/>
         </p:nvSpPr>
-        <p:spPr>
+        <p:spPr bwMode="auto">
           <a:xfrm>
             <a:off x="428760" y="2054160"/>
             <a:ext cx="11264760" cy="4753800"/>
@@ -3891,14 +5380,13 @@
                 <a:tab pos="10134720" algn="l"/>
                 <a:tab pos="10858680" algn="l"/>
               </a:tabLst>
+              <a:defRPr/>
             </a:pPr>
             <a:r>
               <a:rPr lang="es-ES" sz="1800" b="0" u="none" strike="noStrike">
                 <a:solidFill>
                   <a:srgbClr val="000000"/>
                 </a:solidFill>
-                <a:effectLst/>
-                <a:uFillTx/>
                 <a:latin typeface="Neue Haas Grotesk Text Pro"/>
                 <a:ea typeface="DejaVu Sans"/>
               </a:rPr>
@@ -3908,8 +5396,6 @@
               <a:solidFill>
                 <a:srgbClr val="000000"/>
               </a:solidFill>
-              <a:effectLst/>
-              <a:uFillTx/>
               <a:latin typeface="Arial"/>
             </a:endParaRPr>
           </a:p>
@@ -3944,13 +5430,12 @@
                 <a:tab pos="10134720" algn="l"/>
                 <a:tab pos="10858680" algn="l"/>
               </a:tabLst>
+              <a:defRPr/>
             </a:pPr>
             <a:endParaRPr lang="en-US" sz="1500" b="0" u="none" strike="noStrike">
               <a:solidFill>
                 <a:srgbClr val="000000"/>
               </a:solidFill>
-              <a:effectLst/>
-              <a:uFillTx/>
               <a:latin typeface="Arial"/>
             </a:endParaRPr>
           </a:p>
@@ -3985,14 +5470,13 @@
                 <a:tab pos="10134720" algn="l"/>
                 <a:tab pos="10858680" algn="l"/>
               </a:tabLst>
+              <a:defRPr/>
             </a:pPr>
             <a:r>
               <a:rPr lang="es-ES" sz="1800" b="0" u="none" strike="noStrike">
                 <a:solidFill>
                   <a:srgbClr val="000000"/>
                 </a:solidFill>
-                <a:effectLst/>
-                <a:uFillTx/>
                 <a:latin typeface="Neue Haas Grotesk Text Pro"/>
                 <a:ea typeface="DejaVu Sans"/>
               </a:rPr>
@@ -4002,8 +5486,6 @@
               <a:solidFill>
                 <a:srgbClr val="000000"/>
               </a:solidFill>
-              <a:effectLst/>
-              <a:uFillTx/>
               <a:latin typeface="Arial"/>
             </a:endParaRPr>
           </a:p>
@@ -4038,13 +5520,12 @@
                 <a:tab pos="10134720" algn="l"/>
                 <a:tab pos="10858680" algn="l"/>
               </a:tabLst>
+              <a:defRPr/>
             </a:pPr>
             <a:endParaRPr lang="en-US" sz="1500" b="0" u="none" strike="noStrike">
               <a:solidFill>
                 <a:srgbClr val="000000"/>
               </a:solidFill>
-              <a:effectLst/>
-              <a:uFillTx/>
               <a:latin typeface="Arial"/>
             </a:endParaRPr>
           </a:p>
@@ -4079,14 +5560,13 @@
                 <a:tab pos="10134720" algn="l"/>
                 <a:tab pos="10858680" algn="l"/>
               </a:tabLst>
+              <a:defRPr/>
             </a:pPr>
             <a:r>
               <a:rPr lang="es-ES" sz="1800" b="0" u="none" strike="noStrike">
                 <a:solidFill>
                   <a:srgbClr val="000000"/>
                 </a:solidFill>
-                <a:effectLst/>
-                <a:uFillTx/>
                 <a:latin typeface="Neue Haas Grotesk Text Pro"/>
                 <a:ea typeface="DejaVu Sans"/>
               </a:rPr>
@@ -4096,8 +5576,6 @@
               <a:solidFill>
                 <a:srgbClr val="000000"/>
               </a:solidFill>
-              <a:effectLst/>
-              <a:uFillTx/>
               <a:latin typeface="Arial"/>
             </a:endParaRPr>
           </a:p>
@@ -4132,13 +5610,12 @@
                 <a:tab pos="10134720" algn="l"/>
                 <a:tab pos="10858680" algn="l"/>
               </a:tabLst>
+              <a:defRPr/>
             </a:pPr>
             <a:endParaRPr lang="en-US" sz="1500" b="0" u="none" strike="noStrike">
               <a:solidFill>
                 <a:srgbClr val="000000"/>
               </a:solidFill>
-              <a:effectLst/>
-              <a:uFillTx/>
               <a:latin typeface="Arial"/>
             </a:endParaRPr>
           </a:p>
@@ -4173,14 +5650,13 @@
                 <a:tab pos="10134720" algn="l"/>
                 <a:tab pos="10858680" algn="l"/>
               </a:tabLst>
+              <a:defRPr/>
             </a:pPr>
             <a:r>
               <a:rPr lang="es-ES" sz="1800" b="0" u="none" strike="noStrike">
                 <a:solidFill>
                   <a:srgbClr val="000000"/>
                 </a:solidFill>
-                <a:effectLst/>
-                <a:uFillTx/>
                 <a:latin typeface="Neue Haas Grotesk Text Pro"/>
                 <a:ea typeface="DejaVu Sans"/>
               </a:rPr>
@@ -4190,8 +5666,6 @@
               <a:solidFill>
                 <a:srgbClr val="000000"/>
               </a:solidFill>
-              <a:effectLst/>
-              <a:uFillTx/>
               <a:latin typeface="Arial"/>
             </a:endParaRPr>
           </a:p>
@@ -4226,13 +5700,12 @@
                 <a:tab pos="10134720" algn="l"/>
                 <a:tab pos="10858680" algn="l"/>
               </a:tabLst>
+              <a:defRPr/>
             </a:pPr>
             <a:endParaRPr lang="en-US" sz="1500" b="0" u="none" strike="noStrike">
               <a:solidFill>
                 <a:srgbClr val="000000"/>
               </a:solidFill>
-              <a:effectLst/>
-              <a:uFillTx/>
               <a:latin typeface="Arial"/>
             </a:endParaRPr>
           </a:p>
@@ -4267,14 +5740,13 @@
                 <a:tab pos="10134720" algn="l"/>
                 <a:tab pos="10858680" algn="l"/>
               </a:tabLst>
+              <a:defRPr/>
             </a:pPr>
             <a:r>
               <a:rPr lang="es-ES" sz="1800" b="0" u="none" strike="noStrike">
                 <a:solidFill>
                   <a:srgbClr val="000000"/>
                 </a:solidFill>
-                <a:effectLst/>
-                <a:uFillTx/>
                 <a:latin typeface="Neue Haas Grotesk Text Pro"/>
                 <a:ea typeface="DejaVu Sans"/>
               </a:rPr>
@@ -4284,8 +5756,6 @@
               <a:solidFill>
                 <a:srgbClr val="000000"/>
               </a:solidFill>
-              <a:effectLst/>
-              <a:uFillTx/>
               <a:latin typeface="Arial"/>
             </a:endParaRPr>
           </a:p>
@@ -4320,13 +5790,12 @@
                 <a:tab pos="10134720" algn="l"/>
                 <a:tab pos="10858680" algn="l"/>
               </a:tabLst>
+              <a:defRPr/>
             </a:pPr>
             <a:endParaRPr lang="en-US" sz="1500" b="0" u="none" strike="noStrike">
               <a:solidFill>
                 <a:srgbClr val="000000"/>
               </a:solidFill>
-              <a:effectLst/>
-              <a:uFillTx/>
               <a:latin typeface="Arial"/>
             </a:endParaRPr>
           </a:p>
@@ -4361,14 +5830,13 @@
                 <a:tab pos="10134720" algn="l"/>
                 <a:tab pos="10858680" algn="l"/>
               </a:tabLst>
+              <a:defRPr/>
             </a:pPr>
             <a:r>
               <a:rPr lang="es-ES" sz="1800" b="0" u="none" strike="noStrike">
                 <a:solidFill>
                   <a:srgbClr val="000000"/>
                 </a:solidFill>
-                <a:effectLst/>
-                <a:uFillTx/>
                 <a:latin typeface="Neue Haas Grotesk Text Pro"/>
                 <a:ea typeface="DejaVu Sans"/>
               </a:rPr>
@@ -4378,8 +5846,6 @@
               <a:solidFill>
                 <a:srgbClr val="000000"/>
               </a:solidFill>
-              <a:effectLst/>
-              <a:uFillTx/>
               <a:latin typeface="Arial"/>
             </a:endParaRPr>
           </a:p>
@@ -4414,13 +5880,12 @@
                 <a:tab pos="10134720" algn="l"/>
                 <a:tab pos="10858680" algn="l"/>
               </a:tabLst>
+              <a:defRPr/>
             </a:pPr>
             <a:endParaRPr lang="en-US" sz="1800" b="0" u="none" strike="noStrike">
               <a:solidFill>
                 <a:srgbClr val="000000"/>
               </a:solidFill>
-              <a:effectLst/>
-              <a:uFillTx/>
               <a:latin typeface="Arial"/>
             </a:endParaRPr>
           </a:p>
@@ -4455,14 +5920,13 @@
                 <a:tab pos="10134720" algn="l"/>
                 <a:tab pos="10858680" algn="l"/>
               </a:tabLst>
+              <a:defRPr/>
             </a:pPr>
             <a:r>
               <a:rPr lang="es-ES" sz="1800" b="0" u="none" strike="noStrike">
                 <a:solidFill>
                   <a:srgbClr val="000000"/>
                 </a:solidFill>
-                <a:effectLst/>
-                <a:uFillTx/>
                 <a:latin typeface="Neue Haas Grotesk Text Pro"/>
                 <a:ea typeface="DejaVu Sans"/>
               </a:rPr>
@@ -4472,8 +5936,6 @@
               <a:solidFill>
                 <a:srgbClr val="000000"/>
               </a:solidFill>
-              <a:effectLst/>
-              <a:uFillTx/>
               <a:latin typeface="Arial"/>
             </a:endParaRPr>
           </a:p>
@@ -4508,13 +5970,12 @@
                 <a:tab pos="10134720" algn="l"/>
                 <a:tab pos="10858680" algn="l"/>
               </a:tabLst>
+              <a:defRPr/>
             </a:pPr>
             <a:endParaRPr lang="en-US" sz="1500" b="0" u="none" strike="noStrike">
               <a:solidFill>
                 <a:srgbClr val="000000"/>
               </a:solidFill>
-              <a:effectLst/>
-              <a:uFillTx/>
               <a:latin typeface="Arial"/>
             </a:endParaRPr>
           </a:p>
@@ -4549,14 +6010,13 @@
                 <a:tab pos="10134720" algn="l"/>
                 <a:tab pos="10858680" algn="l"/>
               </a:tabLst>
+              <a:defRPr/>
             </a:pPr>
             <a:r>
               <a:rPr lang="es-ES" sz="1800" b="0" u="none" strike="noStrike">
                 <a:solidFill>
                   <a:srgbClr val="000000"/>
                 </a:solidFill>
-                <a:effectLst/>
-                <a:uFillTx/>
                 <a:latin typeface="Neue Haas Grotesk Text Pro"/>
                 <a:ea typeface="DejaVu Sans"/>
               </a:rPr>
@@ -4566,8 +6026,6 @@
               <a:solidFill>
                 <a:srgbClr val="000000"/>
               </a:solidFill>
-              <a:effectLst/>
-              <a:uFillTx/>
               <a:latin typeface="Arial"/>
             </a:endParaRPr>
           </a:p>
@@ -4575,14 +6033,25 @@
       </p:sp>
     </p:spTree>
   </p:cSld>
+  <p:clrMapOvr>
+    <a:masterClrMapping/>
+  </p:clrMapOvr>
+  <mc:AlternateContent xmlns:mc="http://schemas.openxmlformats.org/markup-compatibility/2006">
+    <mc:Choice xmlns:p159="http://schemas.microsoft.com/office/powerpoint/2015/09/main" xmlns:p14="http://schemas.microsoft.com/office/powerpoint/2010/main" Requires="p159">
+      <p:transition p14:dur="500" advClick="1"/>
+    </mc:Choice>
+    <mc:Fallback>
+      <p:transition advClick="1"/>
+    </mc:Fallback>
+  </mc:AlternateContent>
 </p:sld>
 </file>
 
 <file path=ppt/slides/slide12.xml><?xml version="1.0" encoding="utf-8"?>
-<p:sld xmlns:a="http://schemas.openxmlformats.org/drawingml/2006/main" xmlns:p="http://schemas.openxmlformats.org/presentationml/2006/main" xmlns:r="http://schemas.openxmlformats.org/officeDocument/2006/relationships" xmlns:p14="http://schemas.microsoft.com/office/powerpoint/2010/main" xmlns:p15="http://schemas.microsoft.com/office/powerpoint/2012/main" xmlns:mc="http://schemas.openxmlformats.org/markup-compatibility/2006">
-  <p:cSld>
+<p:sld xmlns:a="http://schemas.openxmlformats.org/drawingml/2006/main" xmlns:r="http://schemas.openxmlformats.org/officeDocument/2006/relationships" xmlns:p="http://schemas.openxmlformats.org/presentationml/2006/main" xmlns:m="http://schemas.openxmlformats.org/officeDocument/2006/math" xmlns:w="http://schemas.openxmlformats.org/wordprocessingml/2006/main" xmlns:mc="http://schemas.openxmlformats.org/markup-compatibility/2006" showMasterPhAnim="0" showMasterSp="1" show="1">
+  <p:cSld name="">
     <p:bg>
-      <p:bgPr>
+      <p:bgPr shadeToTitle="0">
         <a:solidFill>
           <a:srgbClr val="FFFFFF"/>
         </a:solidFill>
@@ -4594,7 +6063,7 @@
         <p:cNvGrpSpPr/>
         <p:nvPr/>
       </p:nvGrpSpPr>
-      <p:grpSpPr>
+      <p:grpSpPr bwMode="auto">
         <a:xfrm>
           <a:off x="0" y="0"/>
           <a:ext cx="0" cy="0"/>
@@ -4604,11 +6073,11 @@
       </p:grpSpPr>
       <p:sp>
         <p:nvSpPr>
-          <p:cNvPr id="56" name=""/>
+          <p:cNvPr id="2073970988" name=""/>
           <p:cNvSpPr/>
           <p:nvPr/>
         </p:nvSpPr>
-        <p:spPr>
+        <p:spPr bwMode="auto">
           <a:xfrm>
             <a:off x="1116000" y="549360"/>
             <a:ext cx="10166400" cy="1177920"/>
@@ -4660,17 +6129,16 @@
                 <a:tab pos="8983800" algn="l"/>
                 <a:tab pos="9410760" algn="l"/>
                 <a:tab pos="10134720" algn="l"/>
-                <a:tab pos="10333080" algn="l"/>
+                <a:tab pos="10333079" algn="l"/>
                 <a:tab pos="10782360" algn="l"/>
               </a:tabLst>
+              <a:defRPr/>
             </a:pPr>
             <a:r>
               <a:rPr lang="es-ES" sz="4000" b="1" u="none" strike="noStrike">
                 <a:solidFill>
                   <a:srgbClr val="000000"/>
                 </a:solidFill>
-                <a:effectLst/>
-                <a:uFillTx/>
                 <a:latin typeface="Neue Haas Grotesk Text Pro"/>
                 <a:ea typeface="DejaVu Sans"/>
               </a:rPr>
@@ -4680,8 +6148,6 @@
               <a:solidFill>
                 <a:srgbClr val="000000"/>
               </a:solidFill>
-              <a:effectLst/>
-              <a:uFillTx/>
               <a:latin typeface="Arial"/>
             </a:endParaRPr>
           </a:p>
@@ -4689,11 +6155,11 @@
       </p:sp>
       <p:sp>
         <p:nvSpPr>
-          <p:cNvPr id="57" name=""/>
+          <p:cNvPr id="1082990166" name=""/>
           <p:cNvSpPr/>
           <p:nvPr/>
         </p:nvSpPr>
-        <p:spPr>
+        <p:spPr bwMode="auto">
           <a:xfrm>
             <a:off x="8540640" y="6356520"/>
             <a:ext cx="2741760" cy="363240"/>
@@ -4746,17 +6212,16 @@
                 <a:tab pos="8985240" algn="l"/>
                 <a:tab pos="9434520" algn="l"/>
                 <a:tab pos="9883800" algn="l"/>
-                <a:tab pos="10333080" algn="l"/>
+                <a:tab pos="10333079" algn="l"/>
                 <a:tab pos="10782360" algn="l"/>
               </a:tabLst>
+              <a:defRPr/>
             </a:pPr>
             <a:fld id="{4210F219-D0BF-4EFF-8D8D-58419D4F3911}" type="slidenum">
               <a:rPr lang="es-ES" sz="1200" b="0" u="none" strike="noStrike">
                 <a:solidFill>
                   <a:srgbClr val="8B8B8B"/>
                 </a:solidFill>
-                <a:effectLst/>
-                <a:uFillTx/>
                 <a:latin typeface="Neue Haas Grotesk Text Pro"/>
                 <a:ea typeface="DejaVu Sans"/>
               </a:rPr>
@@ -4766,8 +6231,6 @@
               <a:solidFill>
                 <a:srgbClr val="000000"/>
               </a:solidFill>
-              <a:effectLst/>
-              <a:uFillTx/>
               <a:latin typeface="Arial"/>
             </a:endParaRPr>
           </a:p>
@@ -4775,13 +6238,13 @@
       </p:sp>
       <p:sp>
         <p:nvSpPr>
-          <p:cNvPr id="58" name=""/>
+          <p:cNvPr id="854565346" name=""/>
           <p:cNvSpPr/>
           <p:nvPr/>
         </p:nvSpPr>
-        <p:spPr>
+        <p:spPr bwMode="auto">
           <a:xfrm>
-            <a:off x="428760" y="2306520"/>
+            <a:off x="428760" y="2306519"/>
             <a:ext cx="11264760" cy="3702240"/>
           </a:xfrm>
           <a:prstGeom prst="rect">
@@ -4833,14 +6296,13 @@
                 <a:tab pos="10134720" algn="l"/>
                 <a:tab pos="10858680" algn="l"/>
               </a:tabLst>
+              <a:defRPr/>
             </a:pPr>
             <a:r>
               <a:rPr lang="es-ES" sz="1800" b="0" u="none" strike="noStrike">
                 <a:solidFill>
                   <a:srgbClr val="000000"/>
                 </a:solidFill>
-                <a:effectLst/>
-                <a:uFillTx/>
                 <a:latin typeface="Neue Haas Grotesk Text Pro"/>
                 <a:ea typeface="DejaVu Sans"/>
               </a:rPr>
@@ -4850,8 +6312,6 @@
               <a:solidFill>
                 <a:srgbClr val="000000"/>
               </a:solidFill>
-              <a:effectLst/>
-              <a:uFillTx/>
               <a:latin typeface="Arial"/>
             </a:endParaRPr>
           </a:p>
@@ -4886,13 +6346,12 @@
                 <a:tab pos="10134720" algn="l"/>
                 <a:tab pos="10858680" algn="l"/>
               </a:tabLst>
+              <a:defRPr/>
             </a:pPr>
             <a:endParaRPr lang="en-US" sz="1500" b="0" u="none" strike="noStrike">
               <a:solidFill>
                 <a:srgbClr val="000000"/>
               </a:solidFill>
-              <a:effectLst/>
-              <a:uFillTx/>
               <a:latin typeface="Arial"/>
             </a:endParaRPr>
           </a:p>
@@ -4927,14 +6386,13 @@
                 <a:tab pos="10134720" algn="l"/>
                 <a:tab pos="10858680" algn="l"/>
               </a:tabLst>
+              <a:defRPr/>
             </a:pPr>
             <a:r>
               <a:rPr lang="es-ES" sz="1800" b="0" u="none" strike="noStrike">
                 <a:solidFill>
                   <a:srgbClr val="000000"/>
                 </a:solidFill>
-                <a:effectLst/>
-                <a:uFillTx/>
                 <a:latin typeface="Neue Haas Grotesk Text Pro"/>
                 <a:ea typeface="DejaVu Sans"/>
               </a:rPr>
@@ -4944,8 +6402,6 @@
               <a:solidFill>
                 <a:srgbClr val="000000"/>
               </a:solidFill>
-              <a:effectLst/>
-              <a:uFillTx/>
               <a:latin typeface="Arial"/>
             </a:endParaRPr>
           </a:p>
@@ -4980,13 +6436,12 @@
                 <a:tab pos="10134720" algn="l"/>
                 <a:tab pos="10858680" algn="l"/>
               </a:tabLst>
+              <a:defRPr/>
             </a:pPr>
             <a:endParaRPr lang="en-US" sz="1500" b="0" u="none" strike="noStrike">
               <a:solidFill>
                 <a:srgbClr val="000000"/>
               </a:solidFill>
-              <a:effectLst/>
-              <a:uFillTx/>
               <a:latin typeface="Arial"/>
             </a:endParaRPr>
           </a:p>
@@ -5021,14 +6476,13 @@
                 <a:tab pos="10134720" algn="l"/>
                 <a:tab pos="10858680" algn="l"/>
               </a:tabLst>
+              <a:defRPr/>
             </a:pPr>
             <a:r>
               <a:rPr lang="es-ES" sz="1800" b="0" u="none" strike="noStrike">
                 <a:solidFill>
                   <a:srgbClr val="000000"/>
                 </a:solidFill>
-                <a:effectLst/>
-                <a:uFillTx/>
                 <a:latin typeface="Neue Haas Grotesk Text Pro"/>
                 <a:ea typeface="DejaVu Sans"/>
               </a:rPr>
@@ -5038,8 +6492,6 @@
               <a:solidFill>
                 <a:srgbClr val="000000"/>
               </a:solidFill>
-              <a:effectLst/>
-              <a:uFillTx/>
               <a:latin typeface="Arial"/>
             </a:endParaRPr>
           </a:p>
@@ -5074,13 +6526,12 @@
                 <a:tab pos="10134720" algn="l"/>
                 <a:tab pos="10858680" algn="l"/>
               </a:tabLst>
+              <a:defRPr/>
             </a:pPr>
             <a:endParaRPr lang="en-US" sz="1500" b="0" u="none" strike="noStrike">
               <a:solidFill>
                 <a:srgbClr val="000000"/>
               </a:solidFill>
-              <a:effectLst/>
-              <a:uFillTx/>
               <a:latin typeface="Arial"/>
             </a:endParaRPr>
           </a:p>
@@ -5115,14 +6566,13 @@
                 <a:tab pos="10134720" algn="l"/>
                 <a:tab pos="10858680" algn="l"/>
               </a:tabLst>
+              <a:defRPr/>
             </a:pPr>
             <a:r>
               <a:rPr lang="es-ES" sz="1800" b="0" u="none" strike="noStrike">
                 <a:solidFill>
                   <a:srgbClr val="000000"/>
                 </a:solidFill>
-                <a:effectLst/>
-                <a:uFillTx/>
                 <a:latin typeface="Neue Haas Grotesk Text Pro"/>
                 <a:ea typeface="DejaVu Sans"/>
               </a:rPr>
@@ -5132,8 +6582,6 @@
               <a:solidFill>
                 <a:srgbClr val="000000"/>
               </a:solidFill>
-              <a:effectLst/>
-              <a:uFillTx/>
               <a:latin typeface="Arial"/>
             </a:endParaRPr>
           </a:p>
@@ -5168,13 +6616,12 @@
                 <a:tab pos="10134720" algn="l"/>
                 <a:tab pos="10858680" algn="l"/>
               </a:tabLst>
+              <a:defRPr/>
             </a:pPr>
             <a:endParaRPr lang="en-US" sz="1800" b="0" u="none" strike="noStrike">
               <a:solidFill>
                 <a:srgbClr val="000000"/>
               </a:solidFill>
-              <a:effectLst/>
-              <a:uFillTx/>
               <a:latin typeface="Arial"/>
             </a:endParaRPr>
           </a:p>
@@ -5209,14 +6656,13 @@
                 <a:tab pos="10134720" algn="l"/>
                 <a:tab pos="10858680" algn="l"/>
               </a:tabLst>
+              <a:defRPr/>
             </a:pPr>
             <a:r>
               <a:rPr lang="es-ES" sz="1800" b="0" u="none" strike="noStrike">
                 <a:solidFill>
                   <a:srgbClr val="000000"/>
                 </a:solidFill>
-                <a:effectLst/>
-                <a:uFillTx/>
                 <a:latin typeface="Neue Haas Grotesk Text Pro"/>
                 <a:ea typeface="DejaVu Sans"/>
               </a:rPr>
@@ -5226,8 +6672,6 @@
               <a:solidFill>
                 <a:srgbClr val="000000"/>
               </a:solidFill>
-              <a:effectLst/>
-              <a:uFillTx/>
               <a:latin typeface="Arial"/>
             </a:endParaRPr>
           </a:p>
@@ -5262,13 +6706,12 @@
                 <a:tab pos="10134720" algn="l"/>
                 <a:tab pos="10858680" algn="l"/>
               </a:tabLst>
+              <a:defRPr/>
             </a:pPr>
             <a:endParaRPr lang="en-US" sz="1500" b="0" u="none" strike="noStrike">
               <a:solidFill>
                 <a:srgbClr val="000000"/>
               </a:solidFill>
-              <a:effectLst/>
-              <a:uFillTx/>
               <a:latin typeface="Arial"/>
             </a:endParaRPr>
           </a:p>
@@ -5303,14 +6746,13 @@
                 <a:tab pos="10134720" algn="l"/>
                 <a:tab pos="10858680" algn="l"/>
               </a:tabLst>
+              <a:defRPr/>
             </a:pPr>
             <a:r>
               <a:rPr lang="es-ES" sz="1800" b="0" u="none" strike="noStrike">
                 <a:solidFill>
                   <a:srgbClr val="000000"/>
                 </a:solidFill>
-                <a:effectLst/>
-                <a:uFillTx/>
                 <a:latin typeface="Neue Haas Grotesk Text Pro"/>
                 <a:ea typeface="DejaVu Sans"/>
               </a:rPr>
@@ -5320,8 +6762,6 @@
               <a:solidFill>
                 <a:srgbClr val="000000"/>
               </a:solidFill>
-              <a:effectLst/>
-              <a:uFillTx/>
               <a:latin typeface="Arial"/>
             </a:endParaRPr>
           </a:p>
@@ -5356,13 +6796,12 @@
                 <a:tab pos="10134720" algn="l"/>
                 <a:tab pos="10858680" algn="l"/>
               </a:tabLst>
+              <a:defRPr/>
             </a:pPr>
             <a:endParaRPr lang="en-US" sz="1500" b="0" u="none" strike="noStrike">
               <a:solidFill>
                 <a:srgbClr val="000000"/>
               </a:solidFill>
-              <a:effectLst/>
-              <a:uFillTx/>
               <a:latin typeface="Arial"/>
             </a:endParaRPr>
           </a:p>
@@ -5397,14 +6836,13 @@
                 <a:tab pos="10134720" algn="l"/>
                 <a:tab pos="10858680" algn="l"/>
               </a:tabLst>
+              <a:defRPr/>
             </a:pPr>
             <a:r>
               <a:rPr lang="es-ES" sz="1800" b="0" u="none" strike="noStrike">
                 <a:solidFill>
                   <a:srgbClr val="000000"/>
                 </a:solidFill>
-                <a:effectLst/>
-                <a:uFillTx/>
                 <a:latin typeface="Neue Haas Grotesk Text Pro"/>
                 <a:ea typeface="DejaVu Sans"/>
               </a:rPr>
@@ -5414,8 +6852,6 @@
               <a:solidFill>
                 <a:srgbClr val="000000"/>
               </a:solidFill>
-              <a:effectLst/>
-              <a:uFillTx/>
               <a:latin typeface="Arial"/>
             </a:endParaRPr>
           </a:p>
@@ -5423,14 +6859,25 @@
       </p:sp>
     </p:spTree>
   </p:cSld>
+  <p:clrMapOvr>
+    <a:masterClrMapping/>
+  </p:clrMapOvr>
+  <mc:AlternateContent xmlns:mc="http://schemas.openxmlformats.org/markup-compatibility/2006">
+    <mc:Choice xmlns:p159="http://schemas.microsoft.com/office/powerpoint/2015/09/main" xmlns:p14="http://schemas.microsoft.com/office/powerpoint/2010/main" Requires="p159">
+      <p:transition p14:dur="500" advClick="1"/>
+    </mc:Choice>
+    <mc:Fallback>
+      <p:transition advClick="1"/>
+    </mc:Fallback>
+  </mc:AlternateContent>
 </p:sld>
 </file>
 
 <file path=ppt/slides/slide13.xml><?xml version="1.0" encoding="utf-8"?>
-<p:sld xmlns:a="http://schemas.openxmlformats.org/drawingml/2006/main" xmlns:p="http://schemas.openxmlformats.org/presentationml/2006/main" xmlns:r="http://schemas.openxmlformats.org/officeDocument/2006/relationships" xmlns:p14="http://schemas.microsoft.com/office/powerpoint/2010/main" xmlns:p15="http://schemas.microsoft.com/office/powerpoint/2012/main" xmlns:mc="http://schemas.openxmlformats.org/markup-compatibility/2006">
-  <p:cSld>
+<p:sld xmlns:a="http://schemas.openxmlformats.org/drawingml/2006/main" xmlns:r="http://schemas.openxmlformats.org/officeDocument/2006/relationships" xmlns:p="http://schemas.openxmlformats.org/presentationml/2006/main" xmlns:m="http://schemas.openxmlformats.org/officeDocument/2006/math" xmlns:w="http://schemas.openxmlformats.org/wordprocessingml/2006/main" xmlns:mc="http://schemas.openxmlformats.org/markup-compatibility/2006" showMasterPhAnim="0" showMasterSp="1" show="1">
+  <p:cSld name="">
     <p:bg>
-      <p:bgPr>
+      <p:bgPr shadeToTitle="0">
         <a:solidFill>
           <a:srgbClr val="FFFFFF"/>
         </a:solidFill>
@@ -5442,7 +6889,7 @@
         <p:cNvGrpSpPr/>
         <p:nvPr/>
       </p:nvGrpSpPr>
-      <p:grpSpPr>
+      <p:grpSpPr bwMode="auto">
         <a:xfrm>
           <a:off x="0" y="0"/>
           <a:ext cx="0" cy="0"/>
@@ -5452,11 +6899,11 @@
       </p:grpSpPr>
       <p:sp>
         <p:nvSpPr>
-          <p:cNvPr id="59" name=""/>
+          <p:cNvPr id="233956831" name=""/>
           <p:cNvSpPr/>
           <p:nvPr/>
         </p:nvSpPr>
-        <p:spPr>
+        <p:spPr bwMode="auto">
           <a:xfrm>
             <a:off x="1116000" y="549360"/>
             <a:ext cx="10166400" cy="1177920"/>
@@ -5508,17 +6955,16 @@
                 <a:tab pos="8983800" algn="l"/>
                 <a:tab pos="9410760" algn="l"/>
                 <a:tab pos="10134720" algn="l"/>
-                <a:tab pos="10333080" algn="l"/>
+                <a:tab pos="10333079" algn="l"/>
                 <a:tab pos="10782360" algn="l"/>
               </a:tabLst>
+              <a:defRPr/>
             </a:pPr>
             <a:r>
               <a:rPr lang="es-ES" sz="4000" b="1" u="none" strike="noStrike">
                 <a:solidFill>
                   <a:srgbClr val="000000"/>
                 </a:solidFill>
-                <a:effectLst/>
-                <a:uFillTx/>
                 <a:latin typeface="Neue Haas Grotesk Text Pro"/>
                 <a:ea typeface="DejaVu Sans"/>
               </a:rPr>
@@ -5528,8 +6974,6 @@
               <a:solidFill>
                 <a:srgbClr val="000000"/>
               </a:solidFill>
-              <a:effectLst/>
-              <a:uFillTx/>
               <a:latin typeface="Arial"/>
             </a:endParaRPr>
           </a:p>
@@ -5537,16 +6981,16 @@
       </p:sp>
       <p:pic>
         <p:nvPicPr>
-          <p:cNvPr id="60" name=""/>
+          <p:cNvPr id="1393457491" name=""/>
           <p:cNvPicPr/>
           <p:nvPr/>
         </p:nvPicPr>
-        <p:blipFill>
-          <a:blip r:embed="rId1"/>
+        <p:blipFill rotWithShape="1">
+          <a:blip r:embed="rId3"/>
           <a:srcRect l="0" t="17775" r="4" b="4128"/>
           <a:stretch/>
         </p:blipFill>
-        <p:spPr>
+        <p:spPr bwMode="auto">
           <a:xfrm>
             <a:off x="1828800" y="2025000"/>
             <a:ext cx="8915400" cy="4832640"/>
@@ -5562,14 +7006,25 @@
       </p:pic>
     </p:spTree>
   </p:cSld>
+  <p:clrMapOvr>
+    <a:masterClrMapping/>
+  </p:clrMapOvr>
+  <mc:AlternateContent xmlns:mc="http://schemas.openxmlformats.org/markup-compatibility/2006">
+    <mc:Choice xmlns:p159="http://schemas.microsoft.com/office/powerpoint/2015/09/main" xmlns:p14="http://schemas.microsoft.com/office/powerpoint/2010/main" Requires="p159">
+      <p:transition p14:dur="500" advClick="1"/>
+    </mc:Choice>
+    <mc:Fallback>
+      <p:transition advClick="1"/>
+    </mc:Fallback>
+  </mc:AlternateContent>
 </p:sld>
 </file>
 
 <file path=ppt/slides/slide14.xml><?xml version="1.0" encoding="utf-8"?>
-<p:sld xmlns:a="http://schemas.openxmlformats.org/drawingml/2006/main" xmlns:p="http://schemas.openxmlformats.org/presentationml/2006/main" xmlns:r="http://schemas.openxmlformats.org/officeDocument/2006/relationships" xmlns:p14="http://schemas.microsoft.com/office/powerpoint/2010/main" xmlns:p15="http://schemas.microsoft.com/office/powerpoint/2012/main" xmlns:mc="http://schemas.openxmlformats.org/markup-compatibility/2006">
-  <p:cSld>
+<p:sld xmlns:a="http://schemas.openxmlformats.org/drawingml/2006/main" xmlns:r="http://schemas.openxmlformats.org/officeDocument/2006/relationships" xmlns:p="http://schemas.openxmlformats.org/presentationml/2006/main" xmlns:m="http://schemas.openxmlformats.org/officeDocument/2006/math" xmlns:w="http://schemas.openxmlformats.org/wordprocessingml/2006/main" xmlns:mc="http://schemas.openxmlformats.org/markup-compatibility/2006" showMasterPhAnim="0" showMasterSp="1" show="1">
+  <p:cSld name="">
     <p:bg>
-      <p:bgPr>
+      <p:bgPr shadeToTitle="0">
         <a:solidFill>
           <a:srgbClr val="FFFFFF"/>
         </a:solidFill>
@@ -5581,7 +7036,7 @@
         <p:cNvGrpSpPr/>
         <p:nvPr/>
       </p:nvGrpSpPr>
-      <p:grpSpPr>
+      <p:grpSpPr bwMode="auto">
         <a:xfrm>
           <a:off x="0" y="0"/>
           <a:ext cx="0" cy="0"/>
@@ -5591,11 +7046,309 @@
       </p:grpSpPr>
       <p:sp>
         <p:nvSpPr>
-          <p:cNvPr id="61" name=""/>
+          <p:cNvPr id="2119815400" name=""/>
           <p:cNvSpPr/>
           <p:nvPr/>
         </p:nvSpPr>
-        <p:spPr>
+        <p:spPr bwMode="auto">
+          <a:xfrm>
+            <a:off x="1116000" y="549360"/>
+            <a:ext cx="10166400" cy="1177920"/>
+          </a:xfrm>
+          <a:prstGeom prst="rect">
+            <a:avLst/>
+          </a:prstGeom>
+          <a:noFill/>
+          <a:ln w="0">
+            <a:noFill/>
+          </a:ln>
+        </p:spPr>
+        <p:style>
+          <a:lnRef idx="0"/>
+          <a:fillRef idx="0"/>
+          <a:effectRef idx="0"/>
+          <a:fontRef idx="minor"/>
+        </p:style>
+        <p:txBody>
+          <a:bodyPr lIns="90000" tIns="45000" rIns="90000" bIns="45000" anchor="ctr">
+            <a:noAutofit/>
+          </a:bodyPr>
+          <a:p>
+            <a:pPr>
+              <a:lnSpc>
+                <a:spcPct val="90000"/>
+              </a:lnSpc>
+              <a:tabLst>
+                <a:tab pos="0" algn="l"/>
+                <a:tab pos="447840" algn="l"/>
+                <a:tab pos="896760" algn="l"/>
+                <a:tab pos="1346040" algn="l"/>
+                <a:tab pos="1795320" algn="l"/>
+                <a:tab pos="2244600" algn="l"/>
+                <a:tab pos="2693880" algn="l"/>
+                <a:tab pos="3143160" algn="l"/>
+                <a:tab pos="3592440" algn="l"/>
+                <a:tab pos="4041720" algn="l"/>
+                <a:tab pos="4491000" algn="l"/>
+                <a:tab pos="4940279" algn="l"/>
+                <a:tab pos="5389560" algn="l"/>
+                <a:tab pos="5838840" algn="l"/>
+                <a:tab pos="6288120" algn="l"/>
+                <a:tab pos="6737400" algn="l"/>
+                <a:tab pos="7186680" algn="l"/>
+                <a:tab pos="7635960" algn="l"/>
+                <a:tab pos="8085240" algn="l"/>
+                <a:tab pos="8534520" algn="l"/>
+                <a:tab pos="8983800" algn="l"/>
+                <a:tab pos="9410760" algn="l"/>
+                <a:tab pos="10134720" algn="l"/>
+                <a:tab pos="10333078" algn="l"/>
+                <a:tab pos="10782360" algn="l"/>
+              </a:tabLst>
+              <a:defRPr/>
+            </a:pPr>
+            <a:r>
+              <a:rPr lang="es-ES" sz="4000" b="1" u="none" strike="noStrike">
+                <a:solidFill>
+                  <a:srgbClr val="000000"/>
+                </a:solidFill>
+                <a:latin typeface="Neue Haas Grotesk Text Pro"/>
+                <a:ea typeface="DejaVu Sans"/>
+              </a:rPr>
+              <a:t>Repositori Github</a:t>
+            </a:r>
+            <a:endParaRPr lang="en-US" sz="4000" b="0" u="none" strike="noStrike">
+              <a:solidFill>
+                <a:srgbClr val="000000"/>
+              </a:solidFill>
+              <a:latin typeface="Arial"/>
+            </a:endParaRPr>
+          </a:p>
+        </p:txBody>
+      </p:sp>
+      <p:sp>
+        <p:nvSpPr>
+          <p:cNvPr id="53700121" name=""/>
+          <p:cNvSpPr/>
+          <p:nvPr/>
+        </p:nvSpPr>
+        <p:spPr bwMode="auto">
+          <a:xfrm>
+            <a:off x="8540640" y="6356520"/>
+            <a:ext cx="2741760" cy="363240"/>
+          </a:xfrm>
+          <a:prstGeom prst="rect">
+            <a:avLst/>
+          </a:prstGeom>
+          <a:noFill/>
+          <a:ln w="0">
+            <a:noFill/>
+          </a:ln>
+        </p:spPr>
+        <p:style>
+          <a:lnRef idx="0"/>
+          <a:fillRef idx="0"/>
+          <a:effectRef idx="0"/>
+          <a:fontRef idx="minor"/>
+        </p:style>
+        <p:txBody>
+          <a:bodyPr lIns="90000" tIns="45000" rIns="90000" bIns="45000" anchor="ctr">
+            <a:noAutofit/>
+          </a:bodyPr>
+          <a:p>
+            <a:pPr algn="r">
+              <a:lnSpc>
+                <a:spcPct val="100000"/>
+              </a:lnSpc>
+              <a:tabLst>
+                <a:tab pos="0" algn="l"/>
+                <a:tab pos="447840" algn="l"/>
+                <a:tab pos="896760" algn="l"/>
+                <a:tab pos="1346040" algn="l"/>
+                <a:tab pos="1795320" algn="l"/>
+                <a:tab pos="2244600" algn="l"/>
+                <a:tab pos="2693880" algn="l"/>
+                <a:tab pos="3143160" algn="l"/>
+                <a:tab pos="3592440" algn="l"/>
+                <a:tab pos="4041720" algn="l"/>
+                <a:tab pos="4491000" algn="l"/>
+                <a:tab pos="4940279" algn="l"/>
+                <a:tab pos="5389560" algn="l"/>
+                <a:tab pos="5838840" algn="l"/>
+                <a:tab pos="6288120" algn="l"/>
+                <a:tab pos="6737400" algn="l"/>
+                <a:tab pos="7186680" algn="l"/>
+                <a:tab pos="7635960" algn="l"/>
+                <a:tab pos="8085240" algn="l"/>
+                <a:tab pos="8534520" algn="l"/>
+                <a:tab pos="8983800" algn="l"/>
+                <a:tab pos="8985240" algn="l"/>
+                <a:tab pos="9434520" algn="l"/>
+                <a:tab pos="9883800" algn="l"/>
+                <a:tab pos="10333078" algn="l"/>
+                <a:tab pos="10782360" algn="l"/>
+              </a:tabLst>
+              <a:defRPr/>
+            </a:pPr>
+            <a:fld id="{801753A3-9602-EF2A-18A0-0CC567638A3C}" type="slidenum">
+              <a:rPr lang="es-ES" sz="1200" b="0" u="none" strike="noStrike">
+                <a:solidFill>
+                  <a:srgbClr val="8B8B8B"/>
+                </a:solidFill>
+                <a:latin typeface="Neue Haas Grotesk Text Pro"/>
+                <a:ea typeface="DejaVu Sans"/>
+              </a:rPr>
+              <a:t/>
+            </a:fld>
+            <a:endParaRPr lang="en-US" sz="1200" b="0" u="none" strike="noStrike">
+              <a:solidFill>
+                <a:srgbClr val="000000"/>
+              </a:solidFill>
+              <a:latin typeface="Arial"/>
+            </a:endParaRPr>
+          </a:p>
+        </p:txBody>
+      </p:sp>
+      <p:sp>
+        <p:nvSpPr>
+          <p:cNvPr id="1903073496" name=""/>
+          <p:cNvSpPr/>
+          <p:nvPr/>
+        </p:nvSpPr>
+        <p:spPr bwMode="auto">
+          <a:xfrm>
+            <a:off x="428760" y="2306518"/>
+            <a:ext cx="11268360" cy="364679"/>
+          </a:xfrm>
+          <a:prstGeom prst="rect">
+            <a:avLst/>
+          </a:prstGeom>
+          <a:noFill/>
+          <a:ln w="0">
+            <a:noFill/>
+          </a:ln>
+        </p:spPr>
+        <p:style>
+          <a:lnRef idx="0"/>
+          <a:fillRef idx="0"/>
+          <a:effectRef idx="0"/>
+          <a:fontRef idx="minor"/>
+        </p:style>
+        <p:txBody>
+          <a:bodyPr lIns="90000" tIns="45000" rIns="90000" bIns="45000" anchor="t">
+            <a:spAutoFit/>
+          </a:bodyPr>
+          <a:p>
+            <a:pPr algn="just">
+              <a:lnSpc>
+                <a:spcPct val="100000"/>
+              </a:lnSpc>
+              <a:tabLst>
+                <a:tab pos="0" algn="l"/>
+                <a:tab pos="447840" algn="l"/>
+                <a:tab pos="896760" algn="l"/>
+                <a:tab pos="1346040" algn="l"/>
+                <a:tab pos="1795320" algn="l"/>
+                <a:tab pos="2244600" algn="l"/>
+                <a:tab pos="2693880" algn="l"/>
+                <a:tab pos="3143160" algn="l"/>
+                <a:tab pos="3592440" algn="l"/>
+                <a:tab pos="4041720" algn="l"/>
+                <a:tab pos="4491000" algn="l"/>
+                <a:tab pos="4940279" algn="l"/>
+                <a:tab pos="5389560" algn="l"/>
+                <a:tab pos="5838840" algn="l"/>
+                <a:tab pos="6288120" algn="l"/>
+                <a:tab pos="6737400" algn="l"/>
+                <a:tab pos="7186680" algn="l"/>
+                <a:tab pos="7635960" algn="l"/>
+                <a:tab pos="8085240" algn="l"/>
+                <a:tab pos="8534520" algn="l"/>
+                <a:tab pos="8983800" algn="l"/>
+                <a:tab pos="9410760" algn="l"/>
+                <a:tab pos="10134720" algn="l"/>
+                <a:tab pos="10858680" algn="l"/>
+              </a:tabLst>
+              <a:defRPr/>
+            </a:pPr>
+            <a:r>
+              <a:rPr lang="es-ES" sz="1800" b="0" u="none" strike="noStrike">
+                <a:solidFill>
+                  <a:srgbClr val="000000"/>
+                </a:solidFill>
+                <a:latin typeface="Neue Haas Grotesk Text Pro"/>
+                <a:ea typeface="DejaVu Sans"/>
+              </a:rPr>
+              <a:t>Enllaç: </a:t>
+            </a:r>
+            <a:r>
+              <a:rPr lang="es-ES" sz="1800" b="0" i="0" u="sng" strike="noStrike" cap="none" spc="0">
+                <a:solidFill>
+                  <a:srgbClr val="000000"/>
+                </a:solidFill>
+                <a:latin typeface="Neue Haas Grotesk Text Pro"/>
+                <a:ea typeface="Neue Haas Grotesk Text Pro"/>
+                <a:cs typeface="Neue Haas Grotesk Text Pro"/>
+                <a:hlinkClick r:id="rId3" tooltip=""/>
+              </a:rPr>
+              <a:t>https://github.com/oscar-123458/ES26UAB-411-09</a:t>
+            </a:r>
+            <a:endParaRPr lang="en-US" sz="1800" b="0" u="none" strike="noStrike">
+              <a:solidFill>
+                <a:srgbClr val="000000"/>
+              </a:solidFill>
+              <a:latin typeface="Arial"/>
+            </a:endParaRPr>
+          </a:p>
+        </p:txBody>
+      </p:sp>
+    </p:spTree>
+  </p:cSld>
+  <p:clrMapOvr>
+    <a:masterClrMapping/>
+  </p:clrMapOvr>
+  <mc:AlternateContent xmlns:mc="http://schemas.openxmlformats.org/markup-compatibility/2006">
+    <mc:Choice xmlns:p159="http://schemas.microsoft.com/office/powerpoint/2015/09/main" xmlns:p14="http://schemas.microsoft.com/office/powerpoint/2010/main" Requires="p159">
+      <p:transition p14:dur="500" advClick="1"/>
+    </mc:Choice>
+    <mc:Fallback>
+      <p:transition advClick="1"/>
+    </mc:Fallback>
+  </mc:AlternateContent>
+</p:sld>
+</file>
+
+<file path=ppt/slides/slide15.xml><?xml version="1.0" encoding="utf-8"?>
+<p:sld xmlns:a="http://schemas.openxmlformats.org/drawingml/2006/main" xmlns:r="http://schemas.openxmlformats.org/officeDocument/2006/relationships" xmlns:p="http://schemas.openxmlformats.org/presentationml/2006/main" xmlns:m="http://schemas.openxmlformats.org/officeDocument/2006/math" xmlns:w="http://schemas.openxmlformats.org/wordprocessingml/2006/main" xmlns:mc="http://schemas.openxmlformats.org/markup-compatibility/2006" showMasterPhAnim="0" showMasterSp="1" show="1">
+  <p:cSld name="">
+    <p:bg>
+      <p:bgPr shadeToTitle="0">
+        <a:solidFill>
+          <a:srgbClr val="FFFFFF"/>
+        </a:solidFill>
+      </p:bgPr>
+    </p:bg>
+    <p:spTree>
+      <p:nvGrpSpPr>
+        <p:cNvPr id="1" name=""/>
+        <p:cNvGrpSpPr/>
+        <p:nvPr/>
+      </p:nvGrpSpPr>
+      <p:grpSpPr bwMode="auto">
+        <a:xfrm>
+          <a:off x="0" y="0"/>
+          <a:ext cx="0" cy="0"/>
+          <a:chOff x="0" y="0"/>
+          <a:chExt cx="0" cy="0"/>
+        </a:xfrm>
+      </p:grpSpPr>
+      <p:sp>
+        <p:nvSpPr>
+          <p:cNvPr id="683364854" name=""/>
+          <p:cNvSpPr/>
+          <p:nvPr/>
+        </p:nvSpPr>
+        <p:spPr bwMode="auto">
           <a:xfrm>
             <a:off x="0" y="0"/>
             <a:ext cx="12190320" cy="6856560"/>
@@ -5635,7 +7388,7 @@
                 <a:tab pos="2695680" algn="l"/>
                 <a:tab pos="3144960" algn="l"/>
                 <a:tab pos="3594240" algn="l"/>
-                <a:tab pos="4043520" algn="l"/>
+                <a:tab pos="4043519" algn="l"/>
                 <a:tab pos="4492800" algn="l"/>
                 <a:tab pos="4941720" algn="l"/>
                 <a:tab pos="5391000" algn="l"/>
@@ -5648,13 +7401,12 @@
                 <a:tab pos="8535960" algn="l"/>
                 <a:tab pos="8985240" algn="l"/>
               </a:tabLst>
+              <a:defRPr/>
             </a:pPr>
             <a:endParaRPr lang="en-US" sz="1800" b="0" u="none" strike="noStrike">
               <a:solidFill>
                 <a:srgbClr val="000000"/>
               </a:solidFill>
-              <a:effectLst/>
-              <a:uFillTx/>
               <a:latin typeface="Arial"/>
             </a:endParaRPr>
           </a:p>
@@ -5662,16 +7414,16 @@
       </p:sp>
       <p:pic>
         <p:nvPicPr>
-          <p:cNvPr id="62" name=""/>
+          <p:cNvPr id="1531346357" name=""/>
           <p:cNvPicPr/>
           <p:nvPr/>
         </p:nvPicPr>
-        <p:blipFill>
-          <a:blip r:embed="rId1"/>
+        <p:blipFill rotWithShape="1">
+          <a:blip r:embed="rId3"/>
           <a:srcRect l="0" t="1105" r="0" b="0"/>
           <a:stretch/>
         </p:blipFill>
-        <p:spPr>
+        <p:spPr bwMode="auto">
           <a:xfrm>
             <a:off x="0" y="0"/>
             <a:ext cx="8667720" cy="6856560"/>
@@ -5687,11 +7439,11 @@
       </p:pic>
       <p:sp>
         <p:nvSpPr>
-          <p:cNvPr id="63" name=""/>
+          <p:cNvPr id="1363767084" name=""/>
           <p:cNvSpPr/>
           <p:nvPr/>
         </p:nvSpPr>
-        <p:spPr>
+        <p:spPr bwMode="auto">
           <a:xfrm flipH="1">
             <a:off x="3711600" y="0"/>
             <a:ext cx="8478720" cy="6856560"/>
@@ -5708,7 +7460,7 @@
                 <a:srgbClr val="FFFFFF"/>
               </a:gs>
             </a:gsLst>
-            <a:lin ang="0"/>
+            <a:lin ang="0" scaled="1"/>
           </a:gradFill>
           <a:ln w="0">
             <a:noFill/>
@@ -5739,7 +7491,7 @@
                 <a:tab pos="2695680" algn="l"/>
                 <a:tab pos="3144960" algn="l"/>
                 <a:tab pos="3594240" algn="l"/>
-                <a:tab pos="4043520" algn="l"/>
+                <a:tab pos="4043519" algn="l"/>
                 <a:tab pos="4492800" algn="l"/>
                 <a:tab pos="4941720" algn="l"/>
                 <a:tab pos="5391000" algn="l"/>
@@ -5752,13 +7504,12 @@
                 <a:tab pos="8535960" algn="l"/>
                 <a:tab pos="8985240" algn="l"/>
               </a:tabLst>
+              <a:defRPr/>
             </a:pPr>
             <a:endParaRPr lang="en-US" sz="1800" b="0" u="none" strike="noStrike">
               <a:solidFill>
                 <a:srgbClr val="000000"/>
               </a:solidFill>
-              <a:effectLst/>
-              <a:uFillTx/>
               <a:latin typeface="Arial"/>
             </a:endParaRPr>
           </a:p>
@@ -5766,11 +7517,11 @@
       </p:sp>
       <p:sp>
         <p:nvSpPr>
-          <p:cNvPr id="64" name=""/>
+          <p:cNvPr id="2123875648" name=""/>
           <p:cNvSpPr/>
           <p:nvPr/>
         </p:nvSpPr>
-        <p:spPr>
+        <p:spPr bwMode="auto">
           <a:xfrm>
             <a:off x="7848720" y="1122480"/>
             <a:ext cx="4022640" cy="3203280"/>
@@ -5823,17 +7574,16 @@
                 <a:tab pos="8985240" algn="l"/>
                 <a:tab pos="9434520" algn="l"/>
                 <a:tab pos="9883800" algn="l"/>
-                <a:tab pos="10333080" algn="l"/>
+                <a:tab pos="10333079" algn="l"/>
                 <a:tab pos="10782360" algn="l"/>
               </a:tabLst>
+              <a:defRPr/>
             </a:pPr>
             <a:r>
               <a:rPr lang="es-ES" sz="4800" b="1" u="none" strike="noStrike">
                 <a:solidFill>
                   <a:srgbClr val="000000"/>
                 </a:solidFill>
-                <a:effectLst/>
-                <a:uFillTx/>
                 <a:latin typeface="Neue Haas Grotesk Text Pro"/>
                 <a:ea typeface="DejaVu Sans"/>
               </a:rPr>
@@ -5843,8 +7593,6 @@
               <a:solidFill>
                 <a:srgbClr val="000000"/>
               </a:solidFill>
-              <a:effectLst/>
-              <a:uFillTx/>
               <a:latin typeface="Arial"/>
             </a:endParaRPr>
           </a:p>
@@ -5852,14 +7600,14 @@
       </p:sp>
       <p:sp>
         <p:nvSpPr>
-          <p:cNvPr id="65" name=""/>
+          <p:cNvPr id="1078289564" name=""/>
           <p:cNvSpPr/>
           <p:nvPr/>
         </p:nvSpPr>
-        <p:spPr>
+        <p:spPr bwMode="auto">
           <a:xfrm rot="5400000">
             <a:off x="8137440" y="348840"/>
-            <a:ext cx="144720" cy="703440"/>
+            <a:ext cx="144719" cy="703440"/>
           </a:xfrm>
           <a:prstGeom prst="rect">
             <a:avLst/>
@@ -5896,7 +7644,7 @@
                 <a:tab pos="2695680" algn="l"/>
                 <a:tab pos="3144960" algn="l"/>
                 <a:tab pos="3594240" algn="l"/>
-                <a:tab pos="4043520" algn="l"/>
+                <a:tab pos="4043519" algn="l"/>
                 <a:tab pos="4492800" algn="l"/>
                 <a:tab pos="4941720" algn="l"/>
                 <a:tab pos="5391000" algn="l"/>
@@ -5909,13 +7657,12 @@
                 <a:tab pos="8535960" algn="l"/>
                 <a:tab pos="8985240" algn="l"/>
               </a:tabLst>
+              <a:defRPr/>
             </a:pPr>
             <a:endParaRPr lang="en-US" sz="1800" b="0" u="none" strike="noStrike">
               <a:solidFill>
                 <a:srgbClr val="000000"/>
               </a:solidFill>
-              <a:effectLst/>
-              <a:uFillTx/>
               <a:latin typeface="Arial"/>
             </a:endParaRPr>
           </a:p>
@@ -5923,11 +7670,11 @@
       </p:sp>
       <p:sp>
         <p:nvSpPr>
-          <p:cNvPr id="66" name=""/>
+          <p:cNvPr id="521040586" name=""/>
           <p:cNvSpPr/>
           <p:nvPr/>
         </p:nvSpPr>
-        <p:spPr>
+        <p:spPr bwMode="auto">
           <a:xfrm>
             <a:off x="7851600" y="4546440"/>
             <a:ext cx="4023000" cy="17640"/>
@@ -5970,7 +7717,7 @@
                 <a:tab pos="2695680" algn="l"/>
                 <a:tab pos="3144960" algn="l"/>
                 <a:tab pos="3594240" algn="l"/>
-                <a:tab pos="4043520" algn="l"/>
+                <a:tab pos="4043519" algn="l"/>
                 <a:tab pos="4492800" algn="l"/>
                 <a:tab pos="4941720" algn="l"/>
                 <a:tab pos="5391000" algn="l"/>
@@ -5983,13 +7730,12 @@
                 <a:tab pos="8535960" algn="l"/>
                 <a:tab pos="8985240" algn="l"/>
               </a:tabLst>
+              <a:defRPr/>
             </a:pPr>
             <a:endParaRPr lang="en-US" sz="1800" b="0" u="none" strike="noStrike">
               <a:solidFill>
                 <a:srgbClr val="000000"/>
               </a:solidFill>
-              <a:effectLst/>
-              <a:uFillTx/>
               <a:latin typeface="Arial"/>
             </a:endParaRPr>
           </a:p>
@@ -5997,11 +7743,11 @@
       </p:sp>
       <p:sp>
         <p:nvSpPr>
-          <p:cNvPr id="67" name=""/>
+          <p:cNvPr id="2118952044" name=""/>
           <p:cNvSpPr/>
           <p:nvPr/>
         </p:nvSpPr>
-        <p:spPr>
+        <p:spPr bwMode="auto">
           <a:xfrm>
             <a:off x="7848720" y="4873680"/>
             <a:ext cx="4022640" cy="1359000"/>
@@ -6057,17 +7803,16 @@
                 <a:tab pos="8985240" algn="l"/>
                 <a:tab pos="9434520" algn="l"/>
                 <a:tab pos="9883800" algn="l"/>
-                <a:tab pos="10333080" algn="l"/>
+                <a:tab pos="10333079" algn="l"/>
                 <a:tab pos="10782360" algn="l"/>
               </a:tabLst>
+              <a:defRPr/>
             </a:pPr>
             <a:r>
               <a:rPr lang="es-ES" sz="1400" b="0" u="none" strike="noStrike">
                 <a:solidFill>
                   <a:srgbClr val="000000"/>
                 </a:solidFill>
-                <a:effectLst/>
-                <a:uFillTx/>
                 <a:latin typeface="Neue Haas Grotesk Text Pro"/>
                 <a:ea typeface="DejaVu Sans"/>
               </a:rPr>
@@ -6077,8 +7822,6 @@
               <a:solidFill>
                 <a:srgbClr val="000000"/>
               </a:solidFill>
-              <a:effectLst/>
-              <a:uFillTx/>
               <a:latin typeface="Arial"/>
             </a:endParaRPr>
           </a:p>
@@ -6115,16 +7858,15 @@
                 <a:tab pos="8985240" algn="l"/>
                 <a:tab pos="9434520" algn="l"/>
                 <a:tab pos="9883800" algn="l"/>
-                <a:tab pos="10333080" algn="l"/>
+                <a:tab pos="10333079" algn="l"/>
                 <a:tab pos="10782360" algn="l"/>
               </a:tabLst>
+              <a:defRPr/>
             </a:pPr>
             <a:endParaRPr lang="en-US" sz="1400" b="0" u="none" strike="noStrike">
               <a:solidFill>
                 <a:srgbClr val="000000"/>
               </a:solidFill>
-              <a:effectLst/>
-              <a:uFillTx/>
               <a:latin typeface="Arial"/>
             </a:endParaRPr>
           </a:p>
@@ -6161,17 +7903,16 @@
                 <a:tab pos="8985240" algn="l"/>
                 <a:tab pos="9434520" algn="l"/>
                 <a:tab pos="9883800" algn="l"/>
-                <a:tab pos="10333080" algn="l"/>
+                <a:tab pos="10333079" algn="l"/>
                 <a:tab pos="10782360" algn="l"/>
               </a:tabLst>
+              <a:defRPr/>
             </a:pPr>
             <a:r>
               <a:rPr lang="es-ES" sz="1400" b="0" u="none" strike="noStrike">
                 <a:solidFill>
                   <a:srgbClr val="000000"/>
                 </a:solidFill>
-                <a:effectLst/>
-                <a:uFillTx/>
                 <a:latin typeface="Neue Haas Grotesk Text Pro"/>
                 <a:ea typeface="DejaVu Sans"/>
               </a:rPr>
@@ -6181,8 +7922,6 @@
               <a:solidFill>
                 <a:srgbClr val="000000"/>
               </a:solidFill>
-              <a:effectLst/>
-              <a:uFillTx/>
               <a:latin typeface="Arial"/>
             </a:endParaRPr>
           </a:p>
@@ -6190,14 +7929,25 @@
       </p:sp>
     </p:spTree>
   </p:cSld>
+  <p:clrMapOvr>
+    <a:masterClrMapping/>
+  </p:clrMapOvr>
+  <mc:AlternateContent xmlns:mc="http://schemas.openxmlformats.org/markup-compatibility/2006">
+    <mc:Choice xmlns:p159="http://schemas.microsoft.com/office/powerpoint/2015/09/main" xmlns:p14="http://schemas.microsoft.com/office/powerpoint/2010/main" Requires="p159">
+      <p:transition p14:dur="500" advClick="1"/>
+    </mc:Choice>
+    <mc:Fallback>
+      <p:transition advClick="1"/>
+    </mc:Fallback>
+  </mc:AlternateContent>
 </p:sld>
 </file>
 
 <file path=ppt/slides/slide2.xml><?xml version="1.0" encoding="utf-8"?>
-<p:sld xmlns:a="http://schemas.openxmlformats.org/drawingml/2006/main" xmlns:p="http://schemas.openxmlformats.org/presentationml/2006/main" xmlns:r="http://schemas.openxmlformats.org/officeDocument/2006/relationships" xmlns:p14="http://schemas.microsoft.com/office/powerpoint/2010/main" xmlns:p15="http://schemas.microsoft.com/office/powerpoint/2012/main" xmlns:mc="http://schemas.openxmlformats.org/markup-compatibility/2006">
-  <p:cSld>
+<p:sld xmlns:a="http://schemas.openxmlformats.org/drawingml/2006/main" xmlns:r="http://schemas.openxmlformats.org/officeDocument/2006/relationships" xmlns:p="http://schemas.openxmlformats.org/presentationml/2006/main" xmlns:m="http://schemas.openxmlformats.org/officeDocument/2006/math" xmlns:w="http://schemas.openxmlformats.org/wordprocessingml/2006/main" xmlns:mc="http://schemas.openxmlformats.org/markup-compatibility/2006" showMasterPhAnim="0" showMasterSp="1" show="1">
+  <p:cSld name="">
     <p:bg>
-      <p:bgPr>
+      <p:bgPr shadeToTitle="0">
         <a:solidFill>
           <a:srgbClr val="FFFFFF"/>
         </a:solidFill>
@@ -6209,7 +7959,7 @@
         <p:cNvGrpSpPr/>
         <p:nvPr/>
       </p:nvGrpSpPr>
-      <p:grpSpPr>
+      <p:grpSpPr bwMode="auto">
         <a:xfrm>
           <a:off x="0" y="0"/>
           <a:ext cx="0" cy="0"/>
@@ -6219,11 +7969,11 @@
       </p:grpSpPr>
       <p:sp>
         <p:nvSpPr>
-          <p:cNvPr id="18" name=""/>
+          <p:cNvPr id="345772612" name=""/>
           <p:cNvSpPr/>
           <p:nvPr/>
         </p:nvSpPr>
-        <p:spPr>
+        <p:spPr bwMode="auto">
           <a:xfrm>
             <a:off x="1116000" y="549360"/>
             <a:ext cx="10166400" cy="1177920"/>
@@ -6275,17 +8025,16 @@
                 <a:tab pos="8983800" algn="l"/>
                 <a:tab pos="9410760" algn="l"/>
                 <a:tab pos="10134720" algn="l"/>
-                <a:tab pos="10333080" algn="l"/>
+                <a:tab pos="10333079" algn="l"/>
                 <a:tab pos="10782360" algn="l"/>
               </a:tabLst>
+              <a:defRPr/>
             </a:pPr>
             <a:r>
               <a:rPr lang="es-ES" sz="4000" b="1" u="none" strike="noStrike">
                 <a:solidFill>
                   <a:srgbClr val="000000"/>
                 </a:solidFill>
-                <a:effectLst/>
-                <a:uFillTx/>
                 <a:latin typeface="Neue Haas Grotesk Text Pro"/>
                 <a:ea typeface="DejaVu Sans"/>
               </a:rPr>
@@ -6295,8 +8044,6 @@
               <a:solidFill>
                 <a:srgbClr val="000000"/>
               </a:solidFill>
-              <a:effectLst/>
-              <a:uFillTx/>
               <a:latin typeface="Arial"/>
             </a:endParaRPr>
           </a:p>
@@ -6304,11 +8051,11 @@
       </p:sp>
       <p:sp>
         <p:nvSpPr>
-          <p:cNvPr id="19" name=""/>
+          <p:cNvPr id="28448737" name=""/>
           <p:cNvSpPr/>
           <p:nvPr/>
         </p:nvSpPr>
-        <p:spPr>
+        <p:spPr bwMode="auto">
           <a:xfrm>
             <a:off x="8540640" y="6356520"/>
             <a:ext cx="2741760" cy="363240"/>
@@ -6361,17 +8108,16 @@
                 <a:tab pos="8985240" algn="l"/>
                 <a:tab pos="9434520" algn="l"/>
                 <a:tab pos="9883800" algn="l"/>
-                <a:tab pos="10333080" algn="l"/>
+                <a:tab pos="10333079" algn="l"/>
                 <a:tab pos="10782360" algn="l"/>
               </a:tabLst>
+              <a:defRPr/>
             </a:pPr>
             <a:fld id="{EA81F9AF-2C7A-4A8D-8257-F1FA62287E43}" type="slidenum">
               <a:rPr lang="es-ES" sz="1200" b="0" u="none" strike="noStrike">
                 <a:solidFill>
                   <a:srgbClr val="8B8B8B"/>
                 </a:solidFill>
-                <a:effectLst/>
-                <a:uFillTx/>
                 <a:latin typeface="Neue Haas Grotesk Text Pro"/>
                 <a:ea typeface="DejaVu Sans"/>
               </a:rPr>
@@ -6381,8 +8127,6 @@
               <a:solidFill>
                 <a:srgbClr val="000000"/>
               </a:solidFill>
-              <a:effectLst/>
-              <a:uFillTx/>
               <a:latin typeface="Arial"/>
             </a:endParaRPr>
           </a:p>
@@ -6390,13 +8134,13 @@
       </p:sp>
       <p:sp>
         <p:nvSpPr>
-          <p:cNvPr id="20" name=""/>
+          <p:cNvPr id="1656148750" name=""/>
           <p:cNvSpPr/>
           <p:nvPr/>
         </p:nvSpPr>
-        <p:spPr>
+        <p:spPr bwMode="auto">
           <a:xfrm>
-            <a:off x="3890880" y="3638520"/>
+            <a:off x="3890880" y="3638519"/>
             <a:ext cx="2317680" cy="639000"/>
           </a:xfrm>
           <a:prstGeom prst="rect">
@@ -6447,17 +8191,16 @@
                 <a:tab pos="8985240" algn="l"/>
                 <a:tab pos="9434520" algn="l"/>
                 <a:tab pos="9883800" algn="l"/>
-                <a:tab pos="10333080" algn="l"/>
+                <a:tab pos="10333079" algn="l"/>
                 <a:tab pos="10782360" algn="l"/>
               </a:tabLst>
+              <a:defRPr/>
             </a:pPr>
             <a:r>
               <a:rPr lang="es-ES" sz="1800" b="0" u="none" strike="noStrike">
                 <a:solidFill>
                   <a:srgbClr val="000000"/>
                 </a:solidFill>
-                <a:effectLst/>
-                <a:uFillTx/>
                 <a:latin typeface="Neue Haas Grotesk Text Pro"/>
                 <a:ea typeface="DejaVu Sans"/>
               </a:rPr>
@@ -6467,8 +8210,6 @@
               <a:solidFill>
                 <a:srgbClr val="000000"/>
               </a:solidFill>
-              <a:effectLst/>
-              <a:uFillTx/>
               <a:latin typeface="Arial"/>
             </a:endParaRPr>
           </a:p>
@@ -6476,13 +8217,13 @@
       </p:sp>
       <p:sp>
         <p:nvSpPr>
-          <p:cNvPr id="21" name=""/>
+          <p:cNvPr id="1698363800" name=""/>
           <p:cNvSpPr/>
           <p:nvPr/>
         </p:nvSpPr>
-        <p:spPr>
+        <p:spPr bwMode="auto">
           <a:xfrm>
-            <a:off x="6513480" y="3638520"/>
+            <a:off x="6513480" y="3638519"/>
             <a:ext cx="2317680" cy="639000"/>
           </a:xfrm>
           <a:prstGeom prst="rect">
@@ -6533,17 +8274,16 @@
                 <a:tab pos="8985240" algn="l"/>
                 <a:tab pos="9434520" algn="l"/>
                 <a:tab pos="9883800" algn="l"/>
-                <a:tab pos="10333080" algn="l"/>
+                <a:tab pos="10333079" algn="l"/>
                 <a:tab pos="10782360" algn="l"/>
               </a:tabLst>
+              <a:defRPr/>
             </a:pPr>
             <a:r>
               <a:rPr lang="es-ES" sz="1800" b="0" u="none" strike="noStrike">
                 <a:solidFill>
                   <a:srgbClr val="000000"/>
                 </a:solidFill>
-                <a:effectLst/>
-                <a:uFillTx/>
                 <a:latin typeface="Neue Haas Grotesk Text Pro"/>
                 <a:ea typeface="DejaVu Sans"/>
               </a:rPr>
@@ -6553,8 +8293,6 @@
               <a:solidFill>
                 <a:srgbClr val="000000"/>
               </a:solidFill>
-              <a:effectLst/>
-              <a:uFillTx/>
               <a:latin typeface="Arial"/>
             </a:endParaRPr>
           </a:p>
@@ -6562,11 +8300,11 @@
       </p:sp>
       <p:sp>
         <p:nvSpPr>
-          <p:cNvPr id="22" name=""/>
+          <p:cNvPr id="1924950390" name=""/>
           <p:cNvSpPr/>
           <p:nvPr/>
         </p:nvSpPr>
-        <p:spPr>
+        <p:spPr bwMode="auto">
           <a:xfrm>
             <a:off x="3890880" y="5799240"/>
             <a:ext cx="2317680" cy="364680"/>
@@ -6619,17 +8357,16 @@
                 <a:tab pos="8985240" algn="l"/>
                 <a:tab pos="9434520" algn="l"/>
                 <a:tab pos="9883800" algn="l"/>
-                <a:tab pos="10333080" algn="l"/>
+                <a:tab pos="10333079" algn="l"/>
                 <a:tab pos="10782360" algn="l"/>
               </a:tabLst>
+              <a:defRPr/>
             </a:pPr>
             <a:r>
               <a:rPr lang="es-ES" sz="1800" b="0" u="none" strike="noStrike">
                 <a:solidFill>
                   <a:srgbClr val="000000"/>
                 </a:solidFill>
-                <a:effectLst/>
-                <a:uFillTx/>
                 <a:latin typeface="Neue Haas Grotesk Text Pro"/>
                 <a:ea typeface="DejaVu Sans"/>
               </a:rPr>
@@ -6639,8 +8376,6 @@
               <a:solidFill>
                 <a:srgbClr val="000000"/>
               </a:solidFill>
-              <a:effectLst/>
-              <a:uFillTx/>
               <a:latin typeface="Arial"/>
             </a:endParaRPr>
           </a:p>
@@ -6648,11 +8383,11 @@
       </p:sp>
       <p:sp>
         <p:nvSpPr>
-          <p:cNvPr id="23" name=""/>
+          <p:cNvPr id="768456399" name=""/>
           <p:cNvSpPr/>
           <p:nvPr/>
         </p:nvSpPr>
-        <p:spPr>
+        <p:spPr bwMode="auto">
           <a:xfrm>
             <a:off x="6513480" y="5799240"/>
             <a:ext cx="2317680" cy="639000"/>
@@ -6705,17 +8440,16 @@
                 <a:tab pos="8985240" algn="l"/>
                 <a:tab pos="9434520" algn="l"/>
                 <a:tab pos="9883800" algn="l"/>
-                <a:tab pos="10333080" algn="l"/>
+                <a:tab pos="10333079" algn="l"/>
                 <a:tab pos="10782360" algn="l"/>
               </a:tabLst>
+              <a:defRPr/>
             </a:pPr>
             <a:r>
               <a:rPr lang="es-ES" sz="1800" b="0" u="none" strike="noStrike">
                 <a:solidFill>
                   <a:srgbClr val="000000"/>
                 </a:solidFill>
-                <a:effectLst/>
-                <a:uFillTx/>
                 <a:latin typeface="Neue Haas Grotesk Text Pro"/>
                 <a:ea typeface="DejaVu Sans"/>
               </a:rPr>
@@ -6725,8 +8459,6 @@
               <a:solidFill>
                 <a:srgbClr val="000000"/>
               </a:solidFill>
-              <a:effectLst/>
-              <a:uFillTx/>
               <a:latin typeface="Arial"/>
             </a:endParaRPr>
           </a:p>
@@ -6734,11 +8466,11 @@
       </p:sp>
       <p:sp>
         <p:nvSpPr>
-          <p:cNvPr id="24" name=""/>
+          <p:cNvPr id="855679252" name=""/>
           <p:cNvSpPr/>
           <p:nvPr/>
         </p:nvSpPr>
-        <p:spPr>
+        <p:spPr bwMode="auto">
           <a:xfrm>
             <a:off x="6613560" y="3166920"/>
             <a:ext cx="4298760" cy="912960"/>
@@ -6776,7 +8508,7 @@
                 <a:tab pos="2695680" algn="l"/>
                 <a:tab pos="3144960" algn="l"/>
                 <a:tab pos="3594240" algn="l"/>
-                <a:tab pos="4043520" algn="l"/>
+                <a:tab pos="4043519" algn="l"/>
                 <a:tab pos="4492800" algn="l"/>
                 <a:tab pos="4941720" algn="l"/>
                 <a:tab pos="5391000" algn="l"/>
@@ -6789,13 +8521,12 @@
                 <a:tab pos="8535960" algn="l"/>
                 <a:tab pos="8985240" algn="l"/>
               </a:tabLst>
+              <a:defRPr/>
             </a:pPr>
             <a:endParaRPr lang="en-US" sz="1800" b="0" u="none" strike="noStrike">
               <a:solidFill>
                 <a:srgbClr val="000000"/>
               </a:solidFill>
-              <a:effectLst/>
-              <a:uFillTx/>
               <a:latin typeface="Arial"/>
             </a:endParaRPr>
           </a:p>
@@ -6803,15 +8534,15 @@
       </p:sp>
       <p:pic>
         <p:nvPicPr>
-          <p:cNvPr id="25" name=""/>
+          <p:cNvPr id="1157403162" name=""/>
           <p:cNvPicPr/>
           <p:nvPr/>
         </p:nvPicPr>
-        <p:blipFill>
-          <a:blip r:embed="rId1"/>
+        <p:blipFill rotWithShape="1">
+          <a:blip r:embed="rId3"/>
           <a:stretch/>
         </p:blipFill>
-        <p:spPr>
+        <p:spPr bwMode="auto">
           <a:xfrm>
             <a:off x="6972480" y="4549680"/>
             <a:ext cx="984240" cy="1230480"/>
@@ -6827,18 +8558,18 @@
       </p:pic>
       <p:pic>
         <p:nvPicPr>
-          <p:cNvPr id="26" name=""/>
+          <p:cNvPr id="1775135358" name=""/>
           <p:cNvPicPr/>
           <p:nvPr/>
         </p:nvPicPr>
-        <p:blipFill>
-          <a:blip r:embed="rId2"/>
-          <a:srcRect l="13143" t="14756" r="13368" b="18978"/>
+        <p:blipFill rotWithShape="1">
+          <a:blip r:embed="rId4"/>
+          <a:srcRect l="13143" t="14756" r="13367" b="18978"/>
           <a:stretch/>
         </p:blipFill>
-        <p:spPr>
+        <p:spPr bwMode="auto">
           <a:xfrm>
-            <a:off x="4290840" y="2306520"/>
+            <a:off x="4290840" y="2306519"/>
             <a:ext cx="1108080" cy="1332000"/>
           </a:xfrm>
           <a:prstGeom prst="rect">
@@ -6852,15 +8583,15 @@
       </p:pic>
       <p:pic>
         <p:nvPicPr>
-          <p:cNvPr id="27" name=""/>
+          <p:cNvPr id="2091396974" name=""/>
           <p:cNvPicPr/>
           <p:nvPr/>
         </p:nvPicPr>
-        <p:blipFill>
-          <a:blip r:embed="rId3"/>
+        <p:blipFill rotWithShape="1">
+          <a:blip r:embed="rId5"/>
           <a:stretch/>
         </p:blipFill>
-        <p:spPr>
+        <p:spPr bwMode="auto">
           <a:xfrm>
             <a:off x="6873840" y="2384280"/>
             <a:ext cx="979560" cy="1208160"/>
@@ -6876,15 +8607,15 @@
       </p:pic>
       <p:pic>
         <p:nvPicPr>
-          <p:cNvPr id="28" name=""/>
+          <p:cNvPr id="1190195982" name=""/>
           <p:cNvPicPr/>
           <p:nvPr/>
         </p:nvPicPr>
-        <p:blipFill>
-          <a:blip r:embed="rId4"/>
+        <p:blipFill rotWithShape="1">
+          <a:blip r:embed="rId6"/>
           <a:stretch/>
         </p:blipFill>
-        <p:spPr>
+        <p:spPr bwMode="auto">
           <a:xfrm>
             <a:off x="4343400" y="4572000"/>
             <a:ext cx="1032480" cy="1208160"/>
@@ -6900,14 +8631,25 @@
       </p:pic>
     </p:spTree>
   </p:cSld>
+  <p:clrMapOvr>
+    <a:masterClrMapping/>
+  </p:clrMapOvr>
+  <mc:AlternateContent xmlns:mc="http://schemas.openxmlformats.org/markup-compatibility/2006">
+    <mc:Choice xmlns:p159="http://schemas.microsoft.com/office/powerpoint/2015/09/main" xmlns:p14="http://schemas.microsoft.com/office/powerpoint/2010/main" Requires="p159">
+      <p:transition p14:dur="500" advClick="1"/>
+    </mc:Choice>
+    <mc:Fallback>
+      <p:transition advClick="1"/>
+    </mc:Fallback>
+  </mc:AlternateContent>
 </p:sld>
 </file>
 
 <file path=ppt/slides/slide3.xml><?xml version="1.0" encoding="utf-8"?>
-<p:sld xmlns:a="http://schemas.openxmlformats.org/drawingml/2006/main" xmlns:p="http://schemas.openxmlformats.org/presentationml/2006/main" xmlns:r="http://schemas.openxmlformats.org/officeDocument/2006/relationships" xmlns:p14="http://schemas.microsoft.com/office/powerpoint/2010/main" xmlns:p15="http://schemas.microsoft.com/office/powerpoint/2012/main" xmlns:mc="http://schemas.openxmlformats.org/markup-compatibility/2006">
-  <p:cSld>
+<p:sld xmlns:a="http://schemas.openxmlformats.org/drawingml/2006/main" xmlns:r="http://schemas.openxmlformats.org/officeDocument/2006/relationships" xmlns:p="http://schemas.openxmlformats.org/presentationml/2006/main" xmlns:m="http://schemas.openxmlformats.org/officeDocument/2006/math" xmlns:w="http://schemas.openxmlformats.org/wordprocessingml/2006/main" xmlns:mc="http://schemas.openxmlformats.org/markup-compatibility/2006" showMasterPhAnim="0" showMasterSp="1" show="1">
+  <p:cSld name="">
     <p:bg>
-      <p:bgPr>
+      <p:bgPr shadeToTitle="0">
         <a:solidFill>
           <a:srgbClr val="FFFFFF"/>
         </a:solidFill>
@@ -6919,7 +8661,7 @@
         <p:cNvGrpSpPr/>
         <p:nvPr/>
       </p:nvGrpSpPr>
-      <p:grpSpPr>
+      <p:grpSpPr bwMode="auto">
         <a:xfrm>
           <a:off x="0" y="0"/>
           <a:ext cx="0" cy="0"/>
@@ -6929,11 +8671,11 @@
       </p:grpSpPr>
       <p:sp>
         <p:nvSpPr>
-          <p:cNvPr id="29" name=""/>
+          <p:cNvPr id="1982361566" name=""/>
           <p:cNvSpPr/>
           <p:nvPr/>
         </p:nvSpPr>
-        <p:spPr>
+        <p:spPr bwMode="auto">
           <a:xfrm>
             <a:off x="1116000" y="549360"/>
             <a:ext cx="10166400" cy="1177920"/>
@@ -6985,17 +8727,16 @@
                 <a:tab pos="8983800" algn="l"/>
                 <a:tab pos="9410760" algn="l"/>
                 <a:tab pos="10134720" algn="l"/>
-                <a:tab pos="10333080" algn="l"/>
+                <a:tab pos="10333079" algn="l"/>
                 <a:tab pos="10782360" algn="l"/>
               </a:tabLst>
+              <a:defRPr/>
             </a:pPr>
             <a:r>
               <a:rPr lang="es-ES" sz="4000" b="1" u="none" strike="noStrike">
                 <a:solidFill>
                   <a:srgbClr val="000000"/>
                 </a:solidFill>
-                <a:effectLst/>
-                <a:uFillTx/>
                 <a:latin typeface="Neue Haas Grotesk Text Pro"/>
                 <a:ea typeface="DejaVu Sans"/>
               </a:rPr>
@@ -7005,8 +8746,6 @@
               <a:solidFill>
                 <a:srgbClr val="000000"/>
               </a:solidFill>
-              <a:effectLst/>
-              <a:uFillTx/>
               <a:latin typeface="Arial"/>
             </a:endParaRPr>
           </a:p>
@@ -7014,11 +8753,11 @@
       </p:sp>
       <p:sp>
         <p:nvSpPr>
-          <p:cNvPr id="30" name=""/>
+          <p:cNvPr id="199283995" name=""/>
           <p:cNvSpPr/>
           <p:nvPr/>
         </p:nvSpPr>
-        <p:spPr>
+        <p:spPr bwMode="auto">
           <a:xfrm>
             <a:off x="8540640" y="6356520"/>
             <a:ext cx="2741760" cy="363240"/>
@@ -7071,17 +8810,16 @@
                 <a:tab pos="8985240" algn="l"/>
                 <a:tab pos="9434520" algn="l"/>
                 <a:tab pos="9883800" algn="l"/>
-                <a:tab pos="10333080" algn="l"/>
+                <a:tab pos="10333079" algn="l"/>
                 <a:tab pos="10782360" algn="l"/>
               </a:tabLst>
+              <a:defRPr/>
             </a:pPr>
             <a:fld id="{893EC7F6-7BFB-4A5C-B6D9-129E3E928F0F}" type="slidenum">
               <a:rPr lang="es-ES" sz="1200" b="0" u="none" strike="noStrike">
                 <a:solidFill>
                   <a:srgbClr val="8B8B8B"/>
                 </a:solidFill>
-                <a:effectLst/>
-                <a:uFillTx/>
                 <a:latin typeface="Neue Haas Grotesk Text Pro"/>
                 <a:ea typeface="DejaVu Sans"/>
               </a:rPr>
@@ -7091,8 +8829,6 @@
               <a:solidFill>
                 <a:srgbClr val="000000"/>
               </a:solidFill>
-              <a:effectLst/>
-              <a:uFillTx/>
               <a:latin typeface="Arial"/>
             </a:endParaRPr>
           </a:p>
@@ -7100,14 +8836,14 @@
       </p:sp>
       <p:sp>
         <p:nvSpPr>
-          <p:cNvPr id="31" name=""/>
+          <p:cNvPr id="629003647" name=""/>
           <p:cNvSpPr/>
           <p:nvPr/>
         </p:nvSpPr>
-        <p:spPr>
+        <p:spPr bwMode="auto">
           <a:xfrm>
             <a:off x="428760" y="2198520"/>
-            <a:ext cx="10020240" cy="4205160"/>
+            <a:ext cx="10068119" cy="4479480"/>
           </a:xfrm>
           <a:prstGeom prst="rect">
             <a:avLst/>
@@ -7157,28 +8893,25 @@
                 <a:tab pos="9410760" algn="l"/>
                 <a:tab pos="9434520" algn="l"/>
                 <a:tab pos="9883800" algn="l"/>
-                <a:tab pos="10333080" algn="l"/>
+                <a:tab pos="10333079" algn="l"/>
                 <a:tab pos="10782360" algn="l"/>
               </a:tabLst>
+              <a:defRPr/>
             </a:pPr>
             <a:r>
-              <a:rPr lang="es-ES" sz="1800" b="0" u="none" strike="noStrike">
-                <a:solidFill>
-                  <a:srgbClr val="000000"/>
-                </a:solidFill>
-                <a:effectLst/>
-                <a:uFillTx/>
+              <a:rPr lang="es-ES" sz="1600" b="0" u="none" strike="noStrike">
+                <a:solidFill>
+                  <a:srgbClr val="000000"/>
+                </a:solidFill>
                 <a:latin typeface="Neue Haas Grotesk Text Pro"/>
                 <a:ea typeface="DejaVu Sans"/>
               </a:rPr>
               <a:t>Tasques realitzades aquest sprint:</a:t>
             </a:r>
-            <a:endParaRPr lang="en-US" sz="1800" b="0" u="none" strike="noStrike">
-              <a:solidFill>
-                <a:srgbClr val="000000"/>
-              </a:solidFill>
-              <a:effectLst/>
-              <a:uFillTx/>
+            <a:endParaRPr lang="en-US" sz="1600" b="0" u="none" strike="noStrike">
+              <a:solidFill>
+                <a:srgbClr val="000000"/>
+              </a:solidFill>
               <a:latin typeface="Arial"/>
             </a:endParaRPr>
           </a:p>
@@ -7212,16 +8945,15 @@
                 <a:tab pos="9410760" algn="l"/>
                 <a:tab pos="9434520" algn="l"/>
                 <a:tab pos="9883800" algn="l"/>
-                <a:tab pos="10333080" algn="l"/>
+                <a:tab pos="10333079" algn="l"/>
                 <a:tab pos="10782360" algn="l"/>
               </a:tabLst>
-            </a:pPr>
-            <a:endParaRPr lang="en-US" sz="1800" b="0" u="none" strike="noStrike">
-              <a:solidFill>
-                <a:srgbClr val="000000"/>
-              </a:solidFill>
-              <a:effectLst/>
-              <a:uFillTx/>
+              <a:defRPr/>
+            </a:pPr>
+            <a:endParaRPr lang="en-US" sz="1600" b="0" u="none" strike="noStrike">
+              <a:solidFill>
+                <a:srgbClr val="000000"/>
+              </a:solidFill>
               <a:latin typeface="Arial"/>
             </a:endParaRPr>
           </a:p>
@@ -7255,40 +8987,35 @@
                 <a:tab pos="9410760" algn="l"/>
                 <a:tab pos="9434520" algn="l"/>
                 <a:tab pos="9883800" algn="l"/>
-                <a:tab pos="10333080" algn="l"/>
+                <a:tab pos="10333079" algn="l"/>
                 <a:tab pos="10782360" algn="l"/>
               </a:tabLst>
+              <a:defRPr/>
             </a:pPr>
             <a:r>
-              <a:rPr lang="es-ES" sz="1800" b="0" u="none" strike="noStrike">
-                <a:solidFill>
-                  <a:srgbClr val="000000"/>
-                </a:solidFill>
-                <a:effectLst/>
-                <a:uFillTx/>
+              <a:rPr lang="es-ES" sz="1600" b="0" u="none" strike="noStrike">
+                <a:solidFill>
+                  <a:srgbClr val="000000"/>
+                </a:solidFill>
                 <a:latin typeface="Neue Haas Grotesk Text Pro"/>
                 <a:ea typeface="Microsoft YaHei"/>
               </a:rPr>
-              <a:t>Tasca 1: Creació del entorn Github i Trello (encarregat: </a:t>
+              <a:t>Tasca 1: Creació del entorn Github i Trello. Redacció del document README.md (encarregat: </a:t>
             </a:r>
             <a:r>
-              <a:rPr lang="es-ES" sz="1800" b="0" u="none" strike="noStrike">
-                <a:solidFill>
-                  <a:srgbClr val="000000"/>
-                </a:solidFill>
-                <a:effectLst/>
-                <a:uFillTx/>
+              <a:rPr lang="es-ES" sz="1600" b="0" u="none" strike="noStrike">
+                <a:solidFill>
+                  <a:srgbClr val="000000"/>
+                </a:solidFill>
                 <a:latin typeface="Neue Haas Grotesk Text Pro"/>
                 <a:ea typeface="DejaVu Sans"/>
               </a:rPr>
               <a:t>Òscar Raneda)</a:t>
             </a:r>
-            <a:endParaRPr lang="en-US" sz="1800" b="0" u="none" strike="noStrike">
-              <a:solidFill>
-                <a:srgbClr val="000000"/>
-              </a:solidFill>
-              <a:effectLst/>
-              <a:uFillTx/>
+            <a:endParaRPr lang="en-US" sz="1600" b="0" u="none" strike="noStrike">
+              <a:solidFill>
+                <a:srgbClr val="000000"/>
+              </a:solidFill>
               <a:latin typeface="Arial"/>
             </a:endParaRPr>
           </a:p>
@@ -7322,16 +9049,15 @@
                 <a:tab pos="9410760" algn="l"/>
                 <a:tab pos="9434520" algn="l"/>
                 <a:tab pos="9883800" algn="l"/>
-                <a:tab pos="10333080" algn="l"/>
+                <a:tab pos="10333079" algn="l"/>
                 <a:tab pos="10782360" algn="l"/>
               </a:tabLst>
-            </a:pPr>
-            <a:endParaRPr lang="en-US" sz="1800" b="0" u="none" strike="noStrike">
-              <a:solidFill>
-                <a:srgbClr val="000000"/>
-              </a:solidFill>
-              <a:effectLst/>
-              <a:uFillTx/>
+              <a:defRPr/>
+            </a:pPr>
+            <a:endParaRPr lang="en-US" sz="1600" b="0" u="none" strike="noStrike">
+              <a:solidFill>
+                <a:srgbClr val="000000"/>
+              </a:solidFill>
               <a:latin typeface="Arial"/>
             </a:endParaRPr>
           </a:p>
@@ -7365,40 +9091,35 @@
                 <a:tab pos="9410760" algn="l"/>
                 <a:tab pos="9434520" algn="l"/>
                 <a:tab pos="9883800" algn="l"/>
-                <a:tab pos="10333080" algn="l"/>
+                <a:tab pos="10333079" algn="l"/>
                 <a:tab pos="10782360" algn="l"/>
               </a:tabLst>
+              <a:defRPr/>
             </a:pPr>
             <a:r>
-              <a:rPr lang="es-ES" sz="1800" b="0" u="none" strike="noStrike">
-                <a:solidFill>
-                  <a:srgbClr val="000000"/>
-                </a:solidFill>
-                <a:effectLst/>
-                <a:uFillTx/>
+              <a:rPr lang="es-ES" sz="1600" b="0" u="none" strike="noStrike">
+                <a:solidFill>
+                  <a:srgbClr val="000000"/>
+                </a:solidFill>
                 <a:latin typeface="Neue Haas Grotesk Text Pro"/>
                 <a:ea typeface="Microsoft YaHei"/>
               </a:rPr>
               <a:t>Tasca 2: Requisits funcionals del GRUP 1: GESTIÓ DE COMPTES I CREACIÓ DE PERFILS D'USUARI, GRUP 2: REALITZACIÓ DE COMANDES i GRUP 3: ENVIAMENT DE COMANDES (encarregat: </a:t>
             </a:r>
             <a:r>
-              <a:rPr lang="es-ES" sz="1800" b="0" u="none" strike="noStrike">
-                <a:solidFill>
-                  <a:srgbClr val="000000"/>
-                </a:solidFill>
-                <a:effectLst/>
-                <a:uFillTx/>
+              <a:rPr lang="es-ES" sz="1600" b="0" u="none" strike="noStrike">
+                <a:solidFill>
+                  <a:srgbClr val="000000"/>
+                </a:solidFill>
                 <a:latin typeface="Neue Haas Grotesk Text Pro"/>
                 <a:ea typeface="DejaVu Sans"/>
               </a:rPr>
               <a:t>Adam Pérez)</a:t>
             </a:r>
-            <a:endParaRPr lang="en-US" sz="1800" b="0" u="none" strike="noStrike">
-              <a:solidFill>
-                <a:srgbClr val="000000"/>
-              </a:solidFill>
-              <a:effectLst/>
-              <a:uFillTx/>
+            <a:endParaRPr lang="en-US" sz="1600" b="0" u="none" strike="noStrike">
+              <a:solidFill>
+                <a:srgbClr val="000000"/>
+              </a:solidFill>
               <a:latin typeface="Arial"/>
             </a:endParaRPr>
           </a:p>
@@ -7432,16 +9153,15 @@
                 <a:tab pos="9410760" algn="l"/>
                 <a:tab pos="9434520" algn="l"/>
                 <a:tab pos="9883800" algn="l"/>
-                <a:tab pos="10333080" algn="l"/>
+                <a:tab pos="10333079" algn="l"/>
                 <a:tab pos="10782360" algn="l"/>
               </a:tabLst>
-            </a:pPr>
-            <a:endParaRPr lang="en-US" sz="1800" b="0" u="none" strike="noStrike">
-              <a:solidFill>
-                <a:srgbClr val="000000"/>
-              </a:solidFill>
-              <a:effectLst/>
-              <a:uFillTx/>
+              <a:defRPr/>
+            </a:pPr>
+            <a:endParaRPr lang="en-US" sz="1600" b="0" u="none" strike="noStrike">
+              <a:solidFill>
+                <a:srgbClr val="000000"/>
+              </a:solidFill>
               <a:latin typeface="Arial"/>
             </a:endParaRPr>
           </a:p>
@@ -7475,28 +9195,25 @@
                 <a:tab pos="9410760" algn="l"/>
                 <a:tab pos="9434520" algn="l"/>
                 <a:tab pos="9883800" algn="l"/>
-                <a:tab pos="10333080" algn="l"/>
+                <a:tab pos="10333079" algn="l"/>
                 <a:tab pos="10782360" algn="l"/>
               </a:tabLst>
+              <a:defRPr/>
             </a:pPr>
             <a:r>
-              <a:rPr lang="es-ES" sz="1800" b="0" u="none" strike="noStrike">
-                <a:solidFill>
-                  <a:srgbClr val="000000"/>
-                </a:solidFill>
-                <a:effectLst/>
-                <a:uFillTx/>
+              <a:rPr lang="es-ES" sz="1600" b="0" u="none" strike="noStrike">
+                <a:solidFill>
+                  <a:srgbClr val="000000"/>
+                </a:solidFill>
                 <a:latin typeface="Neue Haas Grotesk Text Pro"/>
                 <a:ea typeface="Microsoft YaHei"/>
               </a:rPr>
               <a:t>Tasca 3: Requisits funcionals del GRUP 4: PAGAMENT DE LA COMANDA I GRUP 5: VALORACIÓ DE LA COMANDA (encarregat: Iker Urruticoechea)</a:t>
             </a:r>
-            <a:endParaRPr lang="en-US" sz="1800" b="0" u="none" strike="noStrike">
-              <a:solidFill>
-                <a:srgbClr val="000000"/>
-              </a:solidFill>
-              <a:effectLst/>
-              <a:uFillTx/>
+            <a:endParaRPr lang="en-US" sz="1600" b="0" u="none" strike="noStrike">
+              <a:solidFill>
+                <a:srgbClr val="000000"/>
+              </a:solidFill>
               <a:latin typeface="Arial"/>
             </a:endParaRPr>
           </a:p>
@@ -7530,16 +9247,15 @@
                 <a:tab pos="9410760" algn="l"/>
                 <a:tab pos="9434520" algn="l"/>
                 <a:tab pos="9883800" algn="l"/>
-                <a:tab pos="10333080" algn="l"/>
+                <a:tab pos="10333079" algn="l"/>
                 <a:tab pos="10782360" algn="l"/>
               </a:tabLst>
-            </a:pPr>
-            <a:endParaRPr lang="en-US" sz="1800" b="0" u="none" strike="noStrike">
-              <a:solidFill>
-                <a:srgbClr val="000000"/>
-              </a:solidFill>
-              <a:effectLst/>
-              <a:uFillTx/>
+              <a:defRPr/>
+            </a:pPr>
+            <a:endParaRPr lang="en-US" sz="1600" b="0" u="none" strike="noStrike">
+              <a:solidFill>
+                <a:srgbClr val="000000"/>
+              </a:solidFill>
               <a:latin typeface="Arial"/>
             </a:endParaRPr>
           </a:p>
@@ -7573,28 +9289,25 @@
                 <a:tab pos="9410760" algn="l"/>
                 <a:tab pos="9434520" algn="l"/>
                 <a:tab pos="9883800" algn="l"/>
-                <a:tab pos="10333080" algn="l"/>
+                <a:tab pos="10333079" algn="l"/>
                 <a:tab pos="10782360" algn="l"/>
               </a:tabLst>
+              <a:defRPr/>
             </a:pPr>
             <a:r>
-              <a:rPr lang="es-ES" sz="1800" b="0" u="none" strike="noStrike">
-                <a:solidFill>
-                  <a:srgbClr val="000000"/>
-                </a:solidFill>
-                <a:effectLst/>
-                <a:uFillTx/>
+              <a:rPr lang="es-ES" sz="1600" b="0" u="none" strike="noStrike">
+                <a:solidFill>
+                  <a:srgbClr val="000000"/>
+                </a:solidFill>
                 <a:latin typeface="Neue Haas Grotesk Text Pro"/>
                 <a:ea typeface="Microsoft YaHei"/>
               </a:rPr>
-              <a:t>Tasca 4: Requisits funcionals del GRUP 6: FUNCIONALITATS ADDICIONALS i altres consideracions (encarregat: )</a:t>
+              <a:t>Tasca 4: Requisits funcionals del GRUP 6: FUNCIONALITATS ADDICIONALS i altres consideracions (encarregat: Adam Pérez)</a:t>
             </a:r>
-            <a:endParaRPr lang="en-US" sz="1800" b="0" u="none" strike="noStrike">
-              <a:solidFill>
-                <a:srgbClr val="000000"/>
-              </a:solidFill>
-              <a:effectLst/>
-              <a:uFillTx/>
+            <a:endParaRPr lang="en-US" sz="1600" b="0" u="none" strike="noStrike">
+              <a:solidFill>
+                <a:srgbClr val="000000"/>
+              </a:solidFill>
               <a:latin typeface="Arial"/>
             </a:endParaRPr>
           </a:p>
@@ -7628,16 +9341,15 @@
                 <a:tab pos="9410760" algn="l"/>
                 <a:tab pos="9434520" algn="l"/>
                 <a:tab pos="9883800" algn="l"/>
-                <a:tab pos="10333080" algn="l"/>
+                <a:tab pos="10333079" algn="l"/>
                 <a:tab pos="10782360" algn="l"/>
               </a:tabLst>
-            </a:pPr>
-            <a:endParaRPr lang="en-US" sz="1800" b="0" u="none" strike="noStrike">
-              <a:solidFill>
-                <a:srgbClr val="000000"/>
-              </a:solidFill>
-              <a:effectLst/>
-              <a:uFillTx/>
+              <a:defRPr/>
+            </a:pPr>
+            <a:endParaRPr lang="en-US" sz="1600" b="0" u="none" strike="noStrike">
+              <a:solidFill>
+                <a:srgbClr val="000000"/>
+              </a:solidFill>
               <a:latin typeface="Arial"/>
             </a:endParaRPr>
           </a:p>
@@ -7671,28 +9383,130 @@
                 <a:tab pos="9410760" algn="l"/>
                 <a:tab pos="9434520" algn="l"/>
                 <a:tab pos="9883800" algn="l"/>
-                <a:tab pos="10333080" algn="l"/>
+                <a:tab pos="10333079" algn="l"/>
                 <a:tab pos="10782360" algn="l"/>
               </a:tabLst>
+              <a:defRPr/>
             </a:pPr>
             <a:r>
-              <a:rPr lang="es-ES" sz="1800" b="0" u="none" strike="noStrike">
-                <a:solidFill>
-                  <a:srgbClr val="000000"/>
-                </a:solidFill>
-                <a:effectLst/>
-                <a:uFillTx/>
+              <a:rPr lang="es-ES" sz="1600" b="0" u="none" strike="noStrike">
+                <a:solidFill>
+                  <a:srgbClr val="000000"/>
+                </a:solidFill>
                 <a:latin typeface="Neue Haas Grotesk Text Pro"/>
                 <a:ea typeface="Microsoft YaHei"/>
               </a:rPr>
               <a:t>Tasca 5: Burn-down chart (encarregat: Jan Real)</a:t>
             </a:r>
-            <a:endParaRPr lang="en-US" sz="1800" b="0" u="none" strike="noStrike">
-              <a:solidFill>
-                <a:srgbClr val="000000"/>
-              </a:solidFill>
-              <a:effectLst/>
-              <a:uFillTx/>
+            <a:endParaRPr lang="es-ES" sz="1600" b="0" u="none" strike="noStrike">
+              <a:solidFill>
+                <a:srgbClr val="000000"/>
+              </a:solidFill>
+              <a:latin typeface="Neue Haas Grotesk Text Pro"/>
+              <a:ea typeface="Microsoft YaHei"/>
+            </a:endParaRPr>
+          </a:p>
+          <a:p>
+            <a:pPr algn="just">
+              <a:lnSpc>
+                <a:spcPct val="100000"/>
+              </a:lnSpc>
+              <a:tabLst>
+                <a:tab pos="0" algn="l"/>
+                <a:tab pos="447840" algn="l"/>
+                <a:tab pos="896760" algn="l"/>
+                <a:tab pos="1346040" algn="l"/>
+                <a:tab pos="1795320" algn="l"/>
+                <a:tab pos="2244600" algn="l"/>
+                <a:tab pos="2693880" algn="l"/>
+                <a:tab pos="3143160" algn="l"/>
+                <a:tab pos="3592440" algn="l"/>
+                <a:tab pos="4041720" algn="l"/>
+                <a:tab pos="4491000" algn="l"/>
+                <a:tab pos="4940279" algn="l"/>
+                <a:tab pos="5389560" algn="l"/>
+                <a:tab pos="5838840" algn="l"/>
+                <a:tab pos="6288120" algn="l"/>
+                <a:tab pos="6737400" algn="l"/>
+                <a:tab pos="7186680" algn="l"/>
+                <a:tab pos="7635960" algn="l"/>
+                <a:tab pos="8085240" algn="l"/>
+                <a:tab pos="8534520" algn="l"/>
+                <a:tab pos="8983800" algn="l"/>
+                <a:tab pos="9410760" algn="l"/>
+                <a:tab pos="9434520" algn="l"/>
+                <a:tab pos="9883800" algn="l"/>
+                <a:tab pos="10333079" algn="l"/>
+                <a:tab pos="10782360" algn="l"/>
+              </a:tabLst>
+              <a:defRPr/>
+            </a:pPr>
+            <a:endParaRPr lang="en-US" sz="1600" b="0" u="none" strike="noStrike">
+              <a:solidFill>
+                <a:srgbClr val="000000"/>
+              </a:solidFill>
+              <a:latin typeface="Arial"/>
+            </a:endParaRPr>
+          </a:p>
+          <a:p>
+            <a:pPr algn="just">
+              <a:lnSpc>
+                <a:spcPct val="100000"/>
+              </a:lnSpc>
+              <a:tabLst>
+                <a:tab pos="0" algn="l"/>
+                <a:tab pos="447840" algn="l"/>
+                <a:tab pos="896760" algn="l"/>
+                <a:tab pos="1346040" algn="l"/>
+                <a:tab pos="1795320" algn="l"/>
+                <a:tab pos="2244600" algn="l"/>
+                <a:tab pos="2693880" algn="l"/>
+                <a:tab pos="3143160" algn="l"/>
+                <a:tab pos="3592440" algn="l"/>
+                <a:tab pos="4041720" algn="l"/>
+                <a:tab pos="4491000" algn="l"/>
+                <a:tab pos="4940279" algn="l"/>
+                <a:tab pos="5389560" algn="l"/>
+                <a:tab pos="5838840" algn="l"/>
+                <a:tab pos="6288120" algn="l"/>
+                <a:tab pos="6737400" algn="l"/>
+                <a:tab pos="7186680" algn="l"/>
+                <a:tab pos="7635960" algn="l"/>
+                <a:tab pos="8085240" algn="l"/>
+                <a:tab pos="8534520" algn="l"/>
+                <a:tab pos="8983800" algn="l"/>
+                <a:tab pos="9410760" algn="l"/>
+                <a:tab pos="9434520" algn="l"/>
+                <a:tab pos="9883800" algn="l"/>
+                <a:tab pos="10333079" algn="l"/>
+                <a:tab pos="10782360" algn="l"/>
+              </a:tabLst>
+              <a:defRPr/>
+            </a:pPr>
+            <a:r>
+              <a:rPr lang="es-ES" sz="1600" b="0" u="none" strike="noStrike">
+                <a:solidFill>
+                  <a:srgbClr val="000000"/>
+                </a:solidFill>
+                <a:latin typeface="Neue Haas Grotesk Text Pro"/>
+                <a:ea typeface="Microsoft YaHei"/>
+              </a:rPr>
+              <a:t>T</a:t>
+            </a:r>
+            <a:r>
+              <a:rPr lang="es-ES" sz="1600" b="0" u="none" strike="noStrike">
+                <a:solidFill>
+                  <a:srgbClr val="000000"/>
+                </a:solidFill>
+                <a:latin typeface="Neue Haas Grotesk Text Pro"/>
+                <a:ea typeface="Microsoft YaHei"/>
+              </a:rPr>
+              <a:t>asca 6: Passar requisits a format markdown (encarregat: Òscar Raneda)</a:t>
+            </a:r>
+            <a:endParaRPr lang="en-US" sz="1600" b="0" u="none" strike="noStrike">
+              <a:solidFill>
+                <a:srgbClr val="000000"/>
+              </a:solidFill>
               <a:latin typeface="Arial"/>
             </a:endParaRPr>
           </a:p>
@@ -7700,14 +9514,25 @@
       </p:sp>
     </p:spTree>
   </p:cSld>
+  <p:clrMapOvr>
+    <a:masterClrMapping/>
+  </p:clrMapOvr>
+  <mc:AlternateContent xmlns:mc="http://schemas.openxmlformats.org/markup-compatibility/2006">
+    <mc:Choice xmlns:p159="http://schemas.microsoft.com/office/powerpoint/2015/09/main" xmlns:p14="http://schemas.microsoft.com/office/powerpoint/2010/main" Requires="p159">
+      <p:transition p14:dur="500" advClick="1"/>
+    </mc:Choice>
+    <mc:Fallback>
+      <p:transition advClick="1"/>
+    </mc:Fallback>
+  </mc:AlternateContent>
 </p:sld>
 </file>
 
 <file path=ppt/slides/slide4.xml><?xml version="1.0" encoding="utf-8"?>
-<p:sld xmlns:a="http://schemas.openxmlformats.org/drawingml/2006/main" xmlns:p="http://schemas.openxmlformats.org/presentationml/2006/main" xmlns:r="http://schemas.openxmlformats.org/officeDocument/2006/relationships" xmlns:p14="http://schemas.microsoft.com/office/powerpoint/2010/main" xmlns:p15="http://schemas.microsoft.com/office/powerpoint/2012/main" xmlns:mc="http://schemas.openxmlformats.org/markup-compatibility/2006">
-  <p:cSld>
+<p:sld xmlns:a="http://schemas.openxmlformats.org/drawingml/2006/main" xmlns:r="http://schemas.openxmlformats.org/officeDocument/2006/relationships" xmlns:p="http://schemas.openxmlformats.org/presentationml/2006/main" xmlns:m="http://schemas.openxmlformats.org/officeDocument/2006/math" xmlns:w="http://schemas.openxmlformats.org/wordprocessingml/2006/main" xmlns:mc="http://schemas.openxmlformats.org/markup-compatibility/2006" showMasterPhAnim="0" showMasterSp="1" show="1">
+  <p:cSld name="">
     <p:bg>
-      <p:bgPr>
+      <p:bgPr shadeToTitle="0">
         <a:solidFill>
           <a:srgbClr val="FFFFFF"/>
         </a:solidFill>
@@ -7719,7 +9544,7 @@
         <p:cNvGrpSpPr/>
         <p:nvPr/>
       </p:nvGrpSpPr>
-      <p:grpSpPr>
+      <p:grpSpPr bwMode="auto">
         <a:xfrm>
           <a:off x="0" y="0"/>
           <a:ext cx="0" cy="0"/>
@@ -7729,11 +9554,11 @@
       </p:grpSpPr>
       <p:sp>
         <p:nvSpPr>
-          <p:cNvPr id="32" name=""/>
+          <p:cNvPr id="1222507523" name=""/>
           <p:cNvSpPr/>
           <p:nvPr/>
         </p:nvSpPr>
-        <p:spPr>
+        <p:spPr bwMode="auto">
           <a:xfrm>
             <a:off x="1116000" y="549360"/>
             <a:ext cx="10166400" cy="1177920"/>
@@ -7785,17 +9610,16 @@
                 <a:tab pos="8983800" algn="l"/>
                 <a:tab pos="9410760" algn="l"/>
                 <a:tab pos="10134720" algn="l"/>
-                <a:tab pos="10333080" algn="l"/>
+                <a:tab pos="10333079" algn="l"/>
                 <a:tab pos="10782360" algn="l"/>
               </a:tabLst>
+              <a:defRPr/>
             </a:pPr>
             <a:r>
               <a:rPr lang="es-ES" sz="4000" b="1" u="none" strike="noStrike">
                 <a:solidFill>
                   <a:srgbClr val="000000"/>
                 </a:solidFill>
-                <a:effectLst/>
-                <a:uFillTx/>
                 <a:latin typeface="Neue Haas Grotesk Text Pro"/>
                 <a:ea typeface="DejaVu Sans"/>
               </a:rPr>
@@ -7805,8 +9629,6 @@
               <a:solidFill>
                 <a:srgbClr val="000000"/>
               </a:solidFill>
-              <a:effectLst/>
-              <a:uFillTx/>
               <a:latin typeface="Arial"/>
             </a:endParaRPr>
           </a:p>
@@ -7814,11 +9636,11 @@
       </p:sp>
       <p:sp>
         <p:nvSpPr>
-          <p:cNvPr id="33" name=""/>
+          <p:cNvPr id="1516110571" name=""/>
           <p:cNvSpPr/>
           <p:nvPr/>
         </p:nvSpPr>
-        <p:spPr>
+        <p:spPr bwMode="auto">
           <a:xfrm>
             <a:off x="8540640" y="6356520"/>
             <a:ext cx="2741760" cy="363240"/>
@@ -7871,17 +9693,16 @@
                 <a:tab pos="8985240" algn="l"/>
                 <a:tab pos="9434520" algn="l"/>
                 <a:tab pos="9883800" algn="l"/>
-                <a:tab pos="10333080" algn="l"/>
+                <a:tab pos="10333079" algn="l"/>
                 <a:tab pos="10782360" algn="l"/>
               </a:tabLst>
+              <a:defRPr/>
             </a:pPr>
             <a:fld id="{DD21400F-748C-471A-B2CB-199A509BE27D}" type="slidenum">
               <a:rPr lang="es-ES" sz="1200" b="0" u="none" strike="noStrike">
                 <a:solidFill>
                   <a:srgbClr val="8B8B8B"/>
                 </a:solidFill>
-                <a:effectLst/>
-                <a:uFillTx/>
                 <a:latin typeface="Neue Haas Grotesk Text Pro"/>
                 <a:ea typeface="DejaVu Sans"/>
               </a:rPr>
@@ -7891,8 +9712,6 @@
               <a:solidFill>
                 <a:srgbClr val="000000"/>
               </a:solidFill>
-              <a:effectLst/>
-              <a:uFillTx/>
               <a:latin typeface="Arial"/>
             </a:endParaRPr>
           </a:p>
@@ -7900,11 +9719,11 @@
       </p:sp>
       <p:sp>
         <p:nvSpPr>
-          <p:cNvPr id="34" name=""/>
+          <p:cNvPr id="1173383160" name=""/>
           <p:cNvSpPr/>
           <p:nvPr/>
         </p:nvSpPr>
-        <p:spPr>
+        <p:spPr bwMode="auto">
           <a:xfrm>
             <a:off x="428760" y="2198520"/>
             <a:ext cx="10020240" cy="3930840"/>
@@ -7957,17 +9776,16 @@
                 <a:tab pos="9410760" algn="l"/>
                 <a:tab pos="9434520" algn="l"/>
                 <a:tab pos="9883800" algn="l"/>
-                <a:tab pos="10333080" algn="l"/>
+                <a:tab pos="10333079" algn="l"/>
                 <a:tab pos="10782360" algn="l"/>
               </a:tabLst>
+              <a:defRPr/>
             </a:pPr>
             <a:r>
               <a:rPr lang="es-ES" sz="1800" b="0" u="none" strike="noStrike">
                 <a:solidFill>
                   <a:srgbClr val="000000"/>
                 </a:solidFill>
-                <a:effectLst/>
-                <a:uFillTx/>
                 <a:latin typeface="Neue Haas Grotesk Text Pro"/>
                 <a:ea typeface="DejaVu Sans"/>
               </a:rPr>
@@ -7977,8 +9795,6 @@
               <a:solidFill>
                 <a:srgbClr val="000000"/>
               </a:solidFill>
-              <a:effectLst/>
-              <a:uFillTx/>
               <a:latin typeface="Arial"/>
             </a:endParaRPr>
           </a:p>
@@ -8012,16 +9828,15 @@
                 <a:tab pos="9410760" algn="l"/>
                 <a:tab pos="9434520" algn="l"/>
                 <a:tab pos="9883800" algn="l"/>
-                <a:tab pos="10333080" algn="l"/>
+                <a:tab pos="10333079" algn="l"/>
                 <a:tab pos="10782360" algn="l"/>
               </a:tabLst>
+              <a:defRPr/>
             </a:pPr>
             <a:endParaRPr lang="en-US" sz="1800" b="0" u="none" strike="noStrike">
               <a:solidFill>
                 <a:srgbClr val="000000"/>
               </a:solidFill>
-              <a:effectLst/>
-              <a:uFillTx/>
               <a:latin typeface="Arial"/>
             </a:endParaRPr>
           </a:p>
@@ -8055,17 +9870,16 @@
                 <a:tab pos="9410760" algn="l"/>
                 <a:tab pos="9434520" algn="l"/>
                 <a:tab pos="9883800" algn="l"/>
-                <a:tab pos="10333080" algn="l"/>
+                <a:tab pos="10333079" algn="l"/>
                 <a:tab pos="10782360" algn="l"/>
               </a:tabLst>
+              <a:defRPr/>
             </a:pPr>
             <a:r>
               <a:rPr lang="es-ES" sz="1800" b="0" u="none" strike="noStrike">
                 <a:solidFill>
                   <a:srgbClr val="000000"/>
                 </a:solidFill>
-                <a:effectLst/>
-                <a:uFillTx/>
                 <a:latin typeface="Neue Haas Grotesk Text Pro"/>
                 <a:ea typeface="DejaVu Sans"/>
               </a:rPr>
@@ -8075,8 +9889,6 @@
               <a:solidFill>
                 <a:srgbClr val="000000"/>
               </a:solidFill>
-              <a:effectLst/>
-              <a:uFillTx/>
               <a:latin typeface="Arial"/>
             </a:endParaRPr>
           </a:p>
@@ -8110,16 +9922,15 @@
                 <a:tab pos="9410760" algn="l"/>
                 <a:tab pos="9434520" algn="l"/>
                 <a:tab pos="9883800" algn="l"/>
-                <a:tab pos="10333080" algn="l"/>
+                <a:tab pos="10333079" algn="l"/>
                 <a:tab pos="10782360" algn="l"/>
               </a:tabLst>
+              <a:defRPr/>
             </a:pPr>
             <a:endParaRPr lang="en-US" sz="1800" b="0" u="none" strike="noStrike">
               <a:solidFill>
                 <a:srgbClr val="000000"/>
               </a:solidFill>
-              <a:effectLst/>
-              <a:uFillTx/>
               <a:latin typeface="Arial"/>
             </a:endParaRPr>
           </a:p>
@@ -8153,17 +9964,16 @@
                 <a:tab pos="9410760" algn="l"/>
                 <a:tab pos="9434520" algn="l"/>
                 <a:tab pos="9883800" algn="l"/>
-                <a:tab pos="10333080" algn="l"/>
+                <a:tab pos="10333079" algn="l"/>
                 <a:tab pos="10782360" algn="l"/>
               </a:tabLst>
+              <a:defRPr/>
             </a:pPr>
             <a:r>
               <a:rPr lang="es-ES" sz="1800" b="0" u="none" strike="noStrike">
                 <a:solidFill>
                   <a:srgbClr val="000000"/>
                 </a:solidFill>
-                <a:effectLst/>
-                <a:uFillTx/>
                 <a:latin typeface="Neue Haas Grotesk Text Pro"/>
                 <a:ea typeface="DejaVu Sans"/>
               </a:rPr>
@@ -8173,8 +9983,6 @@
               <a:solidFill>
                 <a:srgbClr val="000000"/>
               </a:solidFill>
-              <a:effectLst/>
-              <a:uFillTx/>
               <a:latin typeface="Arial"/>
             </a:endParaRPr>
           </a:p>
@@ -8208,16 +10016,15 @@
                 <a:tab pos="9410760" algn="l"/>
                 <a:tab pos="9434520" algn="l"/>
                 <a:tab pos="9883800" algn="l"/>
-                <a:tab pos="10333080" algn="l"/>
+                <a:tab pos="10333079" algn="l"/>
                 <a:tab pos="10782360" algn="l"/>
               </a:tabLst>
+              <a:defRPr/>
             </a:pPr>
             <a:endParaRPr lang="en-US" sz="1800" b="0" u="none" strike="noStrike">
               <a:solidFill>
                 <a:srgbClr val="000000"/>
               </a:solidFill>
-              <a:effectLst/>
-              <a:uFillTx/>
               <a:latin typeface="Arial"/>
             </a:endParaRPr>
           </a:p>
@@ -8251,17 +10058,16 @@
                 <a:tab pos="9410760" algn="l"/>
                 <a:tab pos="9434520" algn="l"/>
                 <a:tab pos="9883800" algn="l"/>
-                <a:tab pos="10333080" algn="l"/>
+                <a:tab pos="10333079" algn="l"/>
                 <a:tab pos="10782360" algn="l"/>
               </a:tabLst>
+              <a:defRPr/>
             </a:pPr>
             <a:r>
               <a:rPr lang="es-ES" sz="1800" b="0" u="none" strike="noStrike">
                 <a:solidFill>
                   <a:srgbClr val="000000"/>
                 </a:solidFill>
-                <a:effectLst/>
-                <a:uFillTx/>
                 <a:latin typeface="Neue Haas Grotesk Text Pro"/>
                 <a:ea typeface="DejaVu Sans"/>
               </a:rPr>
@@ -8271,8 +10077,6 @@
               <a:solidFill>
                 <a:srgbClr val="000000"/>
               </a:solidFill>
-              <a:effectLst/>
-              <a:uFillTx/>
               <a:latin typeface="Arial"/>
             </a:endParaRPr>
           </a:p>
@@ -8306,16 +10110,15 @@
                 <a:tab pos="9410760" algn="l"/>
                 <a:tab pos="9434520" algn="l"/>
                 <a:tab pos="9883800" algn="l"/>
-                <a:tab pos="10333080" algn="l"/>
+                <a:tab pos="10333079" algn="l"/>
                 <a:tab pos="10782360" algn="l"/>
               </a:tabLst>
+              <a:defRPr/>
             </a:pPr>
             <a:endParaRPr lang="en-US" sz="1800" b="0" u="none" strike="noStrike">
               <a:solidFill>
                 <a:srgbClr val="000000"/>
               </a:solidFill>
-              <a:effectLst/>
-              <a:uFillTx/>
               <a:latin typeface="Arial"/>
             </a:endParaRPr>
           </a:p>
@@ -8349,17 +10152,16 @@
                 <a:tab pos="9410760" algn="l"/>
                 <a:tab pos="9434520" algn="l"/>
                 <a:tab pos="9883800" algn="l"/>
-                <a:tab pos="10333080" algn="l"/>
+                <a:tab pos="10333079" algn="l"/>
                 <a:tab pos="10782360" algn="l"/>
               </a:tabLst>
+              <a:defRPr/>
             </a:pPr>
             <a:r>
               <a:rPr lang="es-ES" sz="1800" b="0" u="none" strike="noStrike">
                 <a:solidFill>
                   <a:srgbClr val="000000"/>
                 </a:solidFill>
-                <a:effectLst/>
-                <a:uFillTx/>
                 <a:latin typeface="Neue Haas Grotesk Text Pro"/>
                 <a:ea typeface="DejaVu Sans"/>
               </a:rPr>
@@ -8369,8 +10171,6 @@
               <a:solidFill>
                 <a:srgbClr val="000000"/>
               </a:solidFill>
-              <a:effectLst/>
-              <a:uFillTx/>
               <a:latin typeface="Arial"/>
             </a:endParaRPr>
           </a:p>
@@ -8404,16 +10204,15 @@
                 <a:tab pos="9410760" algn="l"/>
                 <a:tab pos="9434520" algn="l"/>
                 <a:tab pos="9883800" algn="l"/>
-                <a:tab pos="10333080" algn="l"/>
+                <a:tab pos="10333079" algn="l"/>
                 <a:tab pos="10782360" algn="l"/>
               </a:tabLst>
+              <a:defRPr/>
             </a:pPr>
             <a:endParaRPr lang="en-US" sz="1800" b="0" u="none" strike="noStrike">
               <a:solidFill>
                 <a:srgbClr val="000000"/>
               </a:solidFill>
-              <a:effectLst/>
-              <a:uFillTx/>
               <a:latin typeface="Arial"/>
             </a:endParaRPr>
           </a:p>
@@ -8447,17 +10246,16 @@
                 <a:tab pos="9410760" algn="l"/>
                 <a:tab pos="9434520" algn="l"/>
                 <a:tab pos="9883800" algn="l"/>
-                <a:tab pos="10333080" algn="l"/>
+                <a:tab pos="10333079" algn="l"/>
                 <a:tab pos="10782360" algn="l"/>
               </a:tabLst>
+              <a:defRPr/>
             </a:pPr>
             <a:r>
               <a:rPr lang="es-ES" sz="1800" b="0" u="none" strike="noStrike">
                 <a:solidFill>
                   <a:srgbClr val="000000"/>
                 </a:solidFill>
-                <a:effectLst/>
-                <a:uFillTx/>
                 <a:latin typeface="Neue Haas Grotesk Text Pro"/>
                 <a:ea typeface="DejaVu Sans"/>
               </a:rPr>
@@ -8467,8 +10265,6 @@
               <a:solidFill>
                 <a:srgbClr val="000000"/>
               </a:solidFill>
-              <a:effectLst/>
-              <a:uFillTx/>
               <a:latin typeface="Arial"/>
             </a:endParaRPr>
           </a:p>
@@ -8502,16 +10298,15 @@
                 <a:tab pos="9410760" algn="l"/>
                 <a:tab pos="9434520" algn="l"/>
                 <a:tab pos="9883800" algn="l"/>
-                <a:tab pos="10333080" algn="l"/>
+                <a:tab pos="10333079" algn="l"/>
                 <a:tab pos="10782360" algn="l"/>
               </a:tabLst>
+              <a:defRPr/>
             </a:pPr>
             <a:endParaRPr lang="en-US" sz="1800" b="0" u="none" strike="noStrike">
               <a:solidFill>
                 <a:srgbClr val="000000"/>
               </a:solidFill>
-              <a:effectLst/>
-              <a:uFillTx/>
               <a:latin typeface="Arial"/>
             </a:endParaRPr>
           </a:p>
@@ -8545,17 +10340,16 @@
                 <a:tab pos="9410760" algn="l"/>
                 <a:tab pos="9434520" algn="l"/>
                 <a:tab pos="9883800" algn="l"/>
-                <a:tab pos="10333080" algn="l"/>
+                <a:tab pos="10333079" algn="l"/>
                 <a:tab pos="10782360" algn="l"/>
               </a:tabLst>
+              <a:defRPr/>
             </a:pPr>
             <a:r>
               <a:rPr lang="es-ES" sz="1800" b="0" u="none" strike="noStrike">
                 <a:solidFill>
                   <a:srgbClr val="000000"/>
                 </a:solidFill>
-                <a:effectLst/>
-                <a:uFillTx/>
                 <a:latin typeface="Neue Haas Grotesk Text Pro"/>
                 <a:ea typeface="DejaVu Sans"/>
               </a:rPr>
@@ -8565,8 +10359,6 @@
               <a:solidFill>
                 <a:srgbClr val="000000"/>
               </a:solidFill>
-              <a:effectLst/>
-              <a:uFillTx/>
               <a:latin typeface="Arial"/>
             </a:endParaRPr>
           </a:p>
@@ -8600,16 +10392,15 @@
                 <a:tab pos="9410760" algn="l"/>
                 <a:tab pos="9434520" algn="l"/>
                 <a:tab pos="9883800" algn="l"/>
-                <a:tab pos="10333080" algn="l"/>
+                <a:tab pos="10333079" algn="l"/>
                 <a:tab pos="10782360" algn="l"/>
               </a:tabLst>
+              <a:defRPr/>
             </a:pPr>
             <a:endParaRPr lang="en-US" sz="1800" b="0" u="none" strike="noStrike">
               <a:solidFill>
                 <a:srgbClr val="000000"/>
               </a:solidFill>
-              <a:effectLst/>
-              <a:uFillTx/>
               <a:latin typeface="Arial"/>
             </a:endParaRPr>
           </a:p>
@@ -8617,14 +10408,25 @@
       </p:sp>
     </p:spTree>
   </p:cSld>
+  <p:clrMapOvr>
+    <a:masterClrMapping/>
+  </p:clrMapOvr>
+  <mc:AlternateContent xmlns:mc="http://schemas.openxmlformats.org/markup-compatibility/2006">
+    <mc:Choice xmlns:p159="http://schemas.microsoft.com/office/powerpoint/2015/09/main" xmlns:p14="http://schemas.microsoft.com/office/powerpoint/2010/main" Requires="p159">
+      <p:transition p14:dur="500" advClick="1"/>
+    </mc:Choice>
+    <mc:Fallback>
+      <p:transition advClick="1"/>
+    </mc:Fallback>
+  </mc:AlternateContent>
 </p:sld>
 </file>
 
 <file path=ppt/slides/slide5.xml><?xml version="1.0" encoding="utf-8"?>
-<p:sld xmlns:a="http://schemas.openxmlformats.org/drawingml/2006/main" xmlns:p="http://schemas.openxmlformats.org/presentationml/2006/main" xmlns:r="http://schemas.openxmlformats.org/officeDocument/2006/relationships" xmlns:p14="http://schemas.microsoft.com/office/powerpoint/2010/main" xmlns:p15="http://schemas.microsoft.com/office/powerpoint/2012/main" xmlns:mc="http://schemas.openxmlformats.org/markup-compatibility/2006">
-  <p:cSld>
+<p:sld xmlns:a="http://schemas.openxmlformats.org/drawingml/2006/main" xmlns:r="http://schemas.openxmlformats.org/officeDocument/2006/relationships" xmlns:p="http://schemas.openxmlformats.org/presentationml/2006/main" xmlns:m="http://schemas.openxmlformats.org/officeDocument/2006/math" xmlns:w="http://schemas.openxmlformats.org/wordprocessingml/2006/main" xmlns:mc="http://schemas.openxmlformats.org/markup-compatibility/2006" showMasterPhAnim="0" showMasterSp="1" show="1">
+  <p:cSld name="">
     <p:bg>
-      <p:bgPr>
+      <p:bgPr shadeToTitle="0">
         <a:solidFill>
           <a:srgbClr val="FFFFFF"/>
         </a:solidFill>
@@ -8636,7 +10438,7 @@
         <p:cNvGrpSpPr/>
         <p:nvPr/>
       </p:nvGrpSpPr>
-      <p:grpSpPr>
+      <p:grpSpPr bwMode="auto">
         <a:xfrm>
           <a:off x="0" y="0"/>
           <a:ext cx="0" cy="0"/>
@@ -8646,11 +10448,11 @@
       </p:grpSpPr>
       <p:sp>
         <p:nvSpPr>
-          <p:cNvPr id="35" name=""/>
+          <p:cNvPr id="1356128709" name=""/>
           <p:cNvSpPr/>
           <p:nvPr/>
         </p:nvSpPr>
-        <p:spPr>
+        <p:spPr bwMode="auto">
           <a:xfrm>
             <a:off x="1116000" y="549360"/>
             <a:ext cx="10166400" cy="1177920"/>
@@ -8702,17 +10504,16 @@
                 <a:tab pos="8983800" algn="l"/>
                 <a:tab pos="9410760" algn="l"/>
                 <a:tab pos="10134720" algn="l"/>
-                <a:tab pos="10333080" algn="l"/>
+                <a:tab pos="10333079" algn="l"/>
                 <a:tab pos="10782360" algn="l"/>
               </a:tabLst>
+              <a:defRPr/>
             </a:pPr>
             <a:r>
               <a:rPr lang="es-ES" sz="4000" b="1" u="none" strike="noStrike">
                 <a:solidFill>
                   <a:srgbClr val="000000"/>
                 </a:solidFill>
-                <a:effectLst/>
-                <a:uFillTx/>
                 <a:latin typeface="Neue Haas Grotesk Text Pro"/>
                 <a:ea typeface="DejaVu Sans"/>
               </a:rPr>
@@ -8723,8 +10524,6 @@
                 <a:solidFill>
                   <a:srgbClr val="000000"/>
                 </a:solidFill>
-                <a:effectLst/>
-                <a:uFillTx/>
                 <a:latin typeface="Neue Haas Grotesk Text Pro"/>
                 <a:ea typeface="DejaVu Sans"/>
               </a:rPr>
@@ -8734,8 +10533,6 @@
               <a:solidFill>
                 <a:srgbClr val="000000"/>
               </a:solidFill>
-              <a:effectLst/>
-              <a:uFillTx/>
               <a:latin typeface="Arial"/>
             </a:endParaRPr>
           </a:p>
@@ -8743,11 +10540,11 @@
       </p:sp>
       <p:sp>
         <p:nvSpPr>
-          <p:cNvPr id="36" name=""/>
+          <p:cNvPr id="1099495426" name=""/>
           <p:cNvSpPr/>
           <p:nvPr/>
         </p:nvSpPr>
-        <p:spPr>
+        <p:spPr bwMode="auto">
           <a:xfrm>
             <a:off x="8540640" y="6356520"/>
             <a:ext cx="2741760" cy="363240"/>
@@ -8800,17 +10597,16 @@
                 <a:tab pos="8985240" algn="l"/>
                 <a:tab pos="9434520" algn="l"/>
                 <a:tab pos="9883800" algn="l"/>
-                <a:tab pos="10333080" algn="l"/>
+                <a:tab pos="10333079" algn="l"/>
                 <a:tab pos="10782360" algn="l"/>
               </a:tabLst>
+              <a:defRPr/>
             </a:pPr>
             <a:fld id="{9AC86EFB-735D-4754-9A13-AA6F2340FF1B}" type="slidenum">
               <a:rPr lang="es-ES" sz="1200" b="0" u="none" strike="noStrike">
                 <a:solidFill>
                   <a:srgbClr val="8B8B8B"/>
                 </a:solidFill>
-                <a:effectLst/>
-                <a:uFillTx/>
                 <a:latin typeface="Neue Haas Grotesk Text Pro"/>
                 <a:ea typeface="DejaVu Sans"/>
               </a:rPr>
@@ -8820,8 +10616,6 @@
               <a:solidFill>
                 <a:srgbClr val="000000"/>
               </a:solidFill>
-              <a:effectLst/>
-              <a:uFillTx/>
               <a:latin typeface="Arial"/>
             </a:endParaRPr>
           </a:p>
@@ -8829,11 +10623,11 @@
       </p:sp>
       <p:sp>
         <p:nvSpPr>
-          <p:cNvPr id="37" name=""/>
+          <p:cNvPr id="1723832609" name=""/>
           <p:cNvSpPr/>
           <p:nvPr/>
         </p:nvSpPr>
-        <p:spPr>
+        <p:spPr bwMode="auto">
           <a:xfrm>
             <a:off x="428760" y="2198520"/>
             <a:ext cx="11264760" cy="4890960"/>
@@ -8887,14 +10681,13 @@
                 <a:tab pos="10134720" algn="l"/>
                 <a:tab pos="10858680" algn="l"/>
               </a:tabLst>
+              <a:defRPr/>
             </a:pPr>
             <a:r>
               <a:rPr lang="es-ES" sz="1800" b="0" u="none" strike="noStrike">
                 <a:solidFill>
                   <a:srgbClr val="000000"/>
                 </a:solidFill>
-                <a:effectLst/>
-                <a:uFillTx/>
                 <a:latin typeface="Neue Haas Grotesk Text Pro"/>
                 <a:ea typeface="DejaVu Sans"/>
               </a:rPr>
@@ -8904,8 +10697,6 @@
               <a:solidFill>
                 <a:srgbClr val="000000"/>
               </a:solidFill>
-              <a:effectLst/>
-              <a:uFillTx/>
               <a:latin typeface="Arial"/>
             </a:endParaRPr>
           </a:p>
@@ -8940,13 +10731,12 @@
                 <a:tab pos="10134720" algn="l"/>
                 <a:tab pos="10858680" algn="l"/>
               </a:tabLst>
+              <a:defRPr/>
             </a:pPr>
             <a:endParaRPr lang="en-US" sz="1500" b="0" u="none" strike="noStrike">
               <a:solidFill>
                 <a:srgbClr val="000000"/>
               </a:solidFill>
-              <a:effectLst/>
-              <a:uFillTx/>
               <a:latin typeface="Arial"/>
             </a:endParaRPr>
           </a:p>
@@ -8981,14 +10771,13 @@
                 <a:tab pos="10134720" algn="l"/>
                 <a:tab pos="10858680" algn="l"/>
               </a:tabLst>
+              <a:defRPr/>
             </a:pPr>
             <a:r>
               <a:rPr lang="es-ES" sz="1800" b="0" u="none" strike="noStrike">
                 <a:solidFill>
                   <a:srgbClr val="000000"/>
                 </a:solidFill>
-                <a:effectLst/>
-                <a:uFillTx/>
                 <a:latin typeface="Neue Haas Grotesk Text Pro"/>
                 <a:ea typeface="DejaVu Sans"/>
               </a:rPr>
@@ -8998,8 +10787,6 @@
               <a:solidFill>
                 <a:srgbClr val="000000"/>
               </a:solidFill>
-              <a:effectLst/>
-              <a:uFillTx/>
               <a:latin typeface="Arial"/>
             </a:endParaRPr>
           </a:p>
@@ -9034,14 +10821,13 @@
                 <a:tab pos="10134720" algn="l"/>
                 <a:tab pos="10858680" algn="l"/>
               </a:tabLst>
+              <a:defRPr/>
             </a:pPr>
             <a:r>
               <a:rPr lang="es-ES" sz="1800" b="0" u="none" strike="noStrike">
                 <a:solidFill>
                   <a:srgbClr val="000000"/>
                 </a:solidFill>
-                <a:effectLst/>
-                <a:uFillTx/>
                 <a:latin typeface="Neue Haas Grotesk Text Pro"/>
                 <a:ea typeface="DejaVu Sans"/>
               </a:rPr>
@@ -9052,8 +10838,6 @@
                 <a:solidFill>
                   <a:srgbClr val="000000"/>
                 </a:solidFill>
-                <a:effectLst/>
-                <a:uFillTx/>
                 <a:latin typeface="Neue Haas Grotesk Text Pro"/>
                 <a:ea typeface="DejaVu Sans"/>
               </a:rPr>
@@ -9063,8 +10847,6 @@
               <a:solidFill>
                 <a:srgbClr val="000000"/>
               </a:solidFill>
-              <a:effectLst/>
-              <a:uFillTx/>
               <a:latin typeface="Arial"/>
             </a:endParaRPr>
           </a:p>
@@ -9099,13 +10881,12 @@
                 <a:tab pos="10134720" algn="l"/>
                 <a:tab pos="10858680" algn="l"/>
               </a:tabLst>
+              <a:defRPr/>
             </a:pPr>
             <a:endParaRPr lang="en-US" sz="1500" b="0" u="none" strike="noStrike">
               <a:solidFill>
                 <a:srgbClr val="000000"/>
               </a:solidFill>
-              <a:effectLst/>
-              <a:uFillTx/>
               <a:latin typeface="Arial"/>
             </a:endParaRPr>
           </a:p>
@@ -9140,14 +10921,13 @@
                 <a:tab pos="10134720" algn="l"/>
                 <a:tab pos="10858680" algn="l"/>
               </a:tabLst>
+              <a:defRPr/>
             </a:pPr>
             <a:r>
               <a:rPr lang="es-ES" sz="1800" b="0" u="none" strike="noStrike">
                 <a:solidFill>
                   <a:srgbClr val="000000"/>
                 </a:solidFill>
-                <a:effectLst/>
-                <a:uFillTx/>
                 <a:latin typeface="Neue Haas Grotesk Text Pro"/>
                 <a:ea typeface="DejaVu Sans"/>
               </a:rPr>
@@ -9157,8 +10937,6 @@
               <a:solidFill>
                 <a:srgbClr val="000000"/>
               </a:solidFill>
-              <a:effectLst/>
-              <a:uFillTx/>
               <a:latin typeface="Arial"/>
             </a:endParaRPr>
           </a:p>
@@ -9193,13 +10971,12 @@
                 <a:tab pos="10134720" algn="l"/>
                 <a:tab pos="10858680" algn="l"/>
               </a:tabLst>
+              <a:defRPr/>
             </a:pPr>
             <a:endParaRPr lang="en-US" sz="1500" b="0" u="none" strike="noStrike">
               <a:solidFill>
                 <a:srgbClr val="000000"/>
               </a:solidFill>
-              <a:effectLst/>
-              <a:uFillTx/>
               <a:latin typeface="Arial"/>
             </a:endParaRPr>
           </a:p>
@@ -9234,14 +11011,13 @@
                 <a:tab pos="10134720" algn="l"/>
                 <a:tab pos="10858680" algn="l"/>
               </a:tabLst>
+              <a:defRPr/>
             </a:pPr>
             <a:r>
               <a:rPr lang="es-ES" sz="1800" b="0" u="none" strike="noStrike">
                 <a:solidFill>
                   <a:srgbClr val="000000"/>
                 </a:solidFill>
-                <a:effectLst/>
-                <a:uFillTx/>
                 <a:latin typeface="Neue Haas Grotesk Text Pro"/>
                 <a:ea typeface="DejaVu Sans"/>
               </a:rPr>
@@ -9251,8 +11027,6 @@
               <a:solidFill>
                 <a:srgbClr val="000000"/>
               </a:solidFill>
-              <a:effectLst/>
-              <a:uFillTx/>
               <a:latin typeface="Arial"/>
             </a:endParaRPr>
           </a:p>
@@ -9287,14 +11061,13 @@
                 <a:tab pos="10134720" algn="l"/>
                 <a:tab pos="10858680" algn="l"/>
               </a:tabLst>
+              <a:defRPr/>
             </a:pPr>
             <a:r>
               <a:rPr lang="es-ES" sz="1800" b="0" u="none" strike="noStrike">
                 <a:solidFill>
                   <a:srgbClr val="000000"/>
                 </a:solidFill>
-                <a:effectLst/>
-                <a:uFillTx/>
                 <a:latin typeface="Neue Haas Grotesk Text Pro"/>
                 <a:ea typeface="DejaVu Sans"/>
               </a:rPr>
@@ -9305,8 +11078,6 @@
                 <a:solidFill>
                   <a:srgbClr val="000000"/>
                 </a:solidFill>
-                <a:effectLst/>
-                <a:uFillTx/>
                 <a:latin typeface="Neue Haas Grotesk Text Pro"/>
                 <a:ea typeface="DejaVu Sans"/>
               </a:rPr>
@@ -9316,8 +11087,6 @@
               <a:solidFill>
                 <a:srgbClr val="000000"/>
               </a:solidFill>
-              <a:effectLst/>
-              <a:uFillTx/>
               <a:latin typeface="Arial"/>
             </a:endParaRPr>
           </a:p>
@@ -9352,13 +11121,12 @@
                 <a:tab pos="10134720" algn="l"/>
                 <a:tab pos="10858680" algn="l"/>
               </a:tabLst>
+              <a:defRPr/>
             </a:pPr>
             <a:endParaRPr lang="en-US" sz="1500" b="0" u="none" strike="noStrike">
               <a:solidFill>
                 <a:srgbClr val="000000"/>
               </a:solidFill>
-              <a:effectLst/>
-              <a:uFillTx/>
               <a:latin typeface="Arial"/>
             </a:endParaRPr>
           </a:p>
@@ -9393,14 +11161,13 @@
                 <a:tab pos="10134720" algn="l"/>
                 <a:tab pos="10858680" algn="l"/>
               </a:tabLst>
+              <a:defRPr/>
             </a:pPr>
             <a:r>
               <a:rPr lang="es-ES" sz="1800" b="0" u="none" strike="noStrike">
                 <a:solidFill>
                   <a:srgbClr val="000000"/>
                 </a:solidFill>
-                <a:effectLst/>
-                <a:uFillTx/>
                 <a:latin typeface="Neue Haas Grotesk Text Pro"/>
                 <a:ea typeface="DejaVu Sans"/>
               </a:rPr>
@@ -9410,8 +11177,6 @@
               <a:solidFill>
                 <a:srgbClr val="000000"/>
               </a:solidFill>
-              <a:effectLst/>
-              <a:uFillTx/>
               <a:latin typeface="Arial"/>
             </a:endParaRPr>
           </a:p>
@@ -9446,13 +11211,12 @@
                 <a:tab pos="10134720" algn="l"/>
                 <a:tab pos="10858680" algn="l"/>
               </a:tabLst>
+              <a:defRPr/>
             </a:pPr>
             <a:endParaRPr lang="en-US" sz="1500" b="0" u="none" strike="noStrike">
               <a:solidFill>
                 <a:srgbClr val="000000"/>
               </a:solidFill>
-              <a:effectLst/>
-              <a:uFillTx/>
               <a:latin typeface="Arial"/>
             </a:endParaRPr>
           </a:p>
@@ -9487,14 +11251,13 @@
                 <a:tab pos="10134720" algn="l"/>
                 <a:tab pos="10858680" algn="l"/>
               </a:tabLst>
+              <a:defRPr/>
             </a:pPr>
             <a:r>
               <a:rPr lang="es-ES" sz="1800" b="0" u="none" strike="noStrike">
                 <a:solidFill>
                   <a:srgbClr val="000000"/>
                 </a:solidFill>
-                <a:effectLst/>
-                <a:uFillTx/>
                 <a:latin typeface="Neue Haas Grotesk Text Pro"/>
                 <a:ea typeface="DejaVu Sans"/>
               </a:rPr>
@@ -9504,8 +11267,6 @@
               <a:solidFill>
                 <a:srgbClr val="000000"/>
               </a:solidFill>
-              <a:effectLst/>
-              <a:uFillTx/>
               <a:latin typeface="Arial"/>
             </a:endParaRPr>
           </a:p>
@@ -9540,13 +11301,12 @@
                 <a:tab pos="10134720" algn="l"/>
                 <a:tab pos="10858680" algn="l"/>
               </a:tabLst>
+              <a:defRPr/>
             </a:pPr>
             <a:endParaRPr lang="en-US" sz="1500" b="0" u="none" strike="noStrike">
               <a:solidFill>
                 <a:srgbClr val="000000"/>
               </a:solidFill>
-              <a:effectLst/>
-              <a:uFillTx/>
               <a:latin typeface="Arial"/>
             </a:endParaRPr>
           </a:p>
@@ -9581,14 +11341,13 @@
                 <a:tab pos="10134720" algn="l"/>
                 <a:tab pos="10858680" algn="l"/>
               </a:tabLst>
+              <a:defRPr/>
             </a:pPr>
             <a:r>
               <a:rPr lang="es-ES" sz="1800" b="0" u="none" strike="noStrike">
                 <a:solidFill>
                   <a:srgbClr val="000000"/>
                 </a:solidFill>
-                <a:effectLst/>
-                <a:uFillTx/>
                 <a:latin typeface="Neue Haas Grotesk Text Pro"/>
                 <a:ea typeface="DejaVu Sans"/>
               </a:rPr>
@@ -9598,8 +11357,6 @@
               <a:solidFill>
                 <a:srgbClr val="000000"/>
               </a:solidFill>
-              <a:effectLst/>
-              <a:uFillTx/>
               <a:latin typeface="Arial"/>
             </a:endParaRPr>
           </a:p>
@@ -9634,13 +11391,12 @@
                 <a:tab pos="10134720" algn="l"/>
                 <a:tab pos="10858680" algn="l"/>
               </a:tabLst>
+              <a:defRPr/>
             </a:pPr>
             <a:endParaRPr lang="en-US" sz="1500" b="0" u="none" strike="noStrike">
               <a:solidFill>
                 <a:srgbClr val="000000"/>
               </a:solidFill>
-              <a:effectLst/>
-              <a:uFillTx/>
               <a:latin typeface="Arial"/>
             </a:endParaRPr>
           </a:p>
@@ -9675,14 +11431,13 @@
                 <a:tab pos="10134720" algn="l"/>
                 <a:tab pos="10858680" algn="l"/>
               </a:tabLst>
+              <a:defRPr/>
             </a:pPr>
             <a:r>
               <a:rPr lang="es-ES" sz="1800" b="0" u="none" strike="noStrike">
                 <a:solidFill>
                   <a:srgbClr val="000000"/>
                 </a:solidFill>
-                <a:effectLst/>
-                <a:uFillTx/>
                 <a:latin typeface="Neue Haas Grotesk Text Pro"/>
                 <a:ea typeface="DejaVu Sans"/>
               </a:rPr>
@@ -9692,8 +11447,6 @@
               <a:solidFill>
                 <a:srgbClr val="000000"/>
               </a:solidFill>
-              <a:effectLst/>
-              <a:uFillTx/>
               <a:latin typeface="Arial"/>
             </a:endParaRPr>
           </a:p>
@@ -9728,13 +11481,12 @@
                 <a:tab pos="10134720" algn="l"/>
                 <a:tab pos="10858680" algn="l"/>
               </a:tabLst>
+              <a:defRPr/>
             </a:pPr>
             <a:endParaRPr lang="en-US" sz="1500" b="0" u="none" strike="noStrike">
               <a:solidFill>
                 <a:srgbClr val="000000"/>
               </a:solidFill>
-              <a:effectLst/>
-              <a:uFillTx/>
               <a:latin typeface="Arial"/>
             </a:endParaRPr>
           </a:p>
@@ -9769,13 +11521,12 @@
                 <a:tab pos="10134720" algn="l"/>
                 <a:tab pos="10858680" algn="l"/>
               </a:tabLst>
+              <a:defRPr/>
             </a:pPr>
             <a:endParaRPr lang="en-US" sz="1500" b="0" u="none" strike="noStrike">
               <a:solidFill>
                 <a:srgbClr val="000000"/>
               </a:solidFill>
-              <a:effectLst/>
-              <a:uFillTx/>
               <a:latin typeface="Arial"/>
             </a:endParaRPr>
           </a:p>
@@ -9783,14 +11534,25 @@
       </p:sp>
     </p:spTree>
   </p:cSld>
+  <p:clrMapOvr>
+    <a:masterClrMapping/>
+  </p:clrMapOvr>
+  <mc:AlternateContent xmlns:mc="http://schemas.openxmlformats.org/markup-compatibility/2006">
+    <mc:Choice xmlns:p159="http://schemas.microsoft.com/office/powerpoint/2015/09/main" xmlns:p14="http://schemas.microsoft.com/office/powerpoint/2010/main" Requires="p159">
+      <p:transition p14:dur="500" advClick="1"/>
+    </mc:Choice>
+    <mc:Fallback>
+      <p:transition advClick="1"/>
+    </mc:Fallback>
+  </mc:AlternateContent>
 </p:sld>
 </file>
 
 <file path=ppt/slides/slide6.xml><?xml version="1.0" encoding="utf-8"?>
-<p:sld xmlns:a="http://schemas.openxmlformats.org/drawingml/2006/main" xmlns:p="http://schemas.openxmlformats.org/presentationml/2006/main" xmlns:r="http://schemas.openxmlformats.org/officeDocument/2006/relationships" xmlns:p14="http://schemas.microsoft.com/office/powerpoint/2010/main" xmlns:p15="http://schemas.microsoft.com/office/powerpoint/2012/main" xmlns:mc="http://schemas.openxmlformats.org/markup-compatibility/2006">
-  <p:cSld>
+<p:sld xmlns:a="http://schemas.openxmlformats.org/drawingml/2006/main" xmlns:r="http://schemas.openxmlformats.org/officeDocument/2006/relationships" xmlns:p="http://schemas.openxmlformats.org/presentationml/2006/main" xmlns:m="http://schemas.openxmlformats.org/officeDocument/2006/math" xmlns:w="http://schemas.openxmlformats.org/wordprocessingml/2006/main" xmlns:mc="http://schemas.openxmlformats.org/markup-compatibility/2006" showMasterPhAnim="0" showMasterSp="1" show="1">
+  <p:cSld name="">
     <p:bg>
-      <p:bgPr>
+      <p:bgPr shadeToTitle="0">
         <a:solidFill>
           <a:srgbClr val="FFFFFF"/>
         </a:solidFill>
@@ -9802,7 +11564,7 @@
         <p:cNvGrpSpPr/>
         <p:nvPr/>
       </p:nvGrpSpPr>
-      <p:grpSpPr>
+      <p:grpSpPr bwMode="auto">
         <a:xfrm>
           <a:off x="0" y="0"/>
           <a:ext cx="0" cy="0"/>
@@ -9812,11 +11574,11 @@
       </p:grpSpPr>
       <p:sp>
         <p:nvSpPr>
-          <p:cNvPr id="38" name=""/>
+          <p:cNvPr id="261956418" name=""/>
           <p:cNvSpPr/>
           <p:nvPr/>
         </p:nvSpPr>
-        <p:spPr>
+        <p:spPr bwMode="auto">
           <a:xfrm>
             <a:off x="1116000" y="549360"/>
             <a:ext cx="10166400" cy="1177920"/>
@@ -9868,17 +11630,16 @@
                 <a:tab pos="8983800" algn="l"/>
                 <a:tab pos="9410760" algn="l"/>
                 <a:tab pos="10134720" algn="l"/>
-                <a:tab pos="10333080" algn="l"/>
+                <a:tab pos="10333079" algn="l"/>
                 <a:tab pos="10782360" algn="l"/>
               </a:tabLst>
+              <a:defRPr/>
             </a:pPr>
             <a:r>
               <a:rPr lang="es-ES" sz="4000" b="1" u="none" strike="noStrike">
                 <a:solidFill>
                   <a:srgbClr val="000000"/>
                 </a:solidFill>
-                <a:effectLst/>
-                <a:uFillTx/>
                 <a:latin typeface="Neue Haas Grotesk Text Pro"/>
                 <a:ea typeface="DejaVu Sans"/>
               </a:rPr>
@@ -9889,8 +11650,6 @@
                 <a:solidFill>
                   <a:srgbClr val="000000"/>
                 </a:solidFill>
-                <a:effectLst/>
-                <a:uFillTx/>
                 <a:latin typeface="Neue Haas Grotesk Text Pro"/>
                 <a:ea typeface="DejaVu Sans"/>
               </a:rPr>
@@ -9900,8 +11659,6 @@
               <a:solidFill>
                 <a:srgbClr val="000000"/>
               </a:solidFill>
-              <a:effectLst/>
-              <a:uFillTx/>
               <a:latin typeface="Arial"/>
             </a:endParaRPr>
           </a:p>
@@ -9909,11 +11666,11 @@
       </p:sp>
       <p:sp>
         <p:nvSpPr>
-          <p:cNvPr id="39" name=""/>
+          <p:cNvPr id="589180206" name=""/>
           <p:cNvSpPr/>
           <p:nvPr/>
         </p:nvSpPr>
-        <p:spPr>
+        <p:spPr bwMode="auto">
           <a:xfrm>
             <a:off x="8540640" y="6356520"/>
             <a:ext cx="2741760" cy="363240"/>
@@ -9966,17 +11723,16 @@
                 <a:tab pos="8985240" algn="l"/>
                 <a:tab pos="9434520" algn="l"/>
                 <a:tab pos="9883800" algn="l"/>
-                <a:tab pos="10333080" algn="l"/>
+                <a:tab pos="10333079" algn="l"/>
                 <a:tab pos="10782360" algn="l"/>
               </a:tabLst>
+              <a:defRPr/>
             </a:pPr>
             <a:fld id="{AC0CCDBC-01F7-4FF8-A2D3-A16FC22C7290}" type="slidenum">
               <a:rPr lang="es-ES" sz="1200" b="0" u="none" strike="noStrike">
                 <a:solidFill>
                   <a:srgbClr val="8B8B8B"/>
                 </a:solidFill>
-                <a:effectLst/>
-                <a:uFillTx/>
                 <a:latin typeface="Neue Haas Grotesk Text Pro"/>
                 <a:ea typeface="DejaVu Sans"/>
               </a:rPr>
@@ -9986,8 +11742,6 @@
               <a:solidFill>
                 <a:srgbClr val="000000"/>
               </a:solidFill>
-              <a:effectLst/>
-              <a:uFillTx/>
               <a:latin typeface="Arial"/>
             </a:endParaRPr>
           </a:p>
@@ -9995,11 +11749,11 @@
       </p:sp>
       <p:sp>
         <p:nvSpPr>
-          <p:cNvPr id="40" name=""/>
+          <p:cNvPr id="661003863" name=""/>
           <p:cNvSpPr/>
           <p:nvPr/>
         </p:nvSpPr>
-        <p:spPr>
+        <p:spPr bwMode="auto">
           <a:xfrm>
             <a:off x="428760" y="2198520"/>
             <a:ext cx="11264760" cy="4479480"/>
@@ -10053,14 +11807,13 @@
                 <a:tab pos="10134720" algn="l"/>
                 <a:tab pos="10858680" algn="l"/>
               </a:tabLst>
+              <a:defRPr/>
             </a:pPr>
             <a:r>
               <a:rPr lang="es-ES" sz="1800" b="0" u="none" strike="noStrike">
                 <a:solidFill>
                   <a:srgbClr val="000000"/>
                 </a:solidFill>
-                <a:effectLst/>
-                <a:uFillTx/>
                 <a:latin typeface="Neue Haas Grotesk Text Pro"/>
                 <a:ea typeface="DejaVu Sans"/>
               </a:rPr>
@@ -10070,8 +11823,6 @@
               <a:solidFill>
                 <a:srgbClr val="000000"/>
               </a:solidFill>
-              <a:effectLst/>
-              <a:uFillTx/>
               <a:latin typeface="Arial"/>
             </a:endParaRPr>
           </a:p>
@@ -10106,13 +11857,12 @@
                 <a:tab pos="10134720" algn="l"/>
                 <a:tab pos="10858680" algn="l"/>
               </a:tabLst>
+              <a:defRPr/>
             </a:pPr>
             <a:endParaRPr lang="en-US" sz="1800" b="0" u="none" strike="noStrike">
               <a:solidFill>
                 <a:srgbClr val="000000"/>
               </a:solidFill>
-              <a:effectLst/>
-              <a:uFillTx/>
               <a:latin typeface="Arial"/>
             </a:endParaRPr>
           </a:p>
@@ -10147,14 +11897,13 @@
                 <a:tab pos="10134720" algn="l"/>
                 <a:tab pos="10858680" algn="l"/>
               </a:tabLst>
+              <a:defRPr/>
             </a:pPr>
             <a:r>
               <a:rPr lang="es-ES" sz="1800" b="0" u="none" strike="noStrike">
                 <a:solidFill>
                   <a:srgbClr val="000000"/>
                 </a:solidFill>
-                <a:effectLst/>
-                <a:uFillTx/>
                 <a:latin typeface="Neue Haas Grotesk Text Pro"/>
                 <a:ea typeface="DejaVu Sans"/>
               </a:rPr>
@@ -10164,8 +11913,6 @@
               <a:solidFill>
                 <a:srgbClr val="000000"/>
               </a:solidFill>
-              <a:effectLst/>
-              <a:uFillTx/>
               <a:latin typeface="Arial"/>
             </a:endParaRPr>
           </a:p>
@@ -10200,13 +11947,12 @@
                 <a:tab pos="10134720" algn="l"/>
                 <a:tab pos="10858680" algn="l"/>
               </a:tabLst>
+              <a:defRPr/>
             </a:pPr>
             <a:endParaRPr lang="en-US" sz="1500" b="0" u="none" strike="noStrike">
               <a:solidFill>
                 <a:srgbClr val="000000"/>
               </a:solidFill>
-              <a:effectLst/>
-              <a:uFillTx/>
               <a:latin typeface="Arial"/>
             </a:endParaRPr>
           </a:p>
@@ -10241,14 +11987,13 @@
                 <a:tab pos="10134720" algn="l"/>
                 <a:tab pos="10858680" algn="l"/>
               </a:tabLst>
+              <a:defRPr/>
             </a:pPr>
             <a:r>
               <a:rPr lang="es-ES" sz="1800" b="0" u="none" strike="noStrike">
                 <a:solidFill>
                   <a:srgbClr val="000000"/>
                 </a:solidFill>
-                <a:effectLst/>
-                <a:uFillTx/>
                 <a:latin typeface="Neue Haas Grotesk Text Pro"/>
                 <a:ea typeface="DejaVu Sans"/>
               </a:rPr>
@@ -10258,8 +12003,6 @@
               <a:solidFill>
                 <a:srgbClr val="000000"/>
               </a:solidFill>
-              <a:effectLst/>
-              <a:uFillTx/>
               <a:latin typeface="Arial"/>
             </a:endParaRPr>
           </a:p>
@@ -10294,13 +12037,12 @@
                 <a:tab pos="10134720" algn="l"/>
                 <a:tab pos="10858680" algn="l"/>
               </a:tabLst>
+              <a:defRPr/>
             </a:pPr>
             <a:endParaRPr lang="en-US" sz="1500" b="0" u="none" strike="noStrike">
               <a:solidFill>
                 <a:srgbClr val="000000"/>
               </a:solidFill>
-              <a:effectLst/>
-              <a:uFillTx/>
               <a:latin typeface="Arial"/>
             </a:endParaRPr>
           </a:p>
@@ -10335,14 +12077,13 @@
                 <a:tab pos="10134720" algn="l"/>
                 <a:tab pos="10858680" algn="l"/>
               </a:tabLst>
+              <a:defRPr/>
             </a:pPr>
             <a:r>
               <a:rPr lang="es-ES" sz="1800" b="0" u="none" strike="noStrike">
                 <a:solidFill>
                   <a:srgbClr val="000000"/>
                 </a:solidFill>
-                <a:effectLst/>
-                <a:uFillTx/>
                 <a:latin typeface="Neue Haas Grotesk Text Pro"/>
                 <a:ea typeface="DejaVu Sans"/>
               </a:rPr>
@@ -10352,8 +12093,6 @@
               <a:solidFill>
                 <a:srgbClr val="000000"/>
               </a:solidFill>
-              <a:effectLst/>
-              <a:uFillTx/>
               <a:latin typeface="Arial"/>
             </a:endParaRPr>
           </a:p>
@@ -10388,13 +12127,12 @@
                 <a:tab pos="10134720" algn="l"/>
                 <a:tab pos="10858680" algn="l"/>
               </a:tabLst>
+              <a:defRPr/>
             </a:pPr>
             <a:endParaRPr lang="en-US" sz="1500" b="0" u="none" strike="noStrike">
               <a:solidFill>
                 <a:srgbClr val="000000"/>
               </a:solidFill>
-              <a:effectLst/>
-              <a:uFillTx/>
               <a:latin typeface="Arial"/>
             </a:endParaRPr>
           </a:p>
@@ -10429,14 +12167,13 @@
                 <a:tab pos="10134720" algn="l"/>
                 <a:tab pos="10858680" algn="l"/>
               </a:tabLst>
+              <a:defRPr/>
             </a:pPr>
             <a:r>
               <a:rPr lang="es-ES" sz="1800" b="0" u="none" strike="noStrike">
                 <a:solidFill>
                   <a:srgbClr val="000000"/>
                 </a:solidFill>
-                <a:effectLst/>
-                <a:uFillTx/>
                 <a:latin typeface="Neue Haas Grotesk Text Pro"/>
                 <a:ea typeface="DejaVu Sans"/>
               </a:rPr>
@@ -10446,8 +12183,6 @@
               <a:solidFill>
                 <a:srgbClr val="000000"/>
               </a:solidFill>
-              <a:effectLst/>
-              <a:uFillTx/>
               <a:latin typeface="Arial"/>
             </a:endParaRPr>
           </a:p>
@@ -10482,13 +12217,12 @@
                 <a:tab pos="10134720" algn="l"/>
                 <a:tab pos="10858680" algn="l"/>
               </a:tabLst>
+              <a:defRPr/>
             </a:pPr>
             <a:endParaRPr lang="en-US" sz="1500" b="0" u="none" strike="noStrike">
               <a:solidFill>
                 <a:srgbClr val="000000"/>
               </a:solidFill>
-              <a:effectLst/>
-              <a:uFillTx/>
               <a:latin typeface="Arial"/>
             </a:endParaRPr>
           </a:p>
@@ -10523,14 +12257,13 @@
                 <a:tab pos="10134720" algn="l"/>
                 <a:tab pos="10858680" algn="l"/>
               </a:tabLst>
+              <a:defRPr/>
             </a:pPr>
             <a:r>
               <a:rPr lang="es-ES" sz="1800" b="0" u="none" strike="noStrike">
                 <a:solidFill>
                   <a:srgbClr val="000000"/>
                 </a:solidFill>
-                <a:effectLst/>
-                <a:uFillTx/>
                 <a:latin typeface="Neue Haas Grotesk Text Pro"/>
                 <a:ea typeface="DejaVu Sans"/>
               </a:rPr>
@@ -10540,8 +12273,6 @@
               <a:solidFill>
                 <a:srgbClr val="000000"/>
               </a:solidFill>
-              <a:effectLst/>
-              <a:uFillTx/>
               <a:latin typeface="Arial"/>
             </a:endParaRPr>
           </a:p>
@@ -10576,13 +12307,12 @@
                 <a:tab pos="10134720" algn="l"/>
                 <a:tab pos="10858680" algn="l"/>
               </a:tabLst>
+              <a:defRPr/>
             </a:pPr>
             <a:endParaRPr lang="en-US" sz="1500" b="0" u="none" strike="noStrike">
               <a:solidFill>
                 <a:srgbClr val="000000"/>
               </a:solidFill>
-              <a:effectLst/>
-              <a:uFillTx/>
               <a:latin typeface="Arial"/>
             </a:endParaRPr>
           </a:p>
@@ -10617,14 +12347,13 @@
                 <a:tab pos="10134720" algn="l"/>
                 <a:tab pos="10858680" algn="l"/>
               </a:tabLst>
+              <a:defRPr/>
             </a:pPr>
             <a:r>
               <a:rPr lang="es-ES" sz="1800" b="0" u="none" strike="noStrike">
                 <a:solidFill>
                   <a:srgbClr val="000000"/>
                 </a:solidFill>
-                <a:effectLst/>
-                <a:uFillTx/>
                 <a:latin typeface="Neue Haas Grotesk Text Pro"/>
                 <a:ea typeface="DejaVu Sans"/>
               </a:rPr>
@@ -10634,8 +12363,6 @@
               <a:solidFill>
                 <a:srgbClr val="000000"/>
               </a:solidFill>
-              <a:effectLst/>
-              <a:uFillTx/>
               <a:latin typeface="Arial"/>
             </a:endParaRPr>
           </a:p>
@@ -10670,13 +12397,12 @@
                 <a:tab pos="10134720" algn="l"/>
                 <a:tab pos="10858680" algn="l"/>
               </a:tabLst>
+              <a:defRPr/>
             </a:pPr>
             <a:endParaRPr lang="en-US" sz="1500" b="0" u="none" strike="noStrike">
               <a:solidFill>
                 <a:srgbClr val="000000"/>
               </a:solidFill>
-              <a:effectLst/>
-              <a:uFillTx/>
               <a:latin typeface="Arial"/>
             </a:endParaRPr>
           </a:p>
@@ -10711,14 +12437,13 @@
                 <a:tab pos="10134720" algn="l"/>
                 <a:tab pos="10858680" algn="l"/>
               </a:tabLst>
+              <a:defRPr/>
             </a:pPr>
             <a:r>
               <a:rPr lang="es-ES" sz="1800" b="0" u="none" strike="noStrike">
                 <a:solidFill>
                   <a:srgbClr val="000000"/>
                 </a:solidFill>
-                <a:effectLst/>
-                <a:uFillTx/>
                 <a:latin typeface="Neue Haas Grotesk Text Pro"/>
                 <a:ea typeface="DejaVu Sans"/>
               </a:rPr>
@@ -10728,8 +12453,6 @@
               <a:solidFill>
                 <a:srgbClr val="000000"/>
               </a:solidFill>
-              <a:effectLst/>
-              <a:uFillTx/>
               <a:latin typeface="Arial"/>
             </a:endParaRPr>
           </a:p>
@@ -10737,14 +12460,25 @@
       </p:sp>
     </p:spTree>
   </p:cSld>
+  <p:clrMapOvr>
+    <a:masterClrMapping/>
+  </p:clrMapOvr>
+  <mc:AlternateContent xmlns:mc="http://schemas.openxmlformats.org/markup-compatibility/2006">
+    <mc:Choice xmlns:p159="http://schemas.microsoft.com/office/powerpoint/2015/09/main" xmlns:p14="http://schemas.microsoft.com/office/powerpoint/2010/main" Requires="p159">
+      <p:transition p14:dur="500" advClick="1"/>
+    </mc:Choice>
+    <mc:Fallback>
+      <p:transition advClick="1"/>
+    </mc:Fallback>
+  </mc:AlternateContent>
 </p:sld>
 </file>
 
 <file path=ppt/slides/slide7.xml><?xml version="1.0" encoding="utf-8"?>
-<p:sld xmlns:a="http://schemas.openxmlformats.org/drawingml/2006/main" xmlns:p="http://schemas.openxmlformats.org/presentationml/2006/main" xmlns:r="http://schemas.openxmlformats.org/officeDocument/2006/relationships" xmlns:p14="http://schemas.microsoft.com/office/powerpoint/2010/main" xmlns:p15="http://schemas.microsoft.com/office/powerpoint/2012/main" xmlns:mc="http://schemas.openxmlformats.org/markup-compatibility/2006">
-  <p:cSld>
+<p:sld xmlns:a="http://schemas.openxmlformats.org/drawingml/2006/main" xmlns:r="http://schemas.openxmlformats.org/officeDocument/2006/relationships" xmlns:p="http://schemas.openxmlformats.org/presentationml/2006/main" xmlns:m="http://schemas.openxmlformats.org/officeDocument/2006/math" xmlns:w="http://schemas.openxmlformats.org/wordprocessingml/2006/main" xmlns:mc="http://schemas.openxmlformats.org/markup-compatibility/2006" showMasterPhAnim="0" showMasterSp="1" show="1">
+  <p:cSld name="">
     <p:bg>
-      <p:bgPr>
+      <p:bgPr shadeToTitle="0">
         <a:solidFill>
           <a:srgbClr val="FFFFFF"/>
         </a:solidFill>
@@ -10756,7 +12490,7 @@
         <p:cNvGrpSpPr/>
         <p:nvPr/>
       </p:nvGrpSpPr>
-      <p:grpSpPr>
+      <p:grpSpPr bwMode="auto">
         <a:xfrm>
           <a:off x="0" y="0"/>
           <a:ext cx="0" cy="0"/>
@@ -10766,11 +12500,11 @@
       </p:grpSpPr>
       <p:sp>
         <p:nvSpPr>
-          <p:cNvPr id="41" name=""/>
+          <p:cNvPr id="208510312" name=""/>
           <p:cNvSpPr/>
           <p:nvPr/>
         </p:nvSpPr>
-        <p:spPr>
+        <p:spPr bwMode="auto">
           <a:xfrm>
             <a:off x="1116000" y="549360"/>
             <a:ext cx="10166400" cy="1177920"/>
@@ -10822,17 +12556,16 @@
                 <a:tab pos="8983800" algn="l"/>
                 <a:tab pos="9410760" algn="l"/>
                 <a:tab pos="10134720" algn="l"/>
-                <a:tab pos="10333080" algn="l"/>
+                <a:tab pos="10333079" algn="l"/>
                 <a:tab pos="10782360" algn="l"/>
               </a:tabLst>
+              <a:defRPr/>
             </a:pPr>
             <a:r>
               <a:rPr lang="es-ES" sz="4000" b="1" u="none" strike="noStrike">
                 <a:solidFill>
                   <a:srgbClr val="000000"/>
                 </a:solidFill>
-                <a:effectLst/>
-                <a:uFillTx/>
                 <a:latin typeface="Neue Haas Grotesk Text Pro"/>
                 <a:ea typeface="DejaVu Sans"/>
               </a:rPr>
@@ -10842,8 +12575,6 @@
               <a:solidFill>
                 <a:srgbClr val="000000"/>
               </a:solidFill>
-              <a:effectLst/>
-              <a:uFillTx/>
               <a:latin typeface="Arial"/>
             </a:endParaRPr>
           </a:p>
@@ -10851,11 +12582,11 @@
       </p:sp>
       <p:sp>
         <p:nvSpPr>
-          <p:cNvPr id="42" name=""/>
+          <p:cNvPr id="979957656" name=""/>
           <p:cNvSpPr/>
           <p:nvPr/>
         </p:nvSpPr>
-        <p:spPr>
+        <p:spPr bwMode="auto">
           <a:xfrm>
             <a:off x="8540640" y="6356520"/>
             <a:ext cx="2741760" cy="363240"/>
@@ -10908,17 +12639,16 @@
                 <a:tab pos="8985240" algn="l"/>
                 <a:tab pos="9434520" algn="l"/>
                 <a:tab pos="9883800" algn="l"/>
-                <a:tab pos="10333080" algn="l"/>
+                <a:tab pos="10333079" algn="l"/>
                 <a:tab pos="10782360" algn="l"/>
               </a:tabLst>
+              <a:defRPr/>
             </a:pPr>
             <a:fld id="{A20A23C1-EE4B-4D33-827A-2425538B7055}" type="slidenum">
               <a:rPr lang="es-ES" sz="1200" b="0" u="none" strike="noStrike">
                 <a:solidFill>
                   <a:srgbClr val="8B8B8B"/>
                 </a:solidFill>
-                <a:effectLst/>
-                <a:uFillTx/>
                 <a:latin typeface="Neue Haas Grotesk Text Pro"/>
                 <a:ea typeface="DejaVu Sans"/>
               </a:rPr>
@@ -10928,8 +12658,6 @@
               <a:solidFill>
                 <a:srgbClr val="000000"/>
               </a:solidFill>
-              <a:effectLst/>
-              <a:uFillTx/>
               <a:latin typeface="Arial"/>
             </a:endParaRPr>
           </a:p>
@@ -10937,11 +12665,11 @@
       </p:sp>
       <p:sp>
         <p:nvSpPr>
-          <p:cNvPr id="43" name=""/>
+          <p:cNvPr id="2010165482" name=""/>
           <p:cNvSpPr/>
           <p:nvPr/>
         </p:nvSpPr>
-        <p:spPr>
+        <p:spPr bwMode="auto">
           <a:xfrm>
             <a:off x="428760" y="2198520"/>
             <a:ext cx="11264760" cy="4068000"/>
@@ -10995,14 +12723,13 @@
                 <a:tab pos="10134720" algn="l"/>
                 <a:tab pos="10858680" algn="l"/>
               </a:tabLst>
+              <a:defRPr/>
             </a:pPr>
             <a:r>
               <a:rPr lang="es-ES" sz="1800" b="0" u="none" strike="noStrike">
                 <a:solidFill>
                   <a:srgbClr val="000000"/>
                 </a:solidFill>
-                <a:effectLst/>
-                <a:uFillTx/>
                 <a:latin typeface="Neue Haas Grotesk Text Pro"/>
                 <a:ea typeface="DejaVu Sans"/>
               </a:rPr>
@@ -11012,8 +12739,6 @@
               <a:solidFill>
                 <a:srgbClr val="000000"/>
               </a:solidFill>
-              <a:effectLst/>
-              <a:uFillTx/>
               <a:latin typeface="Arial"/>
             </a:endParaRPr>
           </a:p>
@@ -11048,14 +12773,13 @@
                 <a:tab pos="10134720" algn="l"/>
                 <a:tab pos="10858680" algn="l"/>
               </a:tabLst>
+              <a:defRPr/>
             </a:pPr>
             <a:r>
               <a:rPr lang="es-ES" sz="1500" b="0" u="none" strike="noStrike">
                 <a:solidFill>
                   <a:srgbClr val="000000"/>
                 </a:solidFill>
-                <a:effectLst/>
-                <a:uFillTx/>
                 <a:latin typeface="Neue Haas Grotesk Text Pro"/>
                 <a:ea typeface="DejaVu Sans"/>
               </a:rPr>
@@ -11066,8 +12790,6 @@
                 <a:solidFill>
                   <a:srgbClr val="000000"/>
                 </a:solidFill>
-                <a:effectLst/>
-                <a:uFillTx/>
                 <a:latin typeface="Neue Haas Grotesk Text Pro"/>
                 <a:ea typeface="DejaVu Sans"/>
               </a:rPr>
@@ -11077,8 +12799,6 @@
               <a:solidFill>
                 <a:srgbClr val="000000"/>
               </a:solidFill>
-              <a:effectLst/>
-              <a:uFillTx/>
               <a:latin typeface="Arial"/>
             </a:endParaRPr>
           </a:p>
@@ -11113,14 +12833,13 @@
                 <a:tab pos="10134720" algn="l"/>
                 <a:tab pos="10858680" algn="l"/>
               </a:tabLst>
+              <a:defRPr/>
             </a:pPr>
             <a:r>
               <a:rPr lang="es-ES" sz="1500" b="0" u="none" strike="noStrike">
                 <a:solidFill>
                   <a:srgbClr val="000000"/>
                 </a:solidFill>
-                <a:effectLst/>
-                <a:uFillTx/>
                 <a:latin typeface="Neue Haas Grotesk Text Pro"/>
                 <a:ea typeface="DejaVu Sans"/>
               </a:rPr>
@@ -11130,8 +12849,6 @@
               <a:solidFill>
                 <a:srgbClr val="000000"/>
               </a:solidFill>
-              <a:effectLst/>
-              <a:uFillTx/>
               <a:latin typeface="Arial"/>
             </a:endParaRPr>
           </a:p>
@@ -11166,14 +12883,13 @@
                 <a:tab pos="10134720" algn="l"/>
                 <a:tab pos="10858680" algn="l"/>
               </a:tabLst>
+              <a:defRPr/>
             </a:pPr>
             <a:r>
               <a:rPr lang="es-ES" sz="1800" b="0" u="none" strike="noStrike">
                 <a:solidFill>
                   <a:srgbClr val="000000"/>
                 </a:solidFill>
-                <a:effectLst/>
-                <a:uFillTx/>
                 <a:latin typeface="Neue Haas Grotesk Text Pro"/>
                 <a:ea typeface="DejaVu Sans"/>
               </a:rPr>
@@ -11184,8 +12900,6 @@
                 <a:solidFill>
                   <a:srgbClr val="000000"/>
                 </a:solidFill>
-                <a:effectLst/>
-                <a:uFillTx/>
                 <a:latin typeface="Neue Haas Grotesk Text Pro"/>
                 <a:ea typeface="DejaVu Sans"/>
               </a:rPr>
@@ -11196,8 +12910,6 @@
                 <a:solidFill>
                   <a:srgbClr val="000000"/>
                 </a:solidFill>
-                <a:effectLst/>
-                <a:uFillTx/>
                 <a:latin typeface="Neue Haas Grotesk Text Pro"/>
                 <a:ea typeface="DejaVu Sans"/>
               </a:rPr>
@@ -11208,8 +12920,6 @@
                 <a:solidFill>
                   <a:srgbClr val="000000"/>
                 </a:solidFill>
-                <a:effectLst/>
-                <a:uFillTx/>
                 <a:latin typeface="Neue Haas Grotesk Text Pro"/>
                 <a:ea typeface="DejaVu Sans"/>
               </a:rPr>
@@ -11219,8 +12929,6 @@
               <a:solidFill>
                 <a:srgbClr val="000000"/>
               </a:solidFill>
-              <a:effectLst/>
-              <a:uFillTx/>
               <a:latin typeface="Arial"/>
             </a:endParaRPr>
           </a:p>
@@ -11255,14 +12963,13 @@
                 <a:tab pos="10134720" algn="l"/>
                 <a:tab pos="10858680" algn="l"/>
               </a:tabLst>
+              <a:defRPr/>
             </a:pPr>
             <a:r>
               <a:rPr lang="es-ES" sz="1500" b="0" u="none" strike="noStrike">
                 <a:solidFill>
                   <a:srgbClr val="000000"/>
                 </a:solidFill>
-                <a:effectLst/>
-                <a:uFillTx/>
                 <a:latin typeface="Neue Haas Grotesk Text Pro"/>
                 <a:ea typeface="DejaVu Sans"/>
               </a:rPr>
@@ -11272,8 +12979,6 @@
               <a:solidFill>
                 <a:srgbClr val="000000"/>
               </a:solidFill>
-              <a:effectLst/>
-              <a:uFillTx/>
               <a:latin typeface="Arial"/>
             </a:endParaRPr>
           </a:p>
@@ -11308,14 +13013,13 @@
                 <a:tab pos="10134720" algn="l"/>
                 <a:tab pos="10858680" algn="l"/>
               </a:tabLst>
+              <a:defRPr/>
             </a:pPr>
             <a:r>
               <a:rPr lang="es-ES" sz="1500" b="0" u="none" strike="noStrike">
                 <a:solidFill>
                   <a:srgbClr val="000000"/>
                 </a:solidFill>
-                <a:effectLst/>
-                <a:uFillTx/>
                 <a:latin typeface="Neue Haas Grotesk Text Pro"/>
                 <a:ea typeface="DejaVu Sans"/>
               </a:rPr>
@@ -11326,8 +13030,6 @@
                 <a:solidFill>
                   <a:srgbClr val="000000"/>
                 </a:solidFill>
-                <a:effectLst/>
-                <a:uFillTx/>
                 <a:latin typeface="Neue Haas Grotesk Text Pro"/>
                 <a:ea typeface="DejaVu Sans"/>
               </a:rPr>
@@ -11338,8 +13040,6 @@
                 <a:solidFill>
                   <a:srgbClr val="000000"/>
                 </a:solidFill>
-                <a:effectLst/>
-                <a:uFillTx/>
                 <a:latin typeface="Neue Haas Grotesk Text Pro"/>
                 <a:ea typeface="DejaVu Sans"/>
               </a:rPr>
@@ -11350,8 +13050,6 @@
                 <a:solidFill>
                   <a:srgbClr val="000000"/>
                 </a:solidFill>
-                <a:effectLst/>
-                <a:uFillTx/>
                 <a:latin typeface="Neue Haas Grotesk Text Pro"/>
                 <a:ea typeface="DejaVu Sans"/>
               </a:rPr>
@@ -11362,8 +13060,6 @@
                 <a:solidFill>
                   <a:srgbClr val="000000"/>
                 </a:solidFill>
-                <a:effectLst/>
-                <a:uFillTx/>
                 <a:latin typeface="Neue Haas Grotesk Text Pro"/>
                 <a:ea typeface="DejaVu Sans"/>
               </a:rPr>
@@ -11373,8 +13069,6 @@
               <a:solidFill>
                 <a:srgbClr val="000000"/>
               </a:solidFill>
-              <a:effectLst/>
-              <a:uFillTx/>
               <a:latin typeface="Arial"/>
             </a:endParaRPr>
           </a:p>
@@ -11409,13 +13103,12 @@
                 <a:tab pos="10134720" algn="l"/>
                 <a:tab pos="10858680" algn="l"/>
               </a:tabLst>
+              <a:defRPr/>
             </a:pPr>
             <a:endParaRPr lang="en-US" sz="1800" b="0" u="none" strike="noStrike">
               <a:solidFill>
                 <a:srgbClr val="000000"/>
               </a:solidFill>
-              <a:effectLst/>
-              <a:uFillTx/>
               <a:latin typeface="Arial"/>
             </a:endParaRPr>
           </a:p>
@@ -11450,14 +13143,13 @@
                 <a:tab pos="10134720" algn="l"/>
                 <a:tab pos="10858680" algn="l"/>
               </a:tabLst>
+              <a:defRPr/>
             </a:pPr>
             <a:r>
               <a:rPr lang="es-ES" sz="1800" b="0" u="none" strike="noStrike">
                 <a:solidFill>
                   <a:srgbClr val="000000"/>
                 </a:solidFill>
-                <a:effectLst/>
-                <a:uFillTx/>
                 <a:latin typeface="Neue Haas Grotesk Text Pro"/>
                 <a:ea typeface="DejaVu Sans"/>
               </a:rPr>
@@ -11467,8 +13159,6 @@
               <a:solidFill>
                 <a:srgbClr val="000000"/>
               </a:solidFill>
-              <a:effectLst/>
-              <a:uFillTx/>
               <a:latin typeface="Arial"/>
             </a:endParaRPr>
           </a:p>
@@ -11503,14 +13193,13 @@
                 <a:tab pos="10134720" algn="l"/>
                 <a:tab pos="10858680" algn="l"/>
               </a:tabLst>
+              <a:defRPr/>
             </a:pPr>
             <a:r>
               <a:rPr lang="es-ES" sz="1500" b="0" u="none" strike="noStrike">
                 <a:solidFill>
                   <a:srgbClr val="000000"/>
                 </a:solidFill>
-                <a:effectLst/>
-                <a:uFillTx/>
                 <a:latin typeface="Neue Haas Grotesk Text Pro"/>
                 <a:ea typeface="DejaVu Sans"/>
               </a:rPr>
@@ -11521,8 +13210,6 @@
                 <a:solidFill>
                   <a:srgbClr val="000000"/>
                 </a:solidFill>
-                <a:effectLst/>
-                <a:uFillTx/>
                 <a:latin typeface="Neue Haas Grotesk Text Pro"/>
                 <a:ea typeface="DejaVu Sans"/>
               </a:rPr>
@@ -11532,8 +13219,6 @@
               <a:solidFill>
                 <a:srgbClr val="000000"/>
               </a:solidFill>
-              <a:effectLst/>
-              <a:uFillTx/>
               <a:latin typeface="Arial"/>
             </a:endParaRPr>
           </a:p>
@@ -11568,14 +13253,13 @@
                 <a:tab pos="10134720" algn="l"/>
                 <a:tab pos="10858680" algn="l"/>
               </a:tabLst>
+              <a:defRPr/>
             </a:pPr>
             <a:r>
               <a:rPr lang="es-ES" sz="1500" b="0" u="none" strike="noStrike">
                 <a:solidFill>
                   <a:srgbClr val="000000"/>
                 </a:solidFill>
-                <a:effectLst/>
-                <a:uFillTx/>
                 <a:latin typeface="Neue Haas Grotesk Text Pro"/>
                 <a:ea typeface="DejaVu Sans"/>
               </a:rPr>
@@ -11585,8 +13269,6 @@
               <a:solidFill>
                 <a:srgbClr val="000000"/>
               </a:solidFill>
-              <a:effectLst/>
-              <a:uFillTx/>
               <a:latin typeface="Arial"/>
             </a:endParaRPr>
           </a:p>
@@ -11621,14 +13303,13 @@
                 <a:tab pos="10134720" algn="l"/>
                 <a:tab pos="10858680" algn="l"/>
               </a:tabLst>
+              <a:defRPr/>
             </a:pPr>
             <a:r>
               <a:rPr lang="es-ES" sz="1800" b="0" u="none" strike="noStrike">
                 <a:solidFill>
                   <a:srgbClr val="000000"/>
                 </a:solidFill>
-                <a:effectLst/>
-                <a:uFillTx/>
                 <a:latin typeface="Neue Haas Grotesk Text Pro"/>
                 <a:ea typeface="DejaVu Sans"/>
               </a:rPr>
@@ -11639,8 +13320,6 @@
                 <a:solidFill>
                   <a:srgbClr val="000000"/>
                 </a:solidFill>
-                <a:effectLst/>
-                <a:uFillTx/>
                 <a:latin typeface="Neue Haas Grotesk Text Pro"/>
                 <a:ea typeface="DejaVu Sans"/>
               </a:rPr>
@@ -11651,8 +13330,6 @@
                 <a:solidFill>
                   <a:srgbClr val="000000"/>
                 </a:solidFill>
-                <a:effectLst/>
-                <a:uFillTx/>
                 <a:latin typeface="Neue Haas Grotesk Text Pro"/>
                 <a:ea typeface="DejaVu Sans"/>
               </a:rPr>
@@ -11663,8 +13340,6 @@
                 <a:solidFill>
                   <a:srgbClr val="000000"/>
                 </a:solidFill>
-                <a:effectLst/>
-                <a:uFillTx/>
                 <a:latin typeface="Neue Haas Grotesk Text Pro"/>
                 <a:ea typeface="DejaVu Sans"/>
               </a:rPr>
@@ -11675,8 +13350,6 @@
                 <a:solidFill>
                   <a:srgbClr val="000000"/>
                 </a:solidFill>
-                <a:effectLst/>
-                <a:uFillTx/>
                 <a:latin typeface="Neue Haas Grotesk Text Pro"/>
                 <a:ea typeface="DejaVu Sans"/>
               </a:rPr>
@@ -11686,8 +13359,6 @@
               <a:solidFill>
                 <a:srgbClr val="000000"/>
               </a:solidFill>
-              <a:effectLst/>
-              <a:uFillTx/>
               <a:latin typeface="Arial"/>
             </a:endParaRPr>
           </a:p>
@@ -11695,14 +13366,25 @@
       </p:sp>
     </p:spTree>
   </p:cSld>
+  <p:clrMapOvr>
+    <a:masterClrMapping/>
+  </p:clrMapOvr>
+  <mc:AlternateContent xmlns:mc="http://schemas.openxmlformats.org/markup-compatibility/2006">
+    <mc:Choice xmlns:p159="http://schemas.microsoft.com/office/powerpoint/2015/09/main" xmlns:p14="http://schemas.microsoft.com/office/powerpoint/2010/main" Requires="p159">
+      <p:transition p14:dur="500" advClick="1"/>
+    </mc:Choice>
+    <mc:Fallback>
+      <p:transition advClick="1"/>
+    </mc:Fallback>
+  </mc:AlternateContent>
 </p:sld>
 </file>
 
 <file path=ppt/slides/slide8.xml><?xml version="1.0" encoding="utf-8"?>
-<p:sld xmlns:a="http://schemas.openxmlformats.org/drawingml/2006/main" xmlns:p="http://schemas.openxmlformats.org/presentationml/2006/main" xmlns:r="http://schemas.openxmlformats.org/officeDocument/2006/relationships" xmlns:p14="http://schemas.microsoft.com/office/powerpoint/2010/main" xmlns:p15="http://schemas.microsoft.com/office/powerpoint/2012/main" xmlns:mc="http://schemas.openxmlformats.org/markup-compatibility/2006">
-  <p:cSld>
+<p:sld xmlns:a="http://schemas.openxmlformats.org/drawingml/2006/main" xmlns:r="http://schemas.openxmlformats.org/officeDocument/2006/relationships" xmlns:p="http://schemas.openxmlformats.org/presentationml/2006/main" xmlns:m="http://schemas.openxmlformats.org/officeDocument/2006/math" xmlns:w="http://schemas.openxmlformats.org/wordprocessingml/2006/main" xmlns:mc="http://schemas.openxmlformats.org/markup-compatibility/2006" showMasterPhAnim="0" showMasterSp="1" show="1">
+  <p:cSld name="">
     <p:bg>
-      <p:bgPr>
+      <p:bgPr shadeToTitle="0">
         <a:solidFill>
           <a:srgbClr val="FFFFFF"/>
         </a:solidFill>
@@ -11714,7 +13396,7 @@
         <p:cNvGrpSpPr/>
         <p:nvPr/>
       </p:nvGrpSpPr>
-      <p:grpSpPr>
+      <p:grpSpPr bwMode="auto">
         <a:xfrm>
           <a:off x="0" y="0"/>
           <a:ext cx="0" cy="0"/>
@@ -11724,11 +13406,11 @@
       </p:grpSpPr>
       <p:sp>
         <p:nvSpPr>
-          <p:cNvPr id="44" name=""/>
+          <p:cNvPr id="1939101974" name=""/>
           <p:cNvSpPr/>
           <p:nvPr/>
         </p:nvSpPr>
-        <p:spPr>
+        <p:spPr bwMode="auto">
           <a:xfrm>
             <a:off x="1116000" y="549360"/>
             <a:ext cx="10166400" cy="1177920"/>
@@ -11780,17 +13462,16 @@
                 <a:tab pos="8983800" algn="l"/>
                 <a:tab pos="9410760" algn="l"/>
                 <a:tab pos="10134720" algn="l"/>
-                <a:tab pos="10333080" algn="l"/>
+                <a:tab pos="10333079" algn="l"/>
                 <a:tab pos="10782360" algn="l"/>
               </a:tabLst>
+              <a:defRPr/>
             </a:pPr>
             <a:r>
               <a:rPr lang="es-ES" sz="4000" b="1" u="none" strike="noStrike">
                 <a:solidFill>
                   <a:srgbClr val="000000"/>
                 </a:solidFill>
-                <a:effectLst/>
-                <a:uFillTx/>
                 <a:latin typeface="Neue Haas Grotesk Text Pro"/>
                 <a:ea typeface="DejaVu Sans"/>
               </a:rPr>
@@ -11800,8 +13481,6 @@
               <a:solidFill>
                 <a:srgbClr val="000000"/>
               </a:solidFill>
-              <a:effectLst/>
-              <a:uFillTx/>
               <a:latin typeface="Arial"/>
             </a:endParaRPr>
           </a:p>
@@ -11809,11 +13488,11 @@
       </p:sp>
       <p:sp>
         <p:nvSpPr>
-          <p:cNvPr id="45" name=""/>
+          <p:cNvPr id="1047202020" name=""/>
           <p:cNvSpPr/>
           <p:nvPr/>
         </p:nvSpPr>
-        <p:spPr>
+        <p:spPr bwMode="auto">
           <a:xfrm>
             <a:off x="8540640" y="6356520"/>
             <a:ext cx="2741760" cy="363240"/>
@@ -11866,17 +13545,16 @@
                 <a:tab pos="8985240" algn="l"/>
                 <a:tab pos="9434520" algn="l"/>
                 <a:tab pos="9883800" algn="l"/>
-                <a:tab pos="10333080" algn="l"/>
+                <a:tab pos="10333079" algn="l"/>
                 <a:tab pos="10782360" algn="l"/>
               </a:tabLst>
+              <a:defRPr/>
             </a:pPr>
             <a:fld id="{68F4B938-4267-4F10-8070-5A2E0CC733F3}" type="slidenum">
               <a:rPr lang="es-ES" sz="1200" b="0" u="none" strike="noStrike">
                 <a:solidFill>
                   <a:srgbClr val="8B8B8B"/>
                 </a:solidFill>
-                <a:effectLst/>
-                <a:uFillTx/>
                 <a:latin typeface="Neue Haas Grotesk Text Pro"/>
                 <a:ea typeface="DejaVu Sans"/>
               </a:rPr>
@@ -11886,8 +13564,6 @@
               <a:solidFill>
                 <a:srgbClr val="000000"/>
               </a:solidFill>
-              <a:effectLst/>
-              <a:uFillTx/>
               <a:latin typeface="Arial"/>
             </a:endParaRPr>
           </a:p>
@@ -11895,11 +13571,11 @@
       </p:sp>
       <p:sp>
         <p:nvSpPr>
-          <p:cNvPr id="46" name=""/>
+          <p:cNvPr id="1270386564" name=""/>
           <p:cNvSpPr/>
           <p:nvPr/>
         </p:nvSpPr>
-        <p:spPr>
+        <p:spPr bwMode="auto">
           <a:xfrm>
             <a:off x="428760" y="2198520"/>
             <a:ext cx="11264760" cy="4479480"/>
@@ -11953,14 +13629,13 @@
                 <a:tab pos="10134720" algn="l"/>
                 <a:tab pos="10858680" algn="l"/>
               </a:tabLst>
+              <a:defRPr/>
             </a:pPr>
             <a:r>
               <a:rPr lang="es-ES" sz="1800" b="0" u="none" strike="noStrike">
                 <a:solidFill>
                   <a:srgbClr val="000000"/>
                 </a:solidFill>
-                <a:effectLst/>
-                <a:uFillTx/>
                 <a:latin typeface="Neue Haas Grotesk Text Pro"/>
                 <a:ea typeface="DejaVu Sans"/>
               </a:rPr>
@@ -11970,8 +13645,6 @@
               <a:solidFill>
                 <a:srgbClr val="000000"/>
               </a:solidFill>
-              <a:effectLst/>
-              <a:uFillTx/>
               <a:latin typeface="Arial"/>
             </a:endParaRPr>
           </a:p>
@@ -12006,13 +13679,12 @@
                 <a:tab pos="10134720" algn="l"/>
                 <a:tab pos="10858680" algn="l"/>
               </a:tabLst>
+              <a:defRPr/>
             </a:pPr>
             <a:endParaRPr lang="en-US" sz="1800" b="0" u="none" strike="noStrike">
               <a:solidFill>
                 <a:srgbClr val="000000"/>
               </a:solidFill>
-              <a:effectLst/>
-              <a:uFillTx/>
               <a:latin typeface="Arial"/>
             </a:endParaRPr>
           </a:p>
@@ -12047,14 +13719,13 @@
                 <a:tab pos="10134720" algn="l"/>
                 <a:tab pos="10858680" algn="l"/>
               </a:tabLst>
+              <a:defRPr/>
             </a:pPr>
             <a:r>
               <a:rPr lang="es-ES" sz="1800" b="0" u="none" strike="noStrike">
                 <a:solidFill>
                   <a:srgbClr val="000000"/>
                 </a:solidFill>
-                <a:effectLst/>
-                <a:uFillTx/>
                 <a:latin typeface="Neue Haas Grotesk Text Pro"/>
                 <a:ea typeface="DejaVu Sans"/>
               </a:rPr>
@@ -12064,8 +13735,6 @@
               <a:solidFill>
                 <a:srgbClr val="000000"/>
               </a:solidFill>
-              <a:effectLst/>
-              <a:uFillTx/>
               <a:latin typeface="Arial"/>
             </a:endParaRPr>
           </a:p>
@@ -12100,13 +13769,12 @@
                 <a:tab pos="10134720" algn="l"/>
                 <a:tab pos="10858680" algn="l"/>
               </a:tabLst>
+              <a:defRPr/>
             </a:pPr>
             <a:endParaRPr lang="en-US" sz="1500" b="0" u="none" strike="noStrike">
               <a:solidFill>
                 <a:srgbClr val="000000"/>
               </a:solidFill>
-              <a:effectLst/>
-              <a:uFillTx/>
               <a:latin typeface="Arial"/>
             </a:endParaRPr>
           </a:p>
@@ -12141,14 +13809,13 @@
                 <a:tab pos="10134720" algn="l"/>
                 <a:tab pos="10858680" algn="l"/>
               </a:tabLst>
+              <a:defRPr/>
             </a:pPr>
             <a:r>
               <a:rPr lang="es-ES" sz="1800" b="0" u="none" strike="noStrike">
                 <a:solidFill>
                   <a:srgbClr val="000000"/>
                 </a:solidFill>
-                <a:effectLst/>
-                <a:uFillTx/>
                 <a:latin typeface="Neue Haas Grotesk Text Pro"/>
                 <a:ea typeface="DejaVu Sans"/>
               </a:rPr>
@@ -12158,8 +13825,6 @@
               <a:solidFill>
                 <a:srgbClr val="000000"/>
               </a:solidFill>
-              <a:effectLst/>
-              <a:uFillTx/>
               <a:latin typeface="Arial"/>
             </a:endParaRPr>
           </a:p>
@@ -12194,13 +13859,12 @@
                 <a:tab pos="10134720" algn="l"/>
                 <a:tab pos="10858680" algn="l"/>
               </a:tabLst>
+              <a:defRPr/>
             </a:pPr>
             <a:endParaRPr lang="en-US" sz="1500" b="0" u="none" strike="noStrike">
               <a:solidFill>
                 <a:srgbClr val="000000"/>
               </a:solidFill>
-              <a:effectLst/>
-              <a:uFillTx/>
               <a:latin typeface="Arial"/>
             </a:endParaRPr>
           </a:p>
@@ -12235,14 +13899,13 @@
                 <a:tab pos="10134720" algn="l"/>
                 <a:tab pos="10858680" algn="l"/>
               </a:tabLst>
+              <a:defRPr/>
             </a:pPr>
             <a:r>
               <a:rPr lang="es-ES" sz="1800" b="0" u="none" strike="noStrike">
                 <a:solidFill>
                   <a:srgbClr val="000000"/>
                 </a:solidFill>
-                <a:effectLst/>
-                <a:uFillTx/>
                 <a:latin typeface="Neue Haas Grotesk Text Pro"/>
                 <a:ea typeface="DejaVu Sans"/>
               </a:rPr>
@@ -12252,8 +13915,6 @@
               <a:solidFill>
                 <a:srgbClr val="000000"/>
               </a:solidFill>
-              <a:effectLst/>
-              <a:uFillTx/>
               <a:latin typeface="Arial"/>
             </a:endParaRPr>
           </a:p>
@@ -12288,13 +13949,12 @@
                 <a:tab pos="10134720" algn="l"/>
                 <a:tab pos="10858680" algn="l"/>
               </a:tabLst>
+              <a:defRPr/>
             </a:pPr>
             <a:endParaRPr lang="en-US" sz="1500" b="0" u="none" strike="noStrike">
               <a:solidFill>
                 <a:srgbClr val="000000"/>
               </a:solidFill>
-              <a:effectLst/>
-              <a:uFillTx/>
               <a:latin typeface="Arial"/>
             </a:endParaRPr>
           </a:p>
@@ -12329,14 +13989,13 @@
                 <a:tab pos="10134720" algn="l"/>
                 <a:tab pos="10858680" algn="l"/>
               </a:tabLst>
+              <a:defRPr/>
             </a:pPr>
             <a:r>
               <a:rPr lang="es-ES" sz="1800" b="0" u="none" strike="noStrike">
                 <a:solidFill>
                   <a:srgbClr val="000000"/>
                 </a:solidFill>
-                <a:effectLst/>
-                <a:uFillTx/>
                 <a:latin typeface="Neue Haas Grotesk Text Pro"/>
                 <a:ea typeface="DejaVu Sans"/>
               </a:rPr>
@@ -12346,8 +14005,6 @@
               <a:solidFill>
                 <a:srgbClr val="000000"/>
               </a:solidFill>
-              <a:effectLst/>
-              <a:uFillTx/>
               <a:latin typeface="Arial"/>
             </a:endParaRPr>
           </a:p>
@@ -12382,13 +14039,12 @@
                 <a:tab pos="10134720" algn="l"/>
                 <a:tab pos="10858680" algn="l"/>
               </a:tabLst>
+              <a:defRPr/>
             </a:pPr>
             <a:endParaRPr lang="en-US" sz="1500" b="0" u="none" strike="noStrike">
               <a:solidFill>
                 <a:srgbClr val="000000"/>
               </a:solidFill>
-              <a:effectLst/>
-              <a:uFillTx/>
               <a:latin typeface="Arial"/>
             </a:endParaRPr>
           </a:p>
@@ -12423,14 +14079,13 @@
                 <a:tab pos="10134720" algn="l"/>
                 <a:tab pos="10858680" algn="l"/>
               </a:tabLst>
+              <a:defRPr/>
             </a:pPr>
             <a:r>
               <a:rPr lang="es-ES" sz="1800" b="0" u="none" strike="noStrike">
                 <a:solidFill>
                   <a:srgbClr val="000000"/>
                 </a:solidFill>
-                <a:effectLst/>
-                <a:uFillTx/>
                 <a:latin typeface="Neue Haas Grotesk Text Pro"/>
                 <a:ea typeface="DejaVu Sans"/>
               </a:rPr>
@@ -12440,8 +14095,6 @@
               <a:solidFill>
                 <a:srgbClr val="000000"/>
               </a:solidFill>
-              <a:effectLst/>
-              <a:uFillTx/>
               <a:latin typeface="Arial"/>
             </a:endParaRPr>
           </a:p>
@@ -12476,13 +14129,12 @@
                 <a:tab pos="10134720" algn="l"/>
                 <a:tab pos="10858680" algn="l"/>
               </a:tabLst>
+              <a:defRPr/>
             </a:pPr>
             <a:endParaRPr lang="en-US" sz="1500" b="0" u="none" strike="noStrike">
               <a:solidFill>
                 <a:srgbClr val="000000"/>
               </a:solidFill>
-              <a:effectLst/>
-              <a:uFillTx/>
               <a:latin typeface="Arial"/>
             </a:endParaRPr>
           </a:p>
@@ -12517,14 +14169,13 @@
                 <a:tab pos="10134720" algn="l"/>
                 <a:tab pos="10858680" algn="l"/>
               </a:tabLst>
+              <a:defRPr/>
             </a:pPr>
             <a:r>
               <a:rPr lang="es-ES" sz="1800" b="0" u="none" strike="noStrike">
                 <a:solidFill>
                   <a:srgbClr val="000000"/>
                 </a:solidFill>
-                <a:effectLst/>
-                <a:uFillTx/>
                 <a:latin typeface="Neue Haas Grotesk Text Pro"/>
                 <a:ea typeface="DejaVu Sans"/>
               </a:rPr>
@@ -12534,8 +14185,6 @@
               <a:solidFill>
                 <a:srgbClr val="000000"/>
               </a:solidFill>
-              <a:effectLst/>
-              <a:uFillTx/>
               <a:latin typeface="Arial"/>
             </a:endParaRPr>
           </a:p>
@@ -12570,14 +14219,13 @@
                 <a:tab pos="10134720" algn="l"/>
                 <a:tab pos="10858680" algn="l"/>
               </a:tabLst>
+              <a:defRPr/>
             </a:pPr>
             <a:r>
               <a:rPr lang="es-ES" sz="1800" b="0" u="none" strike="noStrike">
                 <a:solidFill>
                   <a:srgbClr val="000000"/>
                 </a:solidFill>
-                <a:effectLst/>
-                <a:uFillTx/>
                 <a:latin typeface="Neue Haas Grotesk Text Pro"/>
                 <a:ea typeface="DejaVu Sans"/>
               </a:rPr>
@@ -12588,8 +14236,6 @@
                 <a:solidFill>
                   <a:srgbClr val="000000"/>
                 </a:solidFill>
-                <a:effectLst/>
-                <a:uFillTx/>
                 <a:latin typeface="Neue Haas Grotesk Text Pro"/>
                 <a:ea typeface="DejaVu Sans"/>
               </a:rPr>
@@ -12599,8 +14245,6 @@
               <a:solidFill>
                 <a:srgbClr val="000000"/>
               </a:solidFill>
-              <a:effectLst/>
-              <a:uFillTx/>
               <a:latin typeface="Arial"/>
             </a:endParaRPr>
           </a:p>
@@ -12635,13 +14279,12 @@
                 <a:tab pos="10134720" algn="l"/>
                 <a:tab pos="10858680" algn="l"/>
               </a:tabLst>
+              <a:defRPr/>
             </a:pPr>
             <a:endParaRPr lang="en-US" sz="1500" b="0" u="none" strike="noStrike">
               <a:solidFill>
                 <a:srgbClr val="000000"/>
               </a:solidFill>
-              <a:effectLst/>
-              <a:uFillTx/>
               <a:latin typeface="Arial"/>
             </a:endParaRPr>
           </a:p>
@@ -12676,14 +14319,13 @@
                 <a:tab pos="10134720" algn="l"/>
                 <a:tab pos="10858680" algn="l"/>
               </a:tabLst>
+              <a:defRPr/>
             </a:pPr>
             <a:r>
               <a:rPr lang="es-ES" sz="1800" b="0" u="none" strike="noStrike">
                 <a:solidFill>
                   <a:srgbClr val="000000"/>
                 </a:solidFill>
-                <a:effectLst/>
-                <a:uFillTx/>
                 <a:latin typeface="Neue Haas Grotesk Text Pro"/>
                 <a:ea typeface="DejaVu Sans"/>
               </a:rPr>
@@ -12693,8 +14335,6 @@
               <a:solidFill>
                 <a:srgbClr val="000000"/>
               </a:solidFill>
-              <a:effectLst/>
-              <a:uFillTx/>
               <a:latin typeface="Arial"/>
             </a:endParaRPr>
           </a:p>
@@ -12702,14 +14342,25 @@
       </p:sp>
     </p:spTree>
   </p:cSld>
+  <p:clrMapOvr>
+    <a:masterClrMapping/>
+  </p:clrMapOvr>
+  <mc:AlternateContent xmlns:mc="http://schemas.openxmlformats.org/markup-compatibility/2006">
+    <mc:Choice xmlns:p159="http://schemas.microsoft.com/office/powerpoint/2015/09/main" xmlns:p14="http://schemas.microsoft.com/office/powerpoint/2010/main" Requires="p159">
+      <p:transition p14:dur="500" advClick="1"/>
+    </mc:Choice>
+    <mc:Fallback>
+      <p:transition advClick="1"/>
+    </mc:Fallback>
+  </mc:AlternateContent>
 </p:sld>
 </file>
 
 <file path=ppt/slides/slide9.xml><?xml version="1.0" encoding="utf-8"?>
-<p:sld xmlns:a="http://schemas.openxmlformats.org/drawingml/2006/main" xmlns:p="http://schemas.openxmlformats.org/presentationml/2006/main" xmlns:r="http://schemas.openxmlformats.org/officeDocument/2006/relationships" xmlns:p14="http://schemas.microsoft.com/office/powerpoint/2010/main" xmlns:p15="http://schemas.microsoft.com/office/powerpoint/2012/main" xmlns:mc="http://schemas.openxmlformats.org/markup-compatibility/2006">
-  <p:cSld>
+<p:sld xmlns:a="http://schemas.openxmlformats.org/drawingml/2006/main" xmlns:r="http://schemas.openxmlformats.org/officeDocument/2006/relationships" xmlns:p="http://schemas.openxmlformats.org/presentationml/2006/main" xmlns:m="http://schemas.openxmlformats.org/officeDocument/2006/math" xmlns:w="http://schemas.openxmlformats.org/wordprocessingml/2006/main" xmlns:mc="http://schemas.openxmlformats.org/markup-compatibility/2006" showMasterPhAnim="0" showMasterSp="1" show="1">
+  <p:cSld name="">
     <p:bg>
-      <p:bgPr>
+      <p:bgPr shadeToTitle="0">
         <a:solidFill>
           <a:srgbClr val="FFFFFF"/>
         </a:solidFill>
@@ -12721,7 +14372,7 @@
         <p:cNvGrpSpPr/>
         <p:nvPr/>
       </p:nvGrpSpPr>
-      <p:grpSpPr>
+      <p:grpSpPr bwMode="auto">
         <a:xfrm>
           <a:off x="0" y="0"/>
           <a:ext cx="0" cy="0"/>
@@ -12731,11 +14382,11 @@
       </p:grpSpPr>
       <p:sp>
         <p:nvSpPr>
-          <p:cNvPr id="47" name=""/>
+          <p:cNvPr id="649314248" name=""/>
           <p:cNvSpPr/>
           <p:nvPr/>
         </p:nvSpPr>
-        <p:spPr>
+        <p:spPr bwMode="auto">
           <a:xfrm>
             <a:off x="1116000" y="549360"/>
             <a:ext cx="10166400" cy="1177920"/>
@@ -12787,17 +14438,16 @@
                 <a:tab pos="8983800" algn="l"/>
                 <a:tab pos="9410760" algn="l"/>
                 <a:tab pos="10134720" algn="l"/>
-                <a:tab pos="10333080" algn="l"/>
+                <a:tab pos="10333079" algn="l"/>
                 <a:tab pos="10782360" algn="l"/>
               </a:tabLst>
+              <a:defRPr/>
             </a:pPr>
             <a:r>
               <a:rPr lang="es-ES" sz="4000" b="1" u="none" strike="noStrike">
                 <a:solidFill>
                   <a:srgbClr val="000000"/>
                 </a:solidFill>
-                <a:effectLst/>
-                <a:uFillTx/>
                 <a:latin typeface="Neue Haas Grotesk Text Pro"/>
                 <a:ea typeface="DejaVu Sans"/>
               </a:rPr>
@@ -12807,8 +14457,6 @@
               <a:solidFill>
                 <a:srgbClr val="000000"/>
               </a:solidFill>
-              <a:effectLst/>
-              <a:uFillTx/>
               <a:latin typeface="Arial"/>
             </a:endParaRPr>
           </a:p>
@@ -12816,11 +14464,11 @@
       </p:sp>
       <p:sp>
         <p:nvSpPr>
-          <p:cNvPr id="48" name=""/>
+          <p:cNvPr id="1839859450" name=""/>
           <p:cNvSpPr/>
           <p:nvPr/>
         </p:nvSpPr>
-        <p:spPr>
+        <p:spPr bwMode="auto">
           <a:xfrm>
             <a:off x="8540640" y="6356520"/>
             <a:ext cx="2741760" cy="363240"/>
@@ -12873,17 +14521,16 @@
                 <a:tab pos="8985240" algn="l"/>
                 <a:tab pos="9434520" algn="l"/>
                 <a:tab pos="9883800" algn="l"/>
-                <a:tab pos="10333080" algn="l"/>
+                <a:tab pos="10333079" algn="l"/>
                 <a:tab pos="10782360" algn="l"/>
               </a:tabLst>
+              <a:defRPr/>
             </a:pPr>
             <a:fld id="{A39BD6F7-FB6A-4AA1-8522-BCF81AEB3571}" type="slidenum">
               <a:rPr lang="es-ES" sz="1200" b="0" u="none" strike="noStrike">
                 <a:solidFill>
                   <a:srgbClr val="8B8B8B"/>
                 </a:solidFill>
-                <a:effectLst/>
-                <a:uFillTx/>
                 <a:latin typeface="Neue Haas Grotesk Text Pro"/>
                 <a:ea typeface="DejaVu Sans"/>
               </a:rPr>
@@ -12893,8 +14540,6 @@
               <a:solidFill>
                 <a:srgbClr val="000000"/>
               </a:solidFill>
-              <a:effectLst/>
-              <a:uFillTx/>
               <a:latin typeface="Arial"/>
             </a:endParaRPr>
           </a:p>
@@ -12902,11 +14547,11 @@
       </p:sp>
       <p:sp>
         <p:nvSpPr>
-          <p:cNvPr id="49" name=""/>
+          <p:cNvPr id="5878220" name=""/>
           <p:cNvSpPr/>
           <p:nvPr/>
         </p:nvSpPr>
-        <p:spPr>
+        <p:spPr bwMode="auto">
           <a:xfrm>
             <a:off x="428760" y="2198520"/>
             <a:ext cx="11264760" cy="3016440"/>
@@ -12960,14 +14605,13 @@
                 <a:tab pos="10134720" algn="l"/>
                 <a:tab pos="10858680" algn="l"/>
               </a:tabLst>
+              <a:defRPr/>
             </a:pPr>
             <a:r>
               <a:rPr lang="es-ES" sz="1800" b="0" u="none" strike="noStrike">
                 <a:solidFill>
                   <a:srgbClr val="000000"/>
                 </a:solidFill>
-                <a:effectLst/>
-                <a:uFillTx/>
                 <a:latin typeface="Neue Haas Grotesk Text Pro"/>
                 <a:ea typeface="DejaVu Sans"/>
               </a:rPr>
@@ -12977,8 +14621,6 @@
               <a:solidFill>
                 <a:srgbClr val="000000"/>
               </a:solidFill>
-              <a:effectLst/>
-              <a:uFillTx/>
               <a:latin typeface="Arial"/>
             </a:endParaRPr>
           </a:p>
@@ -13013,13 +14655,12 @@
                 <a:tab pos="10134720" algn="l"/>
                 <a:tab pos="10858680" algn="l"/>
               </a:tabLst>
+              <a:defRPr/>
             </a:pPr>
             <a:endParaRPr lang="en-US" sz="1800" b="0" u="none" strike="noStrike">
               <a:solidFill>
                 <a:srgbClr val="000000"/>
               </a:solidFill>
-              <a:effectLst/>
-              <a:uFillTx/>
               <a:latin typeface="Arial"/>
             </a:endParaRPr>
           </a:p>
@@ -13054,14 +14695,13 @@
                 <a:tab pos="10134720" algn="l"/>
                 <a:tab pos="10858680" algn="l"/>
               </a:tabLst>
+              <a:defRPr/>
             </a:pPr>
             <a:r>
               <a:rPr lang="es-ES" sz="1800" b="0" u="none" strike="noStrike">
                 <a:solidFill>
                   <a:srgbClr val="000000"/>
                 </a:solidFill>
-                <a:effectLst/>
-                <a:uFillTx/>
                 <a:latin typeface="Neue Haas Grotesk Text Pro"/>
                 <a:ea typeface="DejaVu Sans"/>
               </a:rPr>
@@ -13071,8 +14711,6 @@
               <a:solidFill>
                 <a:srgbClr val="000000"/>
               </a:solidFill>
-              <a:effectLst/>
-              <a:uFillTx/>
               <a:latin typeface="Arial"/>
             </a:endParaRPr>
           </a:p>
@@ -13107,13 +14745,12 @@
                 <a:tab pos="10134720" algn="l"/>
                 <a:tab pos="10858680" algn="l"/>
               </a:tabLst>
+              <a:defRPr/>
             </a:pPr>
             <a:endParaRPr lang="en-US" sz="1500" b="0" u="none" strike="noStrike">
               <a:solidFill>
                 <a:srgbClr val="000000"/>
               </a:solidFill>
-              <a:effectLst/>
-              <a:uFillTx/>
               <a:latin typeface="Arial"/>
             </a:endParaRPr>
           </a:p>
@@ -13148,14 +14785,13 @@
                 <a:tab pos="10134720" algn="l"/>
                 <a:tab pos="10858680" algn="l"/>
               </a:tabLst>
+              <a:defRPr/>
             </a:pPr>
             <a:r>
               <a:rPr lang="es-ES" sz="1800" b="0" u="none" strike="noStrike">
                 <a:solidFill>
                   <a:srgbClr val="000000"/>
                 </a:solidFill>
-                <a:effectLst/>
-                <a:uFillTx/>
                 <a:latin typeface="Neue Haas Grotesk Text Pro"/>
                 <a:ea typeface="DejaVu Sans"/>
               </a:rPr>
@@ -13165,8 +14801,6 @@
               <a:solidFill>
                 <a:srgbClr val="000000"/>
               </a:solidFill>
-              <a:effectLst/>
-              <a:uFillTx/>
               <a:latin typeface="Arial"/>
             </a:endParaRPr>
           </a:p>
@@ -13201,13 +14835,12 @@
                 <a:tab pos="10134720" algn="l"/>
                 <a:tab pos="10858680" algn="l"/>
               </a:tabLst>
+              <a:defRPr/>
             </a:pPr>
             <a:endParaRPr lang="en-US" sz="1500" b="0" u="none" strike="noStrike">
               <a:solidFill>
                 <a:srgbClr val="000000"/>
               </a:solidFill>
-              <a:effectLst/>
-              <a:uFillTx/>
               <a:latin typeface="Arial"/>
             </a:endParaRPr>
           </a:p>
@@ -13242,14 +14875,13 @@
                 <a:tab pos="10134720" algn="l"/>
                 <a:tab pos="10858680" algn="l"/>
               </a:tabLst>
+              <a:defRPr/>
             </a:pPr>
             <a:r>
               <a:rPr lang="es-ES" sz="1800" b="0" u="none" strike="noStrike">
                 <a:solidFill>
                   <a:srgbClr val="000000"/>
                 </a:solidFill>
-                <a:effectLst/>
-                <a:uFillTx/>
                 <a:latin typeface="Neue Haas Grotesk Text Pro"/>
                 <a:ea typeface="DejaVu Sans"/>
               </a:rPr>
@@ -13259,8 +14891,6 @@
               <a:solidFill>
                 <a:srgbClr val="000000"/>
               </a:solidFill>
-              <a:effectLst/>
-              <a:uFillTx/>
               <a:latin typeface="Arial"/>
             </a:endParaRPr>
           </a:p>
@@ -13295,14 +14925,13 @@
                 <a:tab pos="10134720" algn="l"/>
                 <a:tab pos="10858680" algn="l"/>
               </a:tabLst>
+              <a:defRPr/>
             </a:pPr>
             <a:r>
               <a:rPr lang="es-ES" sz="1800" b="0" u="none" strike="noStrike">
                 <a:solidFill>
                   <a:srgbClr val="000000"/>
                 </a:solidFill>
-                <a:effectLst/>
-                <a:uFillTx/>
                 <a:latin typeface="Neue Haas Grotesk Text Pro"/>
                 <a:ea typeface="DejaVu Sans"/>
               </a:rPr>
@@ -13313,8 +14942,6 @@
                 <a:solidFill>
                   <a:srgbClr val="000000"/>
                 </a:solidFill>
-                <a:effectLst/>
-                <a:uFillTx/>
                 <a:latin typeface="Neue Haas Grotesk Text Pro"/>
                 <a:ea typeface="DejaVu Sans"/>
               </a:rPr>
@@ -13325,8 +14952,6 @@
                 <a:solidFill>
                   <a:srgbClr val="000000"/>
                 </a:solidFill>
-                <a:effectLst/>
-                <a:uFillTx/>
                 <a:latin typeface="Neue Haas Grotesk Text Pro"/>
                 <a:ea typeface="DejaVu Sans"/>
               </a:rPr>
@@ -13337,8 +14962,6 @@
                 <a:solidFill>
                   <a:srgbClr val="000000"/>
                 </a:solidFill>
-                <a:effectLst/>
-                <a:uFillTx/>
                 <a:latin typeface="Neue Haas Grotesk Text Pro"/>
                 <a:ea typeface="DejaVu Sans"/>
               </a:rPr>
@@ -13349,8 +14972,6 @@
                 <a:solidFill>
                   <a:srgbClr val="000000"/>
                 </a:solidFill>
-                <a:effectLst/>
-                <a:uFillTx/>
                 <a:latin typeface="Neue Haas Grotesk Text Pro"/>
                 <a:ea typeface="DejaVu Sans"/>
               </a:rPr>
@@ -13360,8 +14981,6 @@
               <a:solidFill>
                 <a:srgbClr val="000000"/>
               </a:solidFill>
-              <a:effectLst/>
-              <a:uFillTx/>
               <a:latin typeface="Arial"/>
             </a:endParaRPr>
           </a:p>
@@ -13396,13 +15015,12 @@
                 <a:tab pos="10134720" algn="l"/>
                 <a:tab pos="10858680" algn="l"/>
               </a:tabLst>
+              <a:defRPr/>
             </a:pPr>
             <a:endParaRPr lang="en-US" sz="1800" b="0" u="none" strike="noStrike">
               <a:solidFill>
                 <a:srgbClr val="000000"/>
               </a:solidFill>
-              <a:effectLst/>
-              <a:uFillTx/>
               <a:latin typeface="Arial"/>
             </a:endParaRPr>
           </a:p>
@@ -13410,11 +15028,22 @@
       </p:sp>
     </p:spTree>
   </p:cSld>
+  <p:clrMapOvr>
+    <a:masterClrMapping/>
+  </p:clrMapOvr>
+  <mc:AlternateContent xmlns:mc="http://schemas.openxmlformats.org/markup-compatibility/2006">
+    <mc:Choice xmlns:p159="http://schemas.microsoft.com/office/powerpoint/2015/09/main" xmlns:p14="http://schemas.microsoft.com/office/powerpoint/2010/main" Requires="p159">
+      <p:transition p14:dur="500" advClick="1"/>
+    </mc:Choice>
+    <mc:Fallback>
+      <p:transition advClick="1"/>
+    </mc:Fallback>
+  </mc:AlternateContent>
 </p:sld>
 </file>
 
 <file path=ppt/theme/theme1.xml><?xml version="1.0" encoding="utf-8"?>
-<a:theme xmlns:a="http://schemas.openxmlformats.org/drawingml/2006/main" xmlns:r="http://schemas.openxmlformats.org/officeDocument/2006/relationships" name="Office">
+<a:theme xmlns:a="http://schemas.openxmlformats.org/drawingml/2006/main" xmlns:r="http://schemas.openxmlformats.org/officeDocument/2006/relationships" xmlns:p="http://schemas.openxmlformats.org/presentationml/2006/main" name="Office">
   <a:themeElements>
     <a:clrScheme name="LibreOffice">
       <a:dk1>
@@ -13456,17 +15085,17 @@
     </a:clrScheme>
     <a:fontScheme name="Office">
       <a:majorFont>
-        <a:latin typeface="Arial" pitchFamily="0" charset="1"/>
-        <a:ea typeface="DejaVu Sans" pitchFamily="0" charset="1"/>
-        <a:cs typeface="DejaVu Sans" pitchFamily="0" charset="1"/>
+        <a:latin typeface="Arial"/>
+        <a:ea typeface="DejaVu Sans"/>
+        <a:cs typeface="DejaVu Sans"/>
       </a:majorFont>
       <a:minorFont>
-        <a:latin typeface="Arial" pitchFamily="0" charset="1"/>
-        <a:ea typeface="DejaVu Sans" pitchFamily="0" charset="1"/>
-        <a:cs typeface="DejaVu Sans" pitchFamily="0" charset="1"/>
+        <a:latin typeface="Arial"/>
+        <a:ea typeface="DejaVu Sans"/>
+        <a:cs typeface="DejaVu Sans"/>
       </a:minorFont>
     </a:fontScheme>
-    <a:fmtScheme>
+    <a:fmtScheme name="">
       <a:fillStyleLst>
         <a:solidFill>
           <a:schemeClr val="phClr"/>
@@ -13516,5 +15145,113 @@
       </a:bgFillStyleLst>
     </a:fmtScheme>
   </a:themeElements>
+  <a:objectDefaults/>
+</a:theme>
+</file>
+
+<file path=ppt/theme/theme2.xml><?xml version="1.0" encoding="utf-8"?>
+<a:theme xmlns:a="http://schemas.openxmlformats.org/drawingml/2006/main" xmlns:r="http://schemas.openxmlformats.org/officeDocument/2006/relationships" xmlns:p="http://schemas.openxmlformats.org/presentationml/2006/main" name="Office">
+  <a:themeElements>
+    <a:clrScheme name="LibreOffice">
+      <a:dk1>
+        <a:srgbClr val="000000"/>
+      </a:dk1>
+      <a:lt1>
+        <a:srgbClr val="FFFFFF"/>
+      </a:lt1>
+      <a:dk2>
+        <a:srgbClr val="000000"/>
+      </a:dk2>
+      <a:lt2>
+        <a:srgbClr val="FFFFFF"/>
+      </a:lt2>
+      <a:accent1>
+        <a:srgbClr val="18A303"/>
+      </a:accent1>
+      <a:accent2>
+        <a:srgbClr val="0369A3"/>
+      </a:accent2>
+      <a:accent3>
+        <a:srgbClr val="A33E03"/>
+      </a:accent3>
+      <a:accent4>
+        <a:srgbClr val="8E03A3"/>
+      </a:accent4>
+      <a:accent5>
+        <a:srgbClr val="C99C00"/>
+      </a:accent5>
+      <a:accent6>
+        <a:srgbClr val="C9211E"/>
+      </a:accent6>
+      <a:hlink>
+        <a:srgbClr val="0000EE"/>
+      </a:hlink>
+      <a:folHlink>
+        <a:srgbClr val="551A8B"/>
+      </a:folHlink>
+    </a:clrScheme>
+    <a:fontScheme name="">
+      <a:majorFont>
+        <a:latin typeface="Arial"/>
+        <a:ea typeface="DejaVu Sans"/>
+        <a:cs typeface="DejaVu Sans"/>
+      </a:majorFont>
+      <a:minorFont>
+        <a:latin typeface="Arial"/>
+        <a:ea typeface="DejaVu Sans"/>
+        <a:cs typeface="DejaVu Sans"/>
+      </a:minorFont>
+    </a:fontScheme>
+    <a:fmtScheme name="">
+      <a:fillStyleLst>
+        <a:solidFill>
+          <a:schemeClr val="phClr"/>
+        </a:solidFill>
+        <a:solidFill>
+          <a:schemeClr val="phClr"/>
+        </a:solidFill>
+        <a:solidFill>
+          <a:schemeClr val="phClr"/>
+        </a:solidFill>
+      </a:fillStyleLst>
+      <a:lnStyleLst>
+        <a:ln w="6350" cap="flat" cmpd="sng" algn="ctr">
+          <a:prstDash val="solid"/>
+          <a:miter/>
+        </a:ln>
+        <a:ln w="6350" cap="flat" cmpd="sng" algn="ctr">
+          <a:prstDash val="solid"/>
+          <a:miter/>
+        </a:ln>
+        <a:ln w="6350" cap="flat" cmpd="sng" algn="ctr">
+          <a:prstDash val="solid"/>
+          <a:miter/>
+        </a:ln>
+      </a:lnStyleLst>
+      <a:effectStyleLst>
+        <a:effectStyle>
+          <a:effectLst/>
+        </a:effectStyle>
+        <a:effectStyle>
+          <a:effectLst/>
+        </a:effectStyle>
+        <a:effectStyle>
+          <a:effectLst/>
+        </a:effectStyle>
+      </a:effectStyleLst>
+      <a:bgFillStyleLst>
+        <a:solidFill>
+          <a:schemeClr val="phClr"/>
+        </a:solidFill>
+        <a:solidFill>
+          <a:schemeClr val="phClr"/>
+        </a:solidFill>
+        <a:solidFill>
+          <a:schemeClr val="phClr"/>
+        </a:solidFill>
+      </a:bgFillStyleLst>
+    </a:fmtScheme>
+  </a:themeElements>
+  <a:objectDefaults/>
 </a:theme>
 </file>